--- a/docs/apresentacao.pptx
+++ b/docs/apresentacao.pptx
@@ -3721,7 +3721,7 @@
                   <a:srgbClr val="94A3B8"/>
                 </a:solidFill>
               </a:rPr>
-              <a:t>Pirâmide de testes · JaCoCo enforce 80% · OWASP Dependency Check</a:t>
+              <a:t>Pirâmide de testes · JaCoCo enforce 80% · OWASP Dependency Check · SonarCloud Quality Gate</a:t>
             </a:r>
           </a:p>
         </p:txBody>
@@ -4467,12 +4467,12 @@
           <a:p>
             <a:pPr algn="l"/>
             <a:r>
-              <a:rPr sz="1200" b="0" i="0">
+              <a:rPr sz="1100" b="0" i="0">
                 <a:solidFill>
                   <a:srgbClr val="14B8A6"/>
                 </a:solidFill>
               </a:rPr>
-              <a:t>mvn test   ·   mvn verify -Ddependency-check.skip=true   ·   mvn dependency-check:check</a:t>
+              <a:t>mvn test   ·   mvn verify   ·   mvn dependency-check:check   ·   GitHub Actions: mvn verify sonar:sonar  →  Quality Gate bloqueante</a:t>
             </a:r>
           </a:p>
         </p:txBody>
@@ -6833,7 +6833,109 @@
       </p:sp>
       <p:sp>
         <p:nvSpPr>
-          <p:cNvPr id="30" name="Rectangle 29"/>
+          <p:cNvPr id="30" name="TextBox 29"/>
+          <p:cNvSpPr txBox="1"/>
+          <p:nvPr/>
+        </p:nvSpPr>
+        <p:spPr>
+          <a:xfrm>
+            <a:off x="228600" y="6501384"/>
+            <a:ext cx="457200" cy="530352"/>
+          </a:xfrm>
+          <a:prstGeom prst="rect">
+            <a:avLst/>
+          </a:prstGeom>
+          <a:noFill/>
+        </p:spPr>
+        <p:txBody>
+          <a:bodyPr wrap="square">
+            <a:spAutoFit/>
+          </a:bodyPr>
+          <a:lstStyle/>
+          <a:p>
+            <a:pPr algn="ctr"/>
+            <a:r>
+              <a:rPr sz="1800" b="0" i="0">
+                <a:solidFill>
+                  <a:srgbClr val="FFFFFF"/>
+                </a:solidFill>
+              </a:rPr>
+              <a:t>✅</a:t>
+            </a:r>
+          </a:p>
+        </p:txBody>
+      </p:sp>
+      <p:sp>
+        <p:nvSpPr>
+          <p:cNvPr id="31" name="TextBox 30"/>
+          <p:cNvSpPr txBox="1"/>
+          <p:nvPr/>
+        </p:nvSpPr>
+        <p:spPr>
+          <a:xfrm>
+            <a:off x="731520" y="6519672"/>
+            <a:ext cx="4114800" cy="320040"/>
+          </a:xfrm>
+          <a:prstGeom prst="rect">
+            <a:avLst/>
+          </a:prstGeom>
+          <a:noFill/>
+        </p:spPr>
+        <p:txBody>
+          <a:bodyPr wrap="square">
+            <a:spAutoFit/>
+          </a:bodyPr>
+          <a:lstStyle/>
+          <a:p>
+            <a:pPr algn="l"/>
+            <a:r>
+              <a:rPr sz="1400" b="1" i="0">
+                <a:solidFill>
+                  <a:srgbClr val="14B8A6"/>
+                </a:solidFill>
+              </a:rPr>
+              <a:t>CI com SonarCloud</a:t>
+            </a:r>
+          </a:p>
+        </p:txBody>
+      </p:sp>
+      <p:sp>
+        <p:nvSpPr>
+          <p:cNvPr id="32" name="TextBox 31"/>
+          <p:cNvSpPr txBox="1"/>
+          <p:nvPr/>
+        </p:nvSpPr>
+        <p:spPr>
+          <a:xfrm>
+            <a:off x="4937760" y="6519672"/>
+            <a:ext cx="6995160" cy="320040"/>
+          </a:xfrm>
+          <a:prstGeom prst="rect">
+            <a:avLst/>
+          </a:prstGeom>
+          <a:noFill/>
+        </p:spPr>
+        <p:txBody>
+          <a:bodyPr wrap="square">
+            <a:spAutoFit/>
+          </a:bodyPr>
+          <a:lstStyle/>
+          <a:p>
+            <a:pPr algn="l"/>
+            <a:r>
+              <a:rPr sz="1200" b="0" i="0">
+                <a:solidFill>
+                  <a:srgbClr val="94A3B8"/>
+                </a:solidFill>
+              </a:rPr>
+              <a:t>GitHub Actions: build → testes → JaCoCo → sonar:sonar · Quality Gate bloqueante na branch main</a:t>
+            </a:r>
+          </a:p>
+        </p:txBody>
+      </p:sp>
+      <p:sp>
+        <p:nvSpPr>
+          <p:cNvPr id="33" name="Rectangle 32"/>
           <p:cNvSpPr/>
           <p:nvPr/>
         </p:nvSpPr>
@@ -6876,7 +6978,7 @@
       </p:sp>
       <p:sp>
         <p:nvSpPr>
-          <p:cNvPr id="31" name="TextBox 30"/>
+          <p:cNvPr id="34" name="TextBox 33"/>
           <p:cNvSpPr txBox="1"/>
           <p:nvPr/>
         </p:nvSpPr>

--- a/docs/apresentacao.pptx
+++ b/docs/apresentacao.pptx
@@ -17,6 +17,7 @@
     <p:sldId id="265" r:id="rId16"/>
     <p:sldId id="266" r:id="rId17"/>
     <p:sldId id="267" r:id="rId18"/>
+    <p:sldId id="268" r:id="rId19"/>
   </p:sldIdLst>
   <p:sldSz cx="12188952" cy="6858000" type="screen4x3"/>
   <p:notesSz cx="6858000" cy="9144000"/>
@@ -4553,7 +4554,7 @@
             <a:avLst/>
           </a:prstGeom>
           <a:solidFill>
-            <a:srgbClr val="14B8A6"/>
+            <a:srgbClr val="F59E0B"/>
           </a:solidFill>
           <a:ln>
             <a:noFill/>
@@ -4607,7 +4608,7 @@
             <a:r>
               <a:rPr sz="4400" b="1" i="0">
                 <a:solidFill>
-                  <a:srgbClr val="14B8A6"/>
+                  <a:srgbClr val="F59E0B"/>
                 </a:solidFill>
               </a:rPr>
               <a:t>10</a:t>
@@ -4644,7 +4645,7 @@
                   <a:srgbClr val="FFFFFF"/>
                 </a:solidFill>
               </a:rPr>
-              <a:t>Demonstração</a:t>
+              <a:t>Débitos Técnicos Conhecidos</a:t>
             </a:r>
           </a:p>
         </p:txBody>
@@ -4678,23 +4679,66 @@
                   <a:srgbClr val="94A3B8"/>
                 </a:solidFill>
               </a:rPr>
-              <a:t>docker-compose up --build  →  http://localhost:8080/swagger-ui.html</a:t>
-            </a:r>
-          </a:p>
-        </p:txBody>
-      </p:sp>
-      <p:sp>
-        <p:nvSpPr>
-          <p:cNvPr id="7" name="Rounded Rectangle 6"/>
+              <a:t>Decisões conscientes de MVP — identificadas, documentadas, priorizadas para a próxima fase</a:t>
+            </a:r>
+          </a:p>
+        </p:txBody>
+      </p:sp>
+      <p:sp>
+        <p:nvSpPr>
+          <p:cNvPr id="7" name="Rectangle 6"/>
           <p:cNvSpPr/>
           <p:nvPr/>
         </p:nvSpPr>
         <p:spPr>
           <a:xfrm>
-            <a:off x="228600" y="1874519"/>
-            <a:ext cx="530352" cy="868680"/>
-          </a:xfrm>
-          <a:prstGeom prst="roundRect">
+            <a:off x="228600" y="1828800"/>
+            <a:ext cx="11731752" cy="1371600"/>
+          </a:xfrm>
+          <a:prstGeom prst="rect">
+            <a:avLst/>
+          </a:prstGeom>
+          <a:solidFill>
+            <a:srgbClr val="162944"/>
+          </a:solidFill>
+          <a:ln>
+            <a:noFill/>
+          </a:ln>
+        </p:spPr>
+        <p:style>
+          <a:lnRef idx="1">
+            <a:schemeClr val="accent1"/>
+          </a:lnRef>
+          <a:fillRef idx="3">
+            <a:schemeClr val="accent1"/>
+          </a:fillRef>
+          <a:effectRef idx="2">
+            <a:schemeClr val="accent1"/>
+          </a:effectRef>
+          <a:fontRef idx="minor">
+            <a:schemeClr val="lt1"/>
+          </a:fontRef>
+        </p:style>
+        <p:txBody>
+          <a:bodyPr rtlCol="0" anchor="ctr"/>
+          <a:lstStyle/>
+          <a:p>
+            <a:pPr algn="ctr"/>
+          </a:p>
+        </p:txBody>
+      </p:sp>
+      <p:sp>
+        <p:nvSpPr>
+          <p:cNvPr id="8" name="Rectangle 7"/>
+          <p:cNvSpPr/>
+          <p:nvPr/>
+        </p:nvSpPr>
+        <p:spPr>
+          <a:xfrm>
+            <a:off x="228600" y="1828800"/>
+            <a:ext cx="64008" cy="1371600"/>
+          </a:xfrm>
+          <a:prstGeom prst="rect">
             <a:avLst/>
           </a:prstGeom>
           <a:solidFill>
@@ -4728,48 +4772,14 @@
       </p:sp>
       <p:sp>
         <p:nvSpPr>
-          <p:cNvPr id="8" name="TextBox 7"/>
-          <p:cNvSpPr txBox="1"/>
-          <p:nvPr/>
-        </p:nvSpPr>
-        <p:spPr>
-          <a:xfrm>
-            <a:off x="228600" y="1874519"/>
-            <a:ext cx="530352" cy="868680"/>
-          </a:xfrm>
-          <a:prstGeom prst="rect">
-            <a:avLst/>
-          </a:prstGeom>
-          <a:noFill/>
-        </p:spPr>
-        <p:txBody>
-          <a:bodyPr wrap="square">
-            <a:spAutoFit/>
-          </a:bodyPr>
-          <a:lstStyle/>
-          <a:p>
-            <a:pPr algn="ctr"/>
-            <a:r>
-              <a:rPr sz="2000" b="1" i="0">
-                <a:solidFill>
-                  <a:srgbClr val="0D172A"/>
-                </a:solidFill>
-              </a:rPr>
-              <a:t>1</a:t>
-            </a:r>
-          </a:p>
-        </p:txBody>
-      </p:sp>
-      <p:sp>
-        <p:nvSpPr>
           <p:cNvPr id="9" name="TextBox 8"/>
           <p:cNvSpPr txBox="1"/>
           <p:nvPr/>
         </p:nvSpPr>
         <p:spPr>
           <a:xfrm>
-            <a:off x="850392" y="1920239"/>
-            <a:ext cx="5212080" cy="365760"/>
+            <a:off x="502920" y="1938528"/>
+            <a:ext cx="11247120" cy="320040"/>
           </a:xfrm>
           <a:prstGeom prst="rect">
             <a:avLst/>
@@ -4789,7 +4799,7 @@
                   <a:srgbClr val="FB923C"/>
                 </a:solidFill>
               </a:rPr>
-              <a:t>Login</a:t>
+              <a:t>Mappers manuais</a:t>
             </a:r>
           </a:p>
         </p:txBody>
@@ -4802,8 +4812,8 @@
         </p:nvSpPr>
         <p:spPr>
           <a:xfrm>
-            <a:off x="850392" y="2331719"/>
-            <a:ext cx="5212080" cy="411480"/>
+            <a:off x="502920" y="2304288"/>
+            <a:ext cx="5303520" cy="685800"/>
           </a:xfrm>
           <a:prstGeom prst="rect">
             <a:avLst/>
@@ -4823,23 +4833,100 @@
                   <a:srgbClr val="94A3B8"/>
                 </a:solidFill>
               </a:rPr>
-              <a:t>POST /api/auth/login — obtém access token + refresh token</a:t>
-            </a:r>
-          </a:p>
-        </p:txBody>
-      </p:sp>
-      <p:sp>
-        <p:nvSpPr>
-          <p:cNvPr id="11" name="Rounded Rectangle 10"/>
+              <a:t>⚠ Conversão JPA Entity ↔ Domain Object feita à mão nos adapters de persistência.</a:t>
+            </a:r>
+          </a:p>
+        </p:txBody>
+      </p:sp>
+      <p:sp>
+        <p:nvSpPr>
+          <p:cNvPr id="11" name="TextBox 10"/>
+          <p:cNvSpPr txBox="1"/>
+          <p:nvPr/>
+        </p:nvSpPr>
+        <p:spPr>
+          <a:xfrm>
+            <a:off x="5989320" y="2304288"/>
+            <a:ext cx="5760720" cy="685800"/>
+          </a:xfrm>
+          <a:prstGeom prst="rect">
+            <a:avLst/>
+          </a:prstGeom>
+          <a:noFill/>
+        </p:spPr>
+        <p:txBody>
+          <a:bodyPr wrap="square">
+            <a:spAutoFit/>
+          </a:bodyPr>
+          <a:lstStyle/>
+          <a:p>
+            <a:pPr algn="l"/>
+            <a:r>
+              <a:rPr sz="1100" b="0" i="0">
+                <a:solidFill>
+                  <a:srgbClr val="FFFFFF"/>
+                </a:solidFill>
+              </a:rPr>
+              <a:t>→ MapStruct — geração em compile-time, campo faltante vira erro de compilação, zero overhead em runtime.</a:t>
+            </a:r>
+          </a:p>
+        </p:txBody>
+      </p:sp>
+      <p:sp>
+        <p:nvSpPr>
+          <p:cNvPr id="12" name="Rectangle 11"/>
           <p:cNvSpPr/>
           <p:nvPr/>
         </p:nvSpPr>
         <p:spPr>
           <a:xfrm>
-            <a:off x="228600" y="2971800"/>
-            <a:ext cx="530352" cy="868680"/>
-          </a:xfrm>
-          <a:prstGeom prst="roundRect">
+            <a:off x="228600" y="3337560"/>
+            <a:ext cx="11731752" cy="1371600"/>
+          </a:xfrm>
+          <a:prstGeom prst="rect">
+            <a:avLst/>
+          </a:prstGeom>
+          <a:solidFill>
+            <a:srgbClr val="162944"/>
+          </a:solidFill>
+          <a:ln>
+            <a:noFill/>
+          </a:ln>
+        </p:spPr>
+        <p:style>
+          <a:lnRef idx="1">
+            <a:schemeClr val="accent1"/>
+          </a:lnRef>
+          <a:fillRef idx="3">
+            <a:schemeClr val="accent1"/>
+          </a:fillRef>
+          <a:effectRef idx="2">
+            <a:schemeClr val="accent1"/>
+          </a:effectRef>
+          <a:fontRef idx="minor">
+            <a:schemeClr val="lt1"/>
+          </a:fontRef>
+        </p:style>
+        <p:txBody>
+          <a:bodyPr rtlCol="0" anchor="ctr"/>
+          <a:lstStyle/>
+          <a:p>
+            <a:pPr algn="ctr"/>
+          </a:p>
+        </p:txBody>
+      </p:sp>
+      <p:sp>
+        <p:nvSpPr>
+          <p:cNvPr id="13" name="Rectangle 12"/>
+          <p:cNvSpPr/>
+          <p:nvPr/>
+        </p:nvSpPr>
+        <p:spPr>
+          <a:xfrm>
+            <a:off x="228600" y="3337560"/>
+            <a:ext cx="64008" cy="1371600"/>
+          </a:xfrm>
+          <a:prstGeom prst="rect">
             <a:avLst/>
           </a:prstGeom>
           <a:solidFill>
@@ -4873,48 +4960,14 @@
       </p:sp>
       <p:sp>
         <p:nvSpPr>
-          <p:cNvPr id="12" name="TextBox 11"/>
-          <p:cNvSpPr txBox="1"/>
-          <p:nvPr/>
-        </p:nvSpPr>
-        <p:spPr>
-          <a:xfrm>
-            <a:off x="228600" y="2971800"/>
-            <a:ext cx="530352" cy="868680"/>
-          </a:xfrm>
-          <a:prstGeom prst="rect">
-            <a:avLst/>
-          </a:prstGeom>
-          <a:noFill/>
-        </p:spPr>
-        <p:txBody>
-          <a:bodyPr wrap="square">
-            <a:spAutoFit/>
-          </a:bodyPr>
-          <a:lstStyle/>
-          <a:p>
-            <a:pPr algn="ctr"/>
-            <a:r>
-              <a:rPr sz="2000" b="1" i="0">
-                <a:solidFill>
-                  <a:srgbClr val="0D172A"/>
-                </a:solidFill>
-              </a:rPr>
-              <a:t>2</a:t>
-            </a:r>
-          </a:p>
-        </p:txBody>
-      </p:sp>
-      <p:sp>
-        <p:nvSpPr>
-          <p:cNvPr id="13" name="TextBox 12"/>
-          <p:cNvSpPr txBox="1"/>
-          <p:nvPr/>
-        </p:nvSpPr>
-        <p:spPr>
-          <a:xfrm>
-            <a:off x="850392" y="3017520"/>
-            <a:ext cx="5212080" cy="365760"/>
+          <p:cNvPr id="14" name="TextBox 13"/>
+          <p:cNvSpPr txBox="1"/>
+          <p:nvPr/>
+        </p:nvSpPr>
+        <p:spPr>
+          <a:xfrm>
+            <a:off x="502920" y="3447288"/>
+            <a:ext cx="11247120" cy="320040"/>
           </a:xfrm>
           <a:prstGeom prst="rect">
             <a:avLst/>
@@ -4934,21 +4987,21 @@
                   <a:srgbClr val="3B82F6"/>
                 </a:solidFill>
               </a:rPr>
-              <a:t>Cadastrar Cliente</a:t>
-            </a:r>
-          </a:p>
-        </p:txBody>
-      </p:sp>
-      <p:sp>
-        <p:nvSpPr>
-          <p:cNvPr id="14" name="TextBox 13"/>
-          <p:cNvSpPr txBox="1"/>
-          <p:nvPr/>
-        </p:nvSpPr>
-        <p:spPr>
-          <a:xfrm>
-            <a:off x="850392" y="3429000"/>
-            <a:ext cx="5212080" cy="411480"/>
+              <a:t>Notificação stub</a:t>
+            </a:r>
+          </a:p>
+        </p:txBody>
+      </p:sp>
+      <p:sp>
+        <p:nvSpPr>
+          <p:cNvPr id="15" name="TextBox 14"/>
+          <p:cNvSpPr txBox="1"/>
+          <p:nvPr/>
+        </p:nvSpPr>
+        <p:spPr>
+          <a:xfrm>
+            <a:off x="502920" y="3813048"/>
+            <a:ext cx="5303520" cy="685800"/>
           </a:xfrm>
           <a:prstGeom prst="rect">
             <a:avLst/>
@@ -4968,23 +5021,100 @@
                   <a:srgbClr val="94A3B8"/>
                 </a:solidFill>
               </a:rPr>
-              <a:t>POST /api/clientes — CPF validado por dígito verificador</a:t>
-            </a:r>
-          </a:p>
-        </p:txBody>
-      </p:sp>
-      <p:sp>
-        <p:nvSpPr>
-          <p:cNvPr id="15" name="Rounded Rectangle 14"/>
+              <a:t>⚠ NotificacaoService é um port sem implementação concreta. E-mail e SMS não são enviados.</a:t>
+            </a:r>
+          </a:p>
+        </p:txBody>
+      </p:sp>
+      <p:sp>
+        <p:nvSpPr>
+          <p:cNvPr id="16" name="TextBox 15"/>
+          <p:cNvSpPr txBox="1"/>
+          <p:nvPr/>
+        </p:nvSpPr>
+        <p:spPr>
+          <a:xfrm>
+            <a:off x="5989320" y="3813048"/>
+            <a:ext cx="5760720" cy="685800"/>
+          </a:xfrm>
+          <a:prstGeom prst="rect">
+            <a:avLst/>
+          </a:prstGeom>
+          <a:noFill/>
+        </p:spPr>
+        <p:txBody>
+          <a:bodyPr wrap="square">
+            <a:spAutoFit/>
+          </a:bodyPr>
+          <a:lstStyle/>
+          <a:p>
+            <a:pPr algn="l"/>
+            <a:r>
+              <a:rPr sz="1100" b="0" i="0">
+                <a:solidFill>
+                  <a:srgbClr val="FFFFFF"/>
+                </a:solidFill>
+              </a:rPr>
+              <a:t>→ Adapter com JavaMail / SendGrid / AWS SES. Canal ainda indefinido — Hot Spot PA2 do Event Storming.</a:t>
+            </a:r>
+          </a:p>
+        </p:txBody>
+      </p:sp>
+      <p:sp>
+        <p:nvSpPr>
+          <p:cNvPr id="17" name="Rectangle 16"/>
           <p:cNvSpPr/>
           <p:nvPr/>
         </p:nvSpPr>
         <p:spPr>
           <a:xfrm>
-            <a:off x="228600" y="4069079"/>
-            <a:ext cx="530352" cy="868680"/>
-          </a:xfrm>
-          <a:prstGeom prst="roundRect">
+            <a:off x="228600" y="4846320"/>
+            <a:ext cx="11731752" cy="1371600"/>
+          </a:xfrm>
+          <a:prstGeom prst="rect">
+            <a:avLst/>
+          </a:prstGeom>
+          <a:solidFill>
+            <a:srgbClr val="162944"/>
+          </a:solidFill>
+          <a:ln>
+            <a:noFill/>
+          </a:ln>
+        </p:spPr>
+        <p:style>
+          <a:lnRef idx="1">
+            <a:schemeClr val="accent1"/>
+          </a:lnRef>
+          <a:fillRef idx="3">
+            <a:schemeClr val="accent1"/>
+          </a:fillRef>
+          <a:effectRef idx="2">
+            <a:schemeClr val="accent1"/>
+          </a:effectRef>
+          <a:fontRef idx="minor">
+            <a:schemeClr val="lt1"/>
+          </a:fontRef>
+        </p:style>
+        <p:txBody>
+          <a:bodyPr rtlCol="0" anchor="ctr"/>
+          <a:lstStyle/>
+          <a:p>
+            <a:pPr algn="ctr"/>
+          </a:p>
+        </p:txBody>
+      </p:sp>
+      <p:sp>
+        <p:nvSpPr>
+          <p:cNvPr id="18" name="Rectangle 17"/>
+          <p:cNvSpPr/>
+          <p:nvPr/>
+        </p:nvSpPr>
+        <p:spPr>
+          <a:xfrm>
+            <a:off x="228600" y="4846320"/>
+            <a:ext cx="64008" cy="1371600"/>
+          </a:xfrm>
+          <a:prstGeom prst="rect">
             <a:avLst/>
           </a:prstGeom>
           <a:solidFill>
@@ -5018,48 +5148,14 @@
       </p:sp>
       <p:sp>
         <p:nvSpPr>
-          <p:cNvPr id="16" name="TextBox 15"/>
-          <p:cNvSpPr txBox="1"/>
-          <p:nvPr/>
-        </p:nvSpPr>
-        <p:spPr>
-          <a:xfrm>
-            <a:off x="228600" y="4069079"/>
-            <a:ext cx="530352" cy="868680"/>
-          </a:xfrm>
-          <a:prstGeom prst="rect">
-            <a:avLst/>
-          </a:prstGeom>
-          <a:noFill/>
-        </p:spPr>
-        <p:txBody>
-          <a:bodyPr wrap="square">
-            <a:spAutoFit/>
-          </a:bodyPr>
-          <a:lstStyle/>
-          <a:p>
-            <a:pPr algn="ctr"/>
-            <a:r>
-              <a:rPr sz="2000" b="1" i="0">
-                <a:solidFill>
-                  <a:srgbClr val="0D172A"/>
-                </a:solidFill>
-              </a:rPr>
-              <a:t>3</a:t>
-            </a:r>
-          </a:p>
-        </p:txBody>
-      </p:sp>
-      <p:sp>
-        <p:nvSpPr>
-          <p:cNvPr id="17" name="TextBox 16"/>
-          <p:cNvSpPr txBox="1"/>
-          <p:nvPr/>
-        </p:nvSpPr>
-        <p:spPr>
-          <a:xfrm>
-            <a:off x="850392" y="4114799"/>
-            <a:ext cx="5212080" cy="365760"/>
+          <p:cNvPr id="19" name="TextBox 18"/>
+          <p:cNvSpPr txBox="1"/>
+          <p:nvPr/>
+        </p:nvSpPr>
+        <p:spPr>
+          <a:xfrm>
+            <a:off x="502920" y="4956048"/>
+            <a:ext cx="11247120" cy="320040"/>
           </a:xfrm>
           <a:prstGeom prst="rect">
             <a:avLst/>
@@ -5079,21 +5175,21 @@
                   <a:srgbClr val="14B8A6"/>
                 </a:solidFill>
               </a:rPr>
-              <a:t>Cadastrar Veículo</a:t>
-            </a:r>
-          </a:p>
-        </p:txBody>
-      </p:sp>
-      <p:sp>
-        <p:nvSpPr>
-          <p:cNvPr id="18" name="TextBox 17"/>
-          <p:cNvSpPr txBox="1"/>
-          <p:nvPr/>
-        </p:nvSpPr>
-        <p:spPr>
-          <a:xfrm>
-            <a:off x="850392" y="4526279"/>
-            <a:ext cx="5212080" cy="411480"/>
+              <a:t>Reconstituidor com 9 parâmetros</a:t>
+            </a:r>
+          </a:p>
+        </p:txBody>
+      </p:sp>
+      <p:sp>
+        <p:nvSpPr>
+          <p:cNvPr id="20" name="TextBox 19"/>
+          <p:cNvSpPr txBox="1"/>
+          <p:nvPr/>
+        </p:nvSpPr>
+        <p:spPr>
+          <a:xfrm>
+            <a:off x="502920" y="5321808"/>
+            <a:ext cx="5303520" cy="685800"/>
           </a:xfrm>
           <a:prstGeom prst="rect">
             <a:avLst/>
@@ -5113,27 +5209,61 @@
                   <a:srgbClr val="94A3B8"/>
                 </a:solidFill>
               </a:rPr>
-              <a:t>POST /api/veiculos — placa formato antigo ou Mercosul</a:t>
-            </a:r>
-          </a:p>
-        </p:txBody>
-      </p:sp>
-      <p:sp>
-        <p:nvSpPr>
-          <p:cNvPr id="19" name="Rounded Rectangle 18"/>
+              <a:t>⚠ Método fromPersistencia em OrdemServico tem 9 parâmetros (Sonar S107).</a:t>
+            </a:r>
+          </a:p>
+        </p:txBody>
+      </p:sp>
+      <p:sp>
+        <p:nvSpPr>
+          <p:cNvPr id="21" name="TextBox 20"/>
+          <p:cNvSpPr txBox="1"/>
+          <p:nvPr/>
+        </p:nvSpPr>
+        <p:spPr>
+          <a:xfrm>
+            <a:off x="5989320" y="5321808"/>
+            <a:ext cx="5760720" cy="685800"/>
+          </a:xfrm>
+          <a:prstGeom prst="rect">
+            <a:avLst/>
+          </a:prstGeom>
+          <a:noFill/>
+        </p:spPr>
+        <p:txBody>
+          <a:bodyPr wrap="square">
+            <a:spAutoFit/>
+          </a:bodyPr>
+          <a:lstStyle/>
+          <a:p>
+            <a:pPr algn="l"/>
+            <a:r>
+              <a:rPr sz="1100" b="0" i="0">
+                <a:solidFill>
+                  <a:srgbClr val="FFFFFF"/>
+                </a:solidFill>
+              </a:rPr>
+              <a:t>→ Encapsular em record DadosOrdemServico — 1 parâmetro, invariantes claras, sem Sonar smell.</a:t>
+            </a:r>
+          </a:p>
+        </p:txBody>
+      </p:sp>
+      <p:sp>
+        <p:nvSpPr>
+          <p:cNvPr id="22" name="Rectangle 21"/>
           <p:cNvSpPr/>
           <p:nvPr/>
         </p:nvSpPr>
         <p:spPr>
           <a:xfrm>
-            <a:off x="228600" y="5166359"/>
-            <a:ext cx="530352" cy="868680"/>
-          </a:xfrm>
-          <a:prstGeom prst="roundRect">
+            <a:off x="0" y="6473952"/>
+            <a:ext cx="12188952" cy="384048"/>
+          </a:xfrm>
+          <a:prstGeom prst="rect">
             <a:avLst/>
           </a:prstGeom>
           <a:solidFill>
-            <a:srgbClr val="F59E0B"/>
+            <a:srgbClr val="1E3A5F"/>
           </a:solidFill>
           <a:ln>
             <a:noFill/>
@@ -5163,682 +5293,34 @@
       </p:sp>
       <p:sp>
         <p:nvSpPr>
-          <p:cNvPr id="20" name="TextBox 19"/>
-          <p:cNvSpPr txBox="1"/>
-          <p:nvPr/>
-        </p:nvSpPr>
-        <p:spPr>
-          <a:xfrm>
-            <a:off x="228600" y="5166359"/>
-            <a:ext cx="530352" cy="868680"/>
-          </a:xfrm>
-          <a:prstGeom prst="rect">
-            <a:avLst/>
-          </a:prstGeom>
-          <a:noFill/>
-        </p:spPr>
-        <p:txBody>
-          <a:bodyPr wrap="square">
-            <a:spAutoFit/>
-          </a:bodyPr>
-          <a:lstStyle/>
-          <a:p>
-            <a:pPr algn="ctr"/>
-            <a:r>
-              <a:rPr sz="2000" b="1" i="0">
-                <a:solidFill>
-                  <a:srgbClr val="0D172A"/>
-                </a:solidFill>
-              </a:rPr>
-              <a:t>4</a:t>
-            </a:r>
-          </a:p>
-        </p:txBody>
-      </p:sp>
-      <p:sp>
-        <p:nvSpPr>
-          <p:cNvPr id="21" name="TextBox 20"/>
-          <p:cNvSpPr txBox="1"/>
-          <p:nvPr/>
-        </p:nvSpPr>
-        <p:spPr>
-          <a:xfrm>
-            <a:off x="850392" y="5212079"/>
-            <a:ext cx="5212080" cy="365760"/>
-          </a:xfrm>
-          <a:prstGeom prst="rect">
-            <a:avLst/>
-          </a:prstGeom>
-          <a:noFill/>
-        </p:spPr>
-        <p:txBody>
-          <a:bodyPr wrap="square">
-            <a:spAutoFit/>
-          </a:bodyPr>
-          <a:lstStyle/>
-          <a:p>
-            <a:pPr algn="l"/>
-            <a:r>
-              <a:rPr sz="1500" b="1" i="0">
-                <a:solidFill>
-                  <a:srgbClr val="F59E0B"/>
-                </a:solidFill>
-              </a:rPr>
-              <a:t>Abrir OS</a:t>
-            </a:r>
-          </a:p>
-        </p:txBody>
-      </p:sp>
-      <p:sp>
-        <p:nvSpPr>
-          <p:cNvPr id="22" name="TextBox 21"/>
-          <p:cNvSpPr txBox="1"/>
-          <p:nvPr/>
-        </p:nvSpPr>
-        <p:spPr>
-          <a:xfrm>
-            <a:off x="850392" y="5623559"/>
-            <a:ext cx="5212080" cy="411480"/>
-          </a:xfrm>
-          <a:prstGeom prst="rect">
-            <a:avLst/>
-          </a:prstGeom>
-          <a:noFill/>
-        </p:spPr>
-        <p:txBody>
-          <a:bodyPr wrap="square">
-            <a:spAutoFit/>
-          </a:bodyPr>
-          <a:lstStyle/>
-          <a:p>
-            <a:pPr algn="l"/>
+          <p:cNvPr id="23" name="TextBox 22"/>
+          <p:cNvSpPr txBox="1"/>
+          <p:nvPr/>
+        </p:nvSpPr>
+        <p:spPr>
+          <a:xfrm>
+            <a:off x="365760" y="6492240"/>
+            <a:ext cx="11795760" cy="320040"/>
+          </a:xfrm>
+          <a:prstGeom prst="rect">
+            <a:avLst/>
+          </a:prstGeom>
+          <a:noFill/>
+        </p:spPr>
+        <p:txBody>
+          <a:bodyPr wrap="square">
+            <a:spAutoFit/>
+          </a:bodyPr>
+          <a:lstStyle/>
+          <a:p>
+            <a:pPr algn="ctr"/>
             <a:r>
               <a:rPr sz="1100" b="0" i="0">
                 <a:solidFill>
                   <a:srgbClr val="94A3B8"/>
                 </a:solidFill>
               </a:rPr>
-              <a:t>POST /api/ordens — status: Recebida</a:t>
-            </a:r>
-          </a:p>
-        </p:txBody>
-      </p:sp>
-      <p:sp>
-        <p:nvSpPr>
-          <p:cNvPr id="23" name="Rounded Rectangle 22"/>
-          <p:cNvSpPr/>
-          <p:nvPr/>
-        </p:nvSpPr>
-        <p:spPr>
-          <a:xfrm>
-            <a:off x="6263640" y="1874519"/>
-            <a:ext cx="530352" cy="868680"/>
-          </a:xfrm>
-          <a:prstGeom prst="roundRect">
-            <a:avLst/>
-          </a:prstGeom>
-          <a:solidFill>
-            <a:srgbClr val="22C55E"/>
-          </a:solidFill>
-          <a:ln>
-            <a:noFill/>
-          </a:ln>
-        </p:spPr>
-        <p:style>
-          <a:lnRef idx="1">
-            <a:schemeClr val="accent1"/>
-          </a:lnRef>
-          <a:fillRef idx="3">
-            <a:schemeClr val="accent1"/>
-          </a:fillRef>
-          <a:effectRef idx="2">
-            <a:schemeClr val="accent1"/>
-          </a:effectRef>
-          <a:fontRef idx="minor">
-            <a:schemeClr val="lt1"/>
-          </a:fontRef>
-        </p:style>
-        <p:txBody>
-          <a:bodyPr rtlCol="0" anchor="ctr"/>
-          <a:lstStyle/>
-          <a:p>
-            <a:pPr algn="ctr"/>
-          </a:p>
-        </p:txBody>
-      </p:sp>
-      <p:sp>
-        <p:nvSpPr>
-          <p:cNvPr id="24" name="TextBox 23"/>
-          <p:cNvSpPr txBox="1"/>
-          <p:nvPr/>
-        </p:nvSpPr>
-        <p:spPr>
-          <a:xfrm>
-            <a:off x="6263640" y="1874519"/>
-            <a:ext cx="530352" cy="868680"/>
-          </a:xfrm>
-          <a:prstGeom prst="rect">
-            <a:avLst/>
-          </a:prstGeom>
-          <a:noFill/>
-        </p:spPr>
-        <p:txBody>
-          <a:bodyPr wrap="square">
-            <a:spAutoFit/>
-          </a:bodyPr>
-          <a:lstStyle/>
-          <a:p>
-            <a:pPr algn="ctr"/>
-            <a:r>
-              <a:rPr sz="2000" b="1" i="0">
-                <a:solidFill>
-                  <a:srgbClr val="0D172A"/>
-                </a:solidFill>
-              </a:rPr>
-              <a:t>5</a:t>
-            </a:r>
-          </a:p>
-        </p:txBody>
-      </p:sp>
-      <p:sp>
-        <p:nvSpPr>
-          <p:cNvPr id="25" name="TextBox 24"/>
-          <p:cNvSpPr txBox="1"/>
-          <p:nvPr/>
-        </p:nvSpPr>
-        <p:spPr>
-          <a:xfrm>
-            <a:off x="6885432" y="1920239"/>
-            <a:ext cx="5212080" cy="365760"/>
-          </a:xfrm>
-          <a:prstGeom prst="rect">
-            <a:avLst/>
-          </a:prstGeom>
-          <a:noFill/>
-        </p:spPr>
-        <p:txBody>
-          <a:bodyPr wrap="square">
-            <a:spAutoFit/>
-          </a:bodyPr>
-          <a:lstStyle/>
-          <a:p>
-            <a:pPr algn="l"/>
-            <a:r>
-              <a:rPr sz="1500" b="1" i="0">
-                <a:solidFill>
-                  <a:srgbClr val="22C55E"/>
-                </a:solidFill>
-              </a:rPr>
-              <a:t>Fluxo completo</a:t>
-            </a:r>
-          </a:p>
-        </p:txBody>
-      </p:sp>
-      <p:sp>
-        <p:nvSpPr>
-          <p:cNvPr id="26" name="TextBox 25"/>
-          <p:cNvSpPr txBox="1"/>
-          <p:nvPr/>
-        </p:nvSpPr>
-        <p:spPr>
-          <a:xfrm>
-            <a:off x="6885432" y="2331719"/>
-            <a:ext cx="5212080" cy="411480"/>
-          </a:xfrm>
-          <a:prstGeom prst="rect">
-            <a:avLst/>
-          </a:prstGeom>
-          <a:noFill/>
-        </p:spPr>
-        <p:txBody>
-          <a:bodyPr wrap="square">
-            <a:spAutoFit/>
-          </a:bodyPr>
-          <a:lstStyle/>
-          <a:p>
-            <a:pPr algn="l"/>
-            <a:r>
-              <a:rPr sz="1100" b="0" i="0">
-                <a:solidFill>
-                  <a:srgbClr val="94A3B8"/>
-                </a:solidFill>
-              </a:rPr>
-              <a:t>iniciar-diagnostico → adicionar itens → gerar-orcamento → aprovar → concluir → entregar</a:t>
-            </a:r>
-          </a:p>
-        </p:txBody>
-      </p:sp>
-      <p:sp>
-        <p:nvSpPr>
-          <p:cNvPr id="27" name="Rounded Rectangle 26"/>
-          <p:cNvSpPr/>
-          <p:nvPr/>
-        </p:nvSpPr>
-        <p:spPr>
-          <a:xfrm>
-            <a:off x="6263640" y="2971800"/>
-            <a:ext cx="530352" cy="868680"/>
-          </a:xfrm>
-          <a:prstGeom prst="roundRect">
-            <a:avLst/>
-          </a:prstGeom>
-          <a:solidFill>
-            <a:srgbClr val="F43F5E"/>
-          </a:solidFill>
-          <a:ln>
-            <a:noFill/>
-          </a:ln>
-        </p:spPr>
-        <p:style>
-          <a:lnRef idx="1">
-            <a:schemeClr val="accent1"/>
-          </a:lnRef>
-          <a:fillRef idx="3">
-            <a:schemeClr val="accent1"/>
-          </a:fillRef>
-          <a:effectRef idx="2">
-            <a:schemeClr val="accent1"/>
-          </a:effectRef>
-          <a:fontRef idx="minor">
-            <a:schemeClr val="lt1"/>
-          </a:fontRef>
-        </p:style>
-        <p:txBody>
-          <a:bodyPr rtlCol="0" anchor="ctr"/>
-          <a:lstStyle/>
-          <a:p>
-            <a:pPr algn="ctr"/>
-          </a:p>
-        </p:txBody>
-      </p:sp>
-      <p:sp>
-        <p:nvSpPr>
-          <p:cNvPr id="28" name="TextBox 27"/>
-          <p:cNvSpPr txBox="1"/>
-          <p:nvPr/>
-        </p:nvSpPr>
-        <p:spPr>
-          <a:xfrm>
-            <a:off x="6263640" y="2971800"/>
-            <a:ext cx="530352" cy="868680"/>
-          </a:xfrm>
-          <a:prstGeom prst="rect">
-            <a:avLst/>
-          </a:prstGeom>
-          <a:noFill/>
-        </p:spPr>
-        <p:txBody>
-          <a:bodyPr wrap="square">
-            <a:spAutoFit/>
-          </a:bodyPr>
-          <a:lstStyle/>
-          <a:p>
-            <a:pPr algn="ctr"/>
-            <a:r>
-              <a:rPr sz="2000" b="1" i="0">
-                <a:solidFill>
-                  <a:srgbClr val="0D172A"/>
-                </a:solidFill>
-              </a:rPr>
-              <a:t>6</a:t>
-            </a:r>
-          </a:p>
-        </p:txBody>
-      </p:sp>
-      <p:sp>
-        <p:nvSpPr>
-          <p:cNvPr id="29" name="TextBox 28"/>
-          <p:cNvSpPr txBox="1"/>
-          <p:nvPr/>
-        </p:nvSpPr>
-        <p:spPr>
-          <a:xfrm>
-            <a:off x="6885432" y="3017520"/>
-            <a:ext cx="5212080" cy="365760"/>
-          </a:xfrm>
-          <a:prstGeom prst="rect">
-            <a:avLst/>
-          </a:prstGeom>
-          <a:noFill/>
-        </p:spPr>
-        <p:txBody>
-          <a:bodyPr wrap="square">
-            <a:spAutoFit/>
-          </a:bodyPr>
-          <a:lstStyle/>
-          <a:p>
-            <a:pPr algn="l"/>
-            <a:r>
-              <a:rPr sz="1500" b="1" i="0">
-                <a:solidFill>
-                  <a:srgbClr val="F43F5E"/>
-                </a:solidFill>
-              </a:rPr>
-              <a:t>Estorno de estoque</a:t>
-            </a:r>
-          </a:p>
-        </p:txBody>
-      </p:sp>
-      <p:sp>
-        <p:nvSpPr>
-          <p:cNvPr id="30" name="TextBox 29"/>
-          <p:cNvSpPr txBox="1"/>
-          <p:nvPr/>
-        </p:nvSpPr>
-        <p:spPr>
-          <a:xfrm>
-            <a:off x="6885432" y="3429000"/>
-            <a:ext cx="5212080" cy="411480"/>
-          </a:xfrm>
-          <a:prstGeom prst="rect">
-            <a:avLst/>
-          </a:prstGeom>
-          <a:noFill/>
-        </p:spPr>
-        <p:txBody>
-          <a:bodyPr wrap="square">
-            <a:spAutoFit/>
-          </a:bodyPr>
-          <a:lstStyle/>
-          <a:p>
-            <a:pPr algn="l"/>
-            <a:r>
-              <a:rPr sz="1100" b="0" i="0">
-                <a:solidFill>
-                  <a:srgbClr val="94A3B8"/>
-                </a:solidFill>
-              </a:rPr>
-              <a:t>POST …/reprovar — itens devolvidos ao estoque atomicamente, status: Cancelada</a:t>
-            </a:r>
-          </a:p>
-        </p:txBody>
-      </p:sp>
-      <p:sp>
-        <p:nvSpPr>
-          <p:cNvPr id="31" name="Rounded Rectangle 30"/>
-          <p:cNvSpPr/>
-          <p:nvPr/>
-        </p:nvSpPr>
-        <p:spPr>
-          <a:xfrm>
-            <a:off x="6263640" y="4069079"/>
-            <a:ext cx="530352" cy="868680"/>
-          </a:xfrm>
-          <a:prstGeom prst="roundRect">
-            <a:avLst/>
-          </a:prstGeom>
-          <a:solidFill>
-            <a:srgbClr val="94A3B8"/>
-          </a:solidFill>
-          <a:ln>
-            <a:noFill/>
-          </a:ln>
-        </p:spPr>
-        <p:style>
-          <a:lnRef idx="1">
-            <a:schemeClr val="accent1"/>
-          </a:lnRef>
-          <a:fillRef idx="3">
-            <a:schemeClr val="accent1"/>
-          </a:fillRef>
-          <a:effectRef idx="2">
-            <a:schemeClr val="accent1"/>
-          </a:effectRef>
-          <a:fontRef idx="minor">
-            <a:schemeClr val="lt1"/>
-          </a:fontRef>
-        </p:style>
-        <p:txBody>
-          <a:bodyPr rtlCol="0" anchor="ctr"/>
-          <a:lstStyle/>
-          <a:p>
-            <a:pPr algn="ctr"/>
-          </a:p>
-        </p:txBody>
-      </p:sp>
-      <p:sp>
-        <p:nvSpPr>
-          <p:cNvPr id="32" name="TextBox 31"/>
-          <p:cNvSpPr txBox="1"/>
-          <p:nvPr/>
-        </p:nvSpPr>
-        <p:spPr>
-          <a:xfrm>
-            <a:off x="6263640" y="4069079"/>
-            <a:ext cx="530352" cy="868680"/>
-          </a:xfrm>
-          <a:prstGeom prst="rect">
-            <a:avLst/>
-          </a:prstGeom>
-          <a:noFill/>
-        </p:spPr>
-        <p:txBody>
-          <a:bodyPr wrap="square">
-            <a:spAutoFit/>
-          </a:bodyPr>
-          <a:lstStyle/>
-          <a:p>
-            <a:pPr algn="ctr"/>
-            <a:r>
-              <a:rPr sz="2000" b="1" i="0">
-                <a:solidFill>
-                  <a:srgbClr val="0D172A"/>
-                </a:solidFill>
-              </a:rPr>
-              <a:t>7</a:t>
-            </a:r>
-          </a:p>
-        </p:txBody>
-      </p:sp>
-      <p:sp>
-        <p:nvSpPr>
-          <p:cNvPr id="33" name="TextBox 32"/>
-          <p:cNvSpPr txBox="1"/>
-          <p:nvPr/>
-        </p:nvSpPr>
-        <p:spPr>
-          <a:xfrm>
-            <a:off x="6885432" y="4114799"/>
-            <a:ext cx="5212080" cy="365760"/>
-          </a:xfrm>
-          <a:prstGeom prst="rect">
-            <a:avLst/>
-          </a:prstGeom>
-          <a:noFill/>
-        </p:spPr>
-        <p:txBody>
-          <a:bodyPr wrap="square">
-            <a:spAutoFit/>
-          </a:bodyPr>
-          <a:lstStyle/>
-          <a:p>
-            <a:pPr algn="l"/>
-            <a:r>
-              <a:rPr sz="1500" b="1" i="0">
-                <a:solidFill>
-                  <a:srgbClr val="94A3B8"/>
-                </a:solidFill>
-              </a:rPr>
-              <a:t>Consulta pública</a:t>
-            </a:r>
-          </a:p>
-        </p:txBody>
-      </p:sp>
-      <p:sp>
-        <p:nvSpPr>
-          <p:cNvPr id="34" name="TextBox 33"/>
-          <p:cNvSpPr txBox="1"/>
-          <p:nvPr/>
-        </p:nvSpPr>
-        <p:spPr>
-          <a:xfrm>
-            <a:off x="6885432" y="4526279"/>
-            <a:ext cx="5212080" cy="411480"/>
-          </a:xfrm>
-          <a:prstGeom prst="rect">
-            <a:avLst/>
-          </a:prstGeom>
-          <a:noFill/>
-        </p:spPr>
-        <p:txBody>
-          <a:bodyPr wrap="square">
-            <a:spAutoFit/>
-          </a:bodyPr>
-          <a:lstStyle/>
-          <a:p>
-            <a:pPr algn="l"/>
-            <a:r>
-              <a:rPr sz="1100" b="0" i="0">
-                <a:solidFill>
-                  <a:srgbClr val="94A3B8"/>
-                </a:solidFill>
-              </a:rPr>
-              <a:t>GET /api/ordens/{id}/status — sem JWT (endpoint público)</a:t>
-            </a:r>
-          </a:p>
-        </p:txBody>
-      </p:sp>
-      <p:sp>
-        <p:nvSpPr>
-          <p:cNvPr id="35" name="Rounded Rectangle 34"/>
-          <p:cNvSpPr/>
-          <p:nvPr/>
-        </p:nvSpPr>
-        <p:spPr>
-          <a:xfrm>
-            <a:off x="6263640" y="5166359"/>
-            <a:ext cx="530352" cy="868680"/>
-          </a:xfrm>
-          <a:prstGeom prst="roundRect">
-            <a:avLst/>
-          </a:prstGeom>
-          <a:solidFill>
-            <a:srgbClr val="14B8A6"/>
-          </a:solidFill>
-          <a:ln>
-            <a:noFill/>
-          </a:ln>
-        </p:spPr>
-        <p:style>
-          <a:lnRef idx="1">
-            <a:schemeClr val="accent1"/>
-          </a:lnRef>
-          <a:fillRef idx="3">
-            <a:schemeClr val="accent1"/>
-          </a:fillRef>
-          <a:effectRef idx="2">
-            <a:schemeClr val="accent1"/>
-          </a:effectRef>
-          <a:fontRef idx="minor">
-            <a:schemeClr val="lt1"/>
-          </a:fontRef>
-        </p:style>
-        <p:txBody>
-          <a:bodyPr rtlCol="0" anchor="ctr"/>
-          <a:lstStyle/>
-          <a:p>
-            <a:pPr algn="ctr"/>
-          </a:p>
-        </p:txBody>
-      </p:sp>
-      <p:sp>
-        <p:nvSpPr>
-          <p:cNvPr id="36" name="TextBox 35"/>
-          <p:cNvSpPr txBox="1"/>
-          <p:nvPr/>
-        </p:nvSpPr>
-        <p:spPr>
-          <a:xfrm>
-            <a:off x="6263640" y="5166359"/>
-            <a:ext cx="530352" cy="868680"/>
-          </a:xfrm>
-          <a:prstGeom prst="rect">
-            <a:avLst/>
-          </a:prstGeom>
-          <a:noFill/>
-        </p:spPr>
-        <p:txBody>
-          <a:bodyPr wrap="square">
-            <a:spAutoFit/>
-          </a:bodyPr>
-          <a:lstStyle/>
-          <a:p>
-            <a:pPr algn="ctr"/>
-            <a:r>
-              <a:rPr sz="2000" b="1" i="0">
-                <a:solidFill>
-                  <a:srgbClr val="0D172A"/>
-                </a:solidFill>
-              </a:rPr>
-              <a:t>8</a:t>
-            </a:r>
-          </a:p>
-        </p:txBody>
-      </p:sp>
-      <p:sp>
-        <p:nvSpPr>
-          <p:cNvPr id="37" name="TextBox 36"/>
-          <p:cNvSpPr txBox="1"/>
-          <p:nvPr/>
-        </p:nvSpPr>
-        <p:spPr>
-          <a:xfrm>
-            <a:off x="6885432" y="5212079"/>
-            <a:ext cx="5212080" cy="365760"/>
-          </a:xfrm>
-          <a:prstGeom prst="rect">
-            <a:avLst/>
-          </a:prstGeom>
-          <a:noFill/>
-        </p:spPr>
-        <p:txBody>
-          <a:bodyPr wrap="square">
-            <a:spAutoFit/>
-          </a:bodyPr>
-          <a:lstStyle/>
-          <a:p>
-            <a:pPr algn="l"/>
-            <a:r>
-              <a:rPr sz="1500" b="1" i="0">
-                <a:solidFill>
-                  <a:srgbClr val="14B8A6"/>
-                </a:solidFill>
-              </a:rPr>
-              <a:t>Relatório</a:t>
-            </a:r>
-          </a:p>
-        </p:txBody>
-      </p:sp>
-      <p:sp>
-        <p:nvSpPr>
-          <p:cNvPr id="38" name="TextBox 37"/>
-          <p:cNvSpPr txBox="1"/>
-          <p:nvPr/>
-        </p:nvSpPr>
-        <p:spPr>
-          <a:xfrm>
-            <a:off x="6885432" y="5623559"/>
-            <a:ext cx="5212080" cy="411480"/>
-          </a:xfrm>
-          <a:prstGeom prst="rect">
-            <a:avLst/>
-          </a:prstGeom>
-          <a:noFill/>
-        </p:spPr>
-        <p:txBody>
-          <a:bodyPr wrap="square">
-            <a:spAutoFit/>
-          </a:bodyPr>
-          <a:lstStyle/>
-          <a:p>
-            <a:pPr algn="l"/>
-            <a:r>
-              <a:rPr sz="1100" b="0" i="0">
-                <a:solidFill>
-                  <a:srgbClr val="94A3B8"/>
-                </a:solidFill>
-              </a:rPr>
-              <a:t>GET /api/ordens/relatorio/tempo-medio — AVG(DataConclusao - DataInicio) SQL nativo</a:t>
+              <a:t>Documentado em README.md e documento de entrega — seção 8</a:t>
             </a:r>
           </a:p>
         </p:txBody>
@@ -5919,6 +5401,586 @@
             <a:avLst/>
           </a:prstGeom>
           <a:solidFill>
+            <a:srgbClr val="14B8A6"/>
+          </a:solidFill>
+          <a:ln>
+            <a:noFill/>
+          </a:ln>
+        </p:spPr>
+        <p:style>
+          <a:lnRef idx="1">
+            <a:schemeClr val="accent1"/>
+          </a:lnRef>
+          <a:fillRef idx="3">
+            <a:schemeClr val="accent1"/>
+          </a:fillRef>
+          <a:effectRef idx="2">
+            <a:schemeClr val="accent1"/>
+          </a:effectRef>
+          <a:fontRef idx="minor">
+            <a:schemeClr val="lt1"/>
+          </a:fontRef>
+        </p:style>
+        <p:txBody>
+          <a:bodyPr rtlCol="0" anchor="ctr"/>
+          <a:lstStyle/>
+          <a:p>
+            <a:pPr algn="ctr"/>
+          </a:p>
+        </p:txBody>
+      </p:sp>
+      <p:sp>
+        <p:nvSpPr>
+          <p:cNvPr id="4" name="TextBox 3"/>
+          <p:cNvSpPr txBox="1"/>
+          <p:nvPr/>
+        </p:nvSpPr>
+        <p:spPr>
+          <a:xfrm>
+            <a:off x="228600" y="137160"/>
+            <a:ext cx="1280160" cy="731520"/>
+          </a:xfrm>
+          <a:prstGeom prst="rect">
+            <a:avLst/>
+          </a:prstGeom>
+          <a:noFill/>
+        </p:spPr>
+        <p:txBody>
+          <a:bodyPr wrap="square">
+            <a:spAutoFit/>
+          </a:bodyPr>
+          <a:lstStyle/>
+          <a:p>
+            <a:pPr algn="l"/>
+            <a:r>
+              <a:rPr sz="4400" b="1" i="0">
+                <a:solidFill>
+                  <a:srgbClr val="14B8A6"/>
+                </a:solidFill>
+              </a:rPr>
+              <a:t>11</a:t>
+            </a:r>
+          </a:p>
+        </p:txBody>
+      </p:sp>
+      <p:sp>
+        <p:nvSpPr>
+          <p:cNvPr id="5" name="TextBox 4"/>
+          <p:cNvSpPr txBox="1"/>
+          <p:nvPr/>
+        </p:nvSpPr>
+        <p:spPr>
+          <a:xfrm>
+            <a:off x="228600" y="868680"/>
+            <a:ext cx="9144000" cy="594360"/>
+          </a:xfrm>
+          <a:prstGeom prst="rect">
+            <a:avLst/>
+          </a:prstGeom>
+          <a:noFill/>
+        </p:spPr>
+        <p:txBody>
+          <a:bodyPr wrap="square">
+            <a:spAutoFit/>
+          </a:bodyPr>
+          <a:lstStyle/>
+          <a:p>
+            <a:pPr algn="l"/>
+            <a:r>
+              <a:rPr sz="3000" b="1" i="0">
+                <a:solidFill>
+                  <a:srgbClr val="FFFFFF"/>
+                </a:solidFill>
+              </a:rPr>
+              <a:t>Demonstração</a:t>
+            </a:r>
+          </a:p>
+        </p:txBody>
+      </p:sp>
+      <p:sp>
+        <p:nvSpPr>
+          <p:cNvPr id="6" name="TextBox 5"/>
+          <p:cNvSpPr txBox="1"/>
+          <p:nvPr/>
+        </p:nvSpPr>
+        <p:spPr>
+          <a:xfrm>
+            <a:off x="228600" y="1463040"/>
+            <a:ext cx="11430000" cy="384048"/>
+          </a:xfrm>
+          <a:prstGeom prst="rect">
+            <a:avLst/>
+          </a:prstGeom>
+          <a:noFill/>
+        </p:spPr>
+        <p:txBody>
+          <a:bodyPr wrap="square">
+            <a:spAutoFit/>
+          </a:bodyPr>
+          <a:lstStyle/>
+          <a:p>
+            <a:pPr algn="l"/>
+            <a:r>
+              <a:rPr sz="1200" b="0" i="1">
+                <a:solidFill>
+                  <a:srgbClr val="94A3B8"/>
+                </a:solidFill>
+              </a:rPr>
+              <a:t>docker-compose up --build  →  http://localhost:8080/swagger-ui.html</a:t>
+            </a:r>
+          </a:p>
+        </p:txBody>
+      </p:sp>
+      <p:sp>
+        <p:nvSpPr>
+          <p:cNvPr id="7" name="Rounded Rectangle 6"/>
+          <p:cNvSpPr/>
+          <p:nvPr/>
+        </p:nvSpPr>
+        <p:spPr>
+          <a:xfrm>
+            <a:off x="228600" y="1874519"/>
+            <a:ext cx="530352" cy="868680"/>
+          </a:xfrm>
+          <a:prstGeom prst="roundRect">
+            <a:avLst/>
+          </a:prstGeom>
+          <a:solidFill>
+            <a:srgbClr val="FB923C"/>
+          </a:solidFill>
+          <a:ln>
+            <a:noFill/>
+          </a:ln>
+        </p:spPr>
+        <p:style>
+          <a:lnRef idx="1">
+            <a:schemeClr val="accent1"/>
+          </a:lnRef>
+          <a:fillRef idx="3">
+            <a:schemeClr val="accent1"/>
+          </a:fillRef>
+          <a:effectRef idx="2">
+            <a:schemeClr val="accent1"/>
+          </a:effectRef>
+          <a:fontRef idx="minor">
+            <a:schemeClr val="lt1"/>
+          </a:fontRef>
+        </p:style>
+        <p:txBody>
+          <a:bodyPr rtlCol="0" anchor="ctr"/>
+          <a:lstStyle/>
+          <a:p>
+            <a:pPr algn="ctr"/>
+          </a:p>
+        </p:txBody>
+      </p:sp>
+      <p:sp>
+        <p:nvSpPr>
+          <p:cNvPr id="8" name="TextBox 7"/>
+          <p:cNvSpPr txBox="1"/>
+          <p:nvPr/>
+        </p:nvSpPr>
+        <p:spPr>
+          <a:xfrm>
+            <a:off x="228600" y="1874519"/>
+            <a:ext cx="530352" cy="868680"/>
+          </a:xfrm>
+          <a:prstGeom prst="rect">
+            <a:avLst/>
+          </a:prstGeom>
+          <a:noFill/>
+        </p:spPr>
+        <p:txBody>
+          <a:bodyPr wrap="square">
+            <a:spAutoFit/>
+          </a:bodyPr>
+          <a:lstStyle/>
+          <a:p>
+            <a:pPr algn="ctr"/>
+            <a:r>
+              <a:rPr sz="2000" b="1" i="0">
+                <a:solidFill>
+                  <a:srgbClr val="0D172A"/>
+                </a:solidFill>
+              </a:rPr>
+              <a:t>1</a:t>
+            </a:r>
+          </a:p>
+        </p:txBody>
+      </p:sp>
+      <p:sp>
+        <p:nvSpPr>
+          <p:cNvPr id="9" name="TextBox 8"/>
+          <p:cNvSpPr txBox="1"/>
+          <p:nvPr/>
+        </p:nvSpPr>
+        <p:spPr>
+          <a:xfrm>
+            <a:off x="850392" y="1920239"/>
+            <a:ext cx="5212080" cy="365760"/>
+          </a:xfrm>
+          <a:prstGeom prst="rect">
+            <a:avLst/>
+          </a:prstGeom>
+          <a:noFill/>
+        </p:spPr>
+        <p:txBody>
+          <a:bodyPr wrap="square">
+            <a:spAutoFit/>
+          </a:bodyPr>
+          <a:lstStyle/>
+          <a:p>
+            <a:pPr algn="l"/>
+            <a:r>
+              <a:rPr sz="1500" b="1" i="0">
+                <a:solidFill>
+                  <a:srgbClr val="FB923C"/>
+                </a:solidFill>
+              </a:rPr>
+              <a:t>Login</a:t>
+            </a:r>
+          </a:p>
+        </p:txBody>
+      </p:sp>
+      <p:sp>
+        <p:nvSpPr>
+          <p:cNvPr id="10" name="TextBox 9"/>
+          <p:cNvSpPr txBox="1"/>
+          <p:nvPr/>
+        </p:nvSpPr>
+        <p:spPr>
+          <a:xfrm>
+            <a:off x="850392" y="2331719"/>
+            <a:ext cx="5212080" cy="411480"/>
+          </a:xfrm>
+          <a:prstGeom prst="rect">
+            <a:avLst/>
+          </a:prstGeom>
+          <a:noFill/>
+        </p:spPr>
+        <p:txBody>
+          <a:bodyPr wrap="square">
+            <a:spAutoFit/>
+          </a:bodyPr>
+          <a:lstStyle/>
+          <a:p>
+            <a:pPr algn="l"/>
+            <a:r>
+              <a:rPr sz="1100" b="0" i="0">
+                <a:solidFill>
+                  <a:srgbClr val="94A3B8"/>
+                </a:solidFill>
+              </a:rPr>
+              <a:t>POST /api/auth/login — obtém access token + refresh token</a:t>
+            </a:r>
+          </a:p>
+        </p:txBody>
+      </p:sp>
+      <p:sp>
+        <p:nvSpPr>
+          <p:cNvPr id="11" name="Rounded Rectangle 10"/>
+          <p:cNvSpPr/>
+          <p:nvPr/>
+        </p:nvSpPr>
+        <p:spPr>
+          <a:xfrm>
+            <a:off x="228600" y="2971800"/>
+            <a:ext cx="530352" cy="868680"/>
+          </a:xfrm>
+          <a:prstGeom prst="roundRect">
+            <a:avLst/>
+          </a:prstGeom>
+          <a:solidFill>
+            <a:srgbClr val="3B82F6"/>
+          </a:solidFill>
+          <a:ln>
+            <a:noFill/>
+          </a:ln>
+        </p:spPr>
+        <p:style>
+          <a:lnRef idx="1">
+            <a:schemeClr val="accent1"/>
+          </a:lnRef>
+          <a:fillRef idx="3">
+            <a:schemeClr val="accent1"/>
+          </a:fillRef>
+          <a:effectRef idx="2">
+            <a:schemeClr val="accent1"/>
+          </a:effectRef>
+          <a:fontRef idx="minor">
+            <a:schemeClr val="lt1"/>
+          </a:fontRef>
+        </p:style>
+        <p:txBody>
+          <a:bodyPr rtlCol="0" anchor="ctr"/>
+          <a:lstStyle/>
+          <a:p>
+            <a:pPr algn="ctr"/>
+          </a:p>
+        </p:txBody>
+      </p:sp>
+      <p:sp>
+        <p:nvSpPr>
+          <p:cNvPr id="12" name="TextBox 11"/>
+          <p:cNvSpPr txBox="1"/>
+          <p:nvPr/>
+        </p:nvSpPr>
+        <p:spPr>
+          <a:xfrm>
+            <a:off x="228600" y="2971800"/>
+            <a:ext cx="530352" cy="868680"/>
+          </a:xfrm>
+          <a:prstGeom prst="rect">
+            <a:avLst/>
+          </a:prstGeom>
+          <a:noFill/>
+        </p:spPr>
+        <p:txBody>
+          <a:bodyPr wrap="square">
+            <a:spAutoFit/>
+          </a:bodyPr>
+          <a:lstStyle/>
+          <a:p>
+            <a:pPr algn="ctr"/>
+            <a:r>
+              <a:rPr sz="2000" b="1" i="0">
+                <a:solidFill>
+                  <a:srgbClr val="0D172A"/>
+                </a:solidFill>
+              </a:rPr>
+              <a:t>2</a:t>
+            </a:r>
+          </a:p>
+        </p:txBody>
+      </p:sp>
+      <p:sp>
+        <p:nvSpPr>
+          <p:cNvPr id="13" name="TextBox 12"/>
+          <p:cNvSpPr txBox="1"/>
+          <p:nvPr/>
+        </p:nvSpPr>
+        <p:spPr>
+          <a:xfrm>
+            <a:off x="850392" y="3017520"/>
+            <a:ext cx="5212080" cy="365760"/>
+          </a:xfrm>
+          <a:prstGeom prst="rect">
+            <a:avLst/>
+          </a:prstGeom>
+          <a:noFill/>
+        </p:spPr>
+        <p:txBody>
+          <a:bodyPr wrap="square">
+            <a:spAutoFit/>
+          </a:bodyPr>
+          <a:lstStyle/>
+          <a:p>
+            <a:pPr algn="l"/>
+            <a:r>
+              <a:rPr sz="1500" b="1" i="0">
+                <a:solidFill>
+                  <a:srgbClr val="3B82F6"/>
+                </a:solidFill>
+              </a:rPr>
+              <a:t>Cadastrar Cliente</a:t>
+            </a:r>
+          </a:p>
+        </p:txBody>
+      </p:sp>
+      <p:sp>
+        <p:nvSpPr>
+          <p:cNvPr id="14" name="TextBox 13"/>
+          <p:cNvSpPr txBox="1"/>
+          <p:nvPr/>
+        </p:nvSpPr>
+        <p:spPr>
+          <a:xfrm>
+            <a:off x="850392" y="3429000"/>
+            <a:ext cx="5212080" cy="411480"/>
+          </a:xfrm>
+          <a:prstGeom prst="rect">
+            <a:avLst/>
+          </a:prstGeom>
+          <a:noFill/>
+        </p:spPr>
+        <p:txBody>
+          <a:bodyPr wrap="square">
+            <a:spAutoFit/>
+          </a:bodyPr>
+          <a:lstStyle/>
+          <a:p>
+            <a:pPr algn="l"/>
+            <a:r>
+              <a:rPr sz="1100" b="0" i="0">
+                <a:solidFill>
+                  <a:srgbClr val="94A3B8"/>
+                </a:solidFill>
+              </a:rPr>
+              <a:t>POST /api/clientes — CPF validado por dígito verificador</a:t>
+            </a:r>
+          </a:p>
+        </p:txBody>
+      </p:sp>
+      <p:sp>
+        <p:nvSpPr>
+          <p:cNvPr id="15" name="Rounded Rectangle 14"/>
+          <p:cNvSpPr/>
+          <p:nvPr/>
+        </p:nvSpPr>
+        <p:spPr>
+          <a:xfrm>
+            <a:off x="228600" y="4069079"/>
+            <a:ext cx="530352" cy="868680"/>
+          </a:xfrm>
+          <a:prstGeom prst="roundRect">
+            <a:avLst/>
+          </a:prstGeom>
+          <a:solidFill>
+            <a:srgbClr val="14B8A6"/>
+          </a:solidFill>
+          <a:ln>
+            <a:noFill/>
+          </a:ln>
+        </p:spPr>
+        <p:style>
+          <a:lnRef idx="1">
+            <a:schemeClr val="accent1"/>
+          </a:lnRef>
+          <a:fillRef idx="3">
+            <a:schemeClr val="accent1"/>
+          </a:fillRef>
+          <a:effectRef idx="2">
+            <a:schemeClr val="accent1"/>
+          </a:effectRef>
+          <a:fontRef idx="minor">
+            <a:schemeClr val="lt1"/>
+          </a:fontRef>
+        </p:style>
+        <p:txBody>
+          <a:bodyPr rtlCol="0" anchor="ctr"/>
+          <a:lstStyle/>
+          <a:p>
+            <a:pPr algn="ctr"/>
+          </a:p>
+        </p:txBody>
+      </p:sp>
+      <p:sp>
+        <p:nvSpPr>
+          <p:cNvPr id="16" name="TextBox 15"/>
+          <p:cNvSpPr txBox="1"/>
+          <p:nvPr/>
+        </p:nvSpPr>
+        <p:spPr>
+          <a:xfrm>
+            <a:off x="228600" y="4069079"/>
+            <a:ext cx="530352" cy="868680"/>
+          </a:xfrm>
+          <a:prstGeom prst="rect">
+            <a:avLst/>
+          </a:prstGeom>
+          <a:noFill/>
+        </p:spPr>
+        <p:txBody>
+          <a:bodyPr wrap="square">
+            <a:spAutoFit/>
+          </a:bodyPr>
+          <a:lstStyle/>
+          <a:p>
+            <a:pPr algn="ctr"/>
+            <a:r>
+              <a:rPr sz="2000" b="1" i="0">
+                <a:solidFill>
+                  <a:srgbClr val="0D172A"/>
+                </a:solidFill>
+              </a:rPr>
+              <a:t>3</a:t>
+            </a:r>
+          </a:p>
+        </p:txBody>
+      </p:sp>
+      <p:sp>
+        <p:nvSpPr>
+          <p:cNvPr id="17" name="TextBox 16"/>
+          <p:cNvSpPr txBox="1"/>
+          <p:nvPr/>
+        </p:nvSpPr>
+        <p:spPr>
+          <a:xfrm>
+            <a:off x="850392" y="4114799"/>
+            <a:ext cx="5212080" cy="365760"/>
+          </a:xfrm>
+          <a:prstGeom prst="rect">
+            <a:avLst/>
+          </a:prstGeom>
+          <a:noFill/>
+        </p:spPr>
+        <p:txBody>
+          <a:bodyPr wrap="square">
+            <a:spAutoFit/>
+          </a:bodyPr>
+          <a:lstStyle/>
+          <a:p>
+            <a:pPr algn="l"/>
+            <a:r>
+              <a:rPr sz="1500" b="1" i="0">
+                <a:solidFill>
+                  <a:srgbClr val="14B8A6"/>
+                </a:solidFill>
+              </a:rPr>
+              <a:t>Cadastrar Veículo</a:t>
+            </a:r>
+          </a:p>
+        </p:txBody>
+      </p:sp>
+      <p:sp>
+        <p:nvSpPr>
+          <p:cNvPr id="18" name="TextBox 17"/>
+          <p:cNvSpPr txBox="1"/>
+          <p:nvPr/>
+        </p:nvSpPr>
+        <p:spPr>
+          <a:xfrm>
+            <a:off x="850392" y="4526279"/>
+            <a:ext cx="5212080" cy="411480"/>
+          </a:xfrm>
+          <a:prstGeom prst="rect">
+            <a:avLst/>
+          </a:prstGeom>
+          <a:noFill/>
+        </p:spPr>
+        <p:txBody>
+          <a:bodyPr wrap="square">
+            <a:spAutoFit/>
+          </a:bodyPr>
+          <a:lstStyle/>
+          <a:p>
+            <a:pPr algn="l"/>
+            <a:r>
+              <a:rPr sz="1100" b="0" i="0">
+                <a:solidFill>
+                  <a:srgbClr val="94A3B8"/>
+                </a:solidFill>
+              </a:rPr>
+              <a:t>POST /api/veiculos — placa formato antigo ou Mercosul</a:t>
+            </a:r>
+          </a:p>
+        </p:txBody>
+      </p:sp>
+      <p:sp>
+        <p:nvSpPr>
+          <p:cNvPr id="19" name="Rounded Rectangle 18"/>
+          <p:cNvSpPr/>
+          <p:nvPr/>
+        </p:nvSpPr>
+        <p:spPr>
+          <a:xfrm>
+            <a:off x="228600" y="5166359"/>
+            <a:ext cx="530352" cy="868680"/>
+          </a:xfrm>
+          <a:prstGeom prst="roundRect">
+            <a:avLst/>
+          </a:prstGeom>
+          <a:solidFill>
             <a:srgbClr val="F59E0B"/>
           </a:solidFill>
           <a:ln>
@@ -5949,6 +6011,792 @@
       </p:sp>
       <p:sp>
         <p:nvSpPr>
+          <p:cNvPr id="20" name="TextBox 19"/>
+          <p:cNvSpPr txBox="1"/>
+          <p:nvPr/>
+        </p:nvSpPr>
+        <p:spPr>
+          <a:xfrm>
+            <a:off x="228600" y="5166359"/>
+            <a:ext cx="530352" cy="868680"/>
+          </a:xfrm>
+          <a:prstGeom prst="rect">
+            <a:avLst/>
+          </a:prstGeom>
+          <a:noFill/>
+        </p:spPr>
+        <p:txBody>
+          <a:bodyPr wrap="square">
+            <a:spAutoFit/>
+          </a:bodyPr>
+          <a:lstStyle/>
+          <a:p>
+            <a:pPr algn="ctr"/>
+            <a:r>
+              <a:rPr sz="2000" b="1" i="0">
+                <a:solidFill>
+                  <a:srgbClr val="0D172A"/>
+                </a:solidFill>
+              </a:rPr>
+              <a:t>4</a:t>
+            </a:r>
+          </a:p>
+        </p:txBody>
+      </p:sp>
+      <p:sp>
+        <p:nvSpPr>
+          <p:cNvPr id="21" name="TextBox 20"/>
+          <p:cNvSpPr txBox="1"/>
+          <p:nvPr/>
+        </p:nvSpPr>
+        <p:spPr>
+          <a:xfrm>
+            <a:off x="850392" y="5212079"/>
+            <a:ext cx="5212080" cy="365760"/>
+          </a:xfrm>
+          <a:prstGeom prst="rect">
+            <a:avLst/>
+          </a:prstGeom>
+          <a:noFill/>
+        </p:spPr>
+        <p:txBody>
+          <a:bodyPr wrap="square">
+            <a:spAutoFit/>
+          </a:bodyPr>
+          <a:lstStyle/>
+          <a:p>
+            <a:pPr algn="l"/>
+            <a:r>
+              <a:rPr sz="1500" b="1" i="0">
+                <a:solidFill>
+                  <a:srgbClr val="F59E0B"/>
+                </a:solidFill>
+              </a:rPr>
+              <a:t>Abrir OS</a:t>
+            </a:r>
+          </a:p>
+        </p:txBody>
+      </p:sp>
+      <p:sp>
+        <p:nvSpPr>
+          <p:cNvPr id="22" name="TextBox 21"/>
+          <p:cNvSpPr txBox="1"/>
+          <p:nvPr/>
+        </p:nvSpPr>
+        <p:spPr>
+          <a:xfrm>
+            <a:off x="850392" y="5623559"/>
+            <a:ext cx="5212080" cy="411480"/>
+          </a:xfrm>
+          <a:prstGeom prst="rect">
+            <a:avLst/>
+          </a:prstGeom>
+          <a:noFill/>
+        </p:spPr>
+        <p:txBody>
+          <a:bodyPr wrap="square">
+            <a:spAutoFit/>
+          </a:bodyPr>
+          <a:lstStyle/>
+          <a:p>
+            <a:pPr algn="l"/>
+            <a:r>
+              <a:rPr sz="1100" b="0" i="0">
+                <a:solidFill>
+                  <a:srgbClr val="94A3B8"/>
+                </a:solidFill>
+              </a:rPr>
+              <a:t>POST /api/ordens — status: Recebida</a:t>
+            </a:r>
+          </a:p>
+        </p:txBody>
+      </p:sp>
+      <p:sp>
+        <p:nvSpPr>
+          <p:cNvPr id="23" name="Rounded Rectangle 22"/>
+          <p:cNvSpPr/>
+          <p:nvPr/>
+        </p:nvSpPr>
+        <p:spPr>
+          <a:xfrm>
+            <a:off x="6263640" y="1874519"/>
+            <a:ext cx="530352" cy="868680"/>
+          </a:xfrm>
+          <a:prstGeom prst="roundRect">
+            <a:avLst/>
+          </a:prstGeom>
+          <a:solidFill>
+            <a:srgbClr val="22C55E"/>
+          </a:solidFill>
+          <a:ln>
+            <a:noFill/>
+          </a:ln>
+        </p:spPr>
+        <p:style>
+          <a:lnRef idx="1">
+            <a:schemeClr val="accent1"/>
+          </a:lnRef>
+          <a:fillRef idx="3">
+            <a:schemeClr val="accent1"/>
+          </a:fillRef>
+          <a:effectRef idx="2">
+            <a:schemeClr val="accent1"/>
+          </a:effectRef>
+          <a:fontRef idx="minor">
+            <a:schemeClr val="lt1"/>
+          </a:fontRef>
+        </p:style>
+        <p:txBody>
+          <a:bodyPr rtlCol="0" anchor="ctr"/>
+          <a:lstStyle/>
+          <a:p>
+            <a:pPr algn="ctr"/>
+          </a:p>
+        </p:txBody>
+      </p:sp>
+      <p:sp>
+        <p:nvSpPr>
+          <p:cNvPr id="24" name="TextBox 23"/>
+          <p:cNvSpPr txBox="1"/>
+          <p:nvPr/>
+        </p:nvSpPr>
+        <p:spPr>
+          <a:xfrm>
+            <a:off x="6263640" y="1874519"/>
+            <a:ext cx="530352" cy="868680"/>
+          </a:xfrm>
+          <a:prstGeom prst="rect">
+            <a:avLst/>
+          </a:prstGeom>
+          <a:noFill/>
+        </p:spPr>
+        <p:txBody>
+          <a:bodyPr wrap="square">
+            <a:spAutoFit/>
+          </a:bodyPr>
+          <a:lstStyle/>
+          <a:p>
+            <a:pPr algn="ctr"/>
+            <a:r>
+              <a:rPr sz="2000" b="1" i="0">
+                <a:solidFill>
+                  <a:srgbClr val="0D172A"/>
+                </a:solidFill>
+              </a:rPr>
+              <a:t>5</a:t>
+            </a:r>
+          </a:p>
+        </p:txBody>
+      </p:sp>
+      <p:sp>
+        <p:nvSpPr>
+          <p:cNvPr id="25" name="TextBox 24"/>
+          <p:cNvSpPr txBox="1"/>
+          <p:nvPr/>
+        </p:nvSpPr>
+        <p:spPr>
+          <a:xfrm>
+            <a:off x="6885432" y="1920239"/>
+            <a:ext cx="5212080" cy="365760"/>
+          </a:xfrm>
+          <a:prstGeom prst="rect">
+            <a:avLst/>
+          </a:prstGeom>
+          <a:noFill/>
+        </p:spPr>
+        <p:txBody>
+          <a:bodyPr wrap="square">
+            <a:spAutoFit/>
+          </a:bodyPr>
+          <a:lstStyle/>
+          <a:p>
+            <a:pPr algn="l"/>
+            <a:r>
+              <a:rPr sz="1500" b="1" i="0">
+                <a:solidFill>
+                  <a:srgbClr val="22C55E"/>
+                </a:solidFill>
+              </a:rPr>
+              <a:t>Fluxo completo</a:t>
+            </a:r>
+          </a:p>
+        </p:txBody>
+      </p:sp>
+      <p:sp>
+        <p:nvSpPr>
+          <p:cNvPr id="26" name="TextBox 25"/>
+          <p:cNvSpPr txBox="1"/>
+          <p:nvPr/>
+        </p:nvSpPr>
+        <p:spPr>
+          <a:xfrm>
+            <a:off x="6885432" y="2331719"/>
+            <a:ext cx="5212080" cy="411480"/>
+          </a:xfrm>
+          <a:prstGeom prst="rect">
+            <a:avLst/>
+          </a:prstGeom>
+          <a:noFill/>
+        </p:spPr>
+        <p:txBody>
+          <a:bodyPr wrap="square">
+            <a:spAutoFit/>
+          </a:bodyPr>
+          <a:lstStyle/>
+          <a:p>
+            <a:pPr algn="l"/>
+            <a:r>
+              <a:rPr sz="1100" b="0" i="0">
+                <a:solidFill>
+                  <a:srgbClr val="94A3B8"/>
+                </a:solidFill>
+              </a:rPr>
+              <a:t>iniciar-diagnostico → adicionar itens → gerar-orcamento → aprovar → concluir → entregar</a:t>
+            </a:r>
+          </a:p>
+        </p:txBody>
+      </p:sp>
+      <p:sp>
+        <p:nvSpPr>
+          <p:cNvPr id="27" name="Rounded Rectangle 26"/>
+          <p:cNvSpPr/>
+          <p:nvPr/>
+        </p:nvSpPr>
+        <p:spPr>
+          <a:xfrm>
+            <a:off x="6263640" y="2971800"/>
+            <a:ext cx="530352" cy="868680"/>
+          </a:xfrm>
+          <a:prstGeom prst="roundRect">
+            <a:avLst/>
+          </a:prstGeom>
+          <a:solidFill>
+            <a:srgbClr val="F43F5E"/>
+          </a:solidFill>
+          <a:ln>
+            <a:noFill/>
+          </a:ln>
+        </p:spPr>
+        <p:style>
+          <a:lnRef idx="1">
+            <a:schemeClr val="accent1"/>
+          </a:lnRef>
+          <a:fillRef idx="3">
+            <a:schemeClr val="accent1"/>
+          </a:fillRef>
+          <a:effectRef idx="2">
+            <a:schemeClr val="accent1"/>
+          </a:effectRef>
+          <a:fontRef idx="minor">
+            <a:schemeClr val="lt1"/>
+          </a:fontRef>
+        </p:style>
+        <p:txBody>
+          <a:bodyPr rtlCol="0" anchor="ctr"/>
+          <a:lstStyle/>
+          <a:p>
+            <a:pPr algn="ctr"/>
+          </a:p>
+        </p:txBody>
+      </p:sp>
+      <p:sp>
+        <p:nvSpPr>
+          <p:cNvPr id="28" name="TextBox 27"/>
+          <p:cNvSpPr txBox="1"/>
+          <p:nvPr/>
+        </p:nvSpPr>
+        <p:spPr>
+          <a:xfrm>
+            <a:off x="6263640" y="2971800"/>
+            <a:ext cx="530352" cy="868680"/>
+          </a:xfrm>
+          <a:prstGeom prst="rect">
+            <a:avLst/>
+          </a:prstGeom>
+          <a:noFill/>
+        </p:spPr>
+        <p:txBody>
+          <a:bodyPr wrap="square">
+            <a:spAutoFit/>
+          </a:bodyPr>
+          <a:lstStyle/>
+          <a:p>
+            <a:pPr algn="ctr"/>
+            <a:r>
+              <a:rPr sz="2000" b="1" i="0">
+                <a:solidFill>
+                  <a:srgbClr val="0D172A"/>
+                </a:solidFill>
+              </a:rPr>
+              <a:t>6</a:t>
+            </a:r>
+          </a:p>
+        </p:txBody>
+      </p:sp>
+      <p:sp>
+        <p:nvSpPr>
+          <p:cNvPr id="29" name="TextBox 28"/>
+          <p:cNvSpPr txBox="1"/>
+          <p:nvPr/>
+        </p:nvSpPr>
+        <p:spPr>
+          <a:xfrm>
+            <a:off x="6885432" y="3017520"/>
+            <a:ext cx="5212080" cy="365760"/>
+          </a:xfrm>
+          <a:prstGeom prst="rect">
+            <a:avLst/>
+          </a:prstGeom>
+          <a:noFill/>
+        </p:spPr>
+        <p:txBody>
+          <a:bodyPr wrap="square">
+            <a:spAutoFit/>
+          </a:bodyPr>
+          <a:lstStyle/>
+          <a:p>
+            <a:pPr algn="l"/>
+            <a:r>
+              <a:rPr sz="1500" b="1" i="0">
+                <a:solidFill>
+                  <a:srgbClr val="F43F5E"/>
+                </a:solidFill>
+              </a:rPr>
+              <a:t>Estorno de estoque</a:t>
+            </a:r>
+          </a:p>
+        </p:txBody>
+      </p:sp>
+      <p:sp>
+        <p:nvSpPr>
+          <p:cNvPr id="30" name="TextBox 29"/>
+          <p:cNvSpPr txBox="1"/>
+          <p:nvPr/>
+        </p:nvSpPr>
+        <p:spPr>
+          <a:xfrm>
+            <a:off x="6885432" y="3429000"/>
+            <a:ext cx="5212080" cy="411480"/>
+          </a:xfrm>
+          <a:prstGeom prst="rect">
+            <a:avLst/>
+          </a:prstGeom>
+          <a:noFill/>
+        </p:spPr>
+        <p:txBody>
+          <a:bodyPr wrap="square">
+            <a:spAutoFit/>
+          </a:bodyPr>
+          <a:lstStyle/>
+          <a:p>
+            <a:pPr algn="l"/>
+            <a:r>
+              <a:rPr sz="1100" b="0" i="0">
+                <a:solidFill>
+                  <a:srgbClr val="94A3B8"/>
+                </a:solidFill>
+              </a:rPr>
+              <a:t>POST …/reprovar — itens devolvidos ao estoque atomicamente, status: Cancelada</a:t>
+            </a:r>
+          </a:p>
+        </p:txBody>
+      </p:sp>
+      <p:sp>
+        <p:nvSpPr>
+          <p:cNvPr id="31" name="Rounded Rectangle 30"/>
+          <p:cNvSpPr/>
+          <p:nvPr/>
+        </p:nvSpPr>
+        <p:spPr>
+          <a:xfrm>
+            <a:off x="6263640" y="4069079"/>
+            <a:ext cx="530352" cy="868680"/>
+          </a:xfrm>
+          <a:prstGeom prst="roundRect">
+            <a:avLst/>
+          </a:prstGeom>
+          <a:solidFill>
+            <a:srgbClr val="94A3B8"/>
+          </a:solidFill>
+          <a:ln>
+            <a:noFill/>
+          </a:ln>
+        </p:spPr>
+        <p:style>
+          <a:lnRef idx="1">
+            <a:schemeClr val="accent1"/>
+          </a:lnRef>
+          <a:fillRef idx="3">
+            <a:schemeClr val="accent1"/>
+          </a:fillRef>
+          <a:effectRef idx="2">
+            <a:schemeClr val="accent1"/>
+          </a:effectRef>
+          <a:fontRef idx="minor">
+            <a:schemeClr val="lt1"/>
+          </a:fontRef>
+        </p:style>
+        <p:txBody>
+          <a:bodyPr rtlCol="0" anchor="ctr"/>
+          <a:lstStyle/>
+          <a:p>
+            <a:pPr algn="ctr"/>
+          </a:p>
+        </p:txBody>
+      </p:sp>
+      <p:sp>
+        <p:nvSpPr>
+          <p:cNvPr id="32" name="TextBox 31"/>
+          <p:cNvSpPr txBox="1"/>
+          <p:nvPr/>
+        </p:nvSpPr>
+        <p:spPr>
+          <a:xfrm>
+            <a:off x="6263640" y="4069079"/>
+            <a:ext cx="530352" cy="868680"/>
+          </a:xfrm>
+          <a:prstGeom prst="rect">
+            <a:avLst/>
+          </a:prstGeom>
+          <a:noFill/>
+        </p:spPr>
+        <p:txBody>
+          <a:bodyPr wrap="square">
+            <a:spAutoFit/>
+          </a:bodyPr>
+          <a:lstStyle/>
+          <a:p>
+            <a:pPr algn="ctr"/>
+            <a:r>
+              <a:rPr sz="2000" b="1" i="0">
+                <a:solidFill>
+                  <a:srgbClr val="0D172A"/>
+                </a:solidFill>
+              </a:rPr>
+              <a:t>7</a:t>
+            </a:r>
+          </a:p>
+        </p:txBody>
+      </p:sp>
+      <p:sp>
+        <p:nvSpPr>
+          <p:cNvPr id="33" name="TextBox 32"/>
+          <p:cNvSpPr txBox="1"/>
+          <p:nvPr/>
+        </p:nvSpPr>
+        <p:spPr>
+          <a:xfrm>
+            <a:off x="6885432" y="4114799"/>
+            <a:ext cx="5212080" cy="365760"/>
+          </a:xfrm>
+          <a:prstGeom prst="rect">
+            <a:avLst/>
+          </a:prstGeom>
+          <a:noFill/>
+        </p:spPr>
+        <p:txBody>
+          <a:bodyPr wrap="square">
+            <a:spAutoFit/>
+          </a:bodyPr>
+          <a:lstStyle/>
+          <a:p>
+            <a:pPr algn="l"/>
+            <a:r>
+              <a:rPr sz="1500" b="1" i="0">
+                <a:solidFill>
+                  <a:srgbClr val="94A3B8"/>
+                </a:solidFill>
+              </a:rPr>
+              <a:t>Consulta pública</a:t>
+            </a:r>
+          </a:p>
+        </p:txBody>
+      </p:sp>
+      <p:sp>
+        <p:nvSpPr>
+          <p:cNvPr id="34" name="TextBox 33"/>
+          <p:cNvSpPr txBox="1"/>
+          <p:nvPr/>
+        </p:nvSpPr>
+        <p:spPr>
+          <a:xfrm>
+            <a:off x="6885432" y="4526279"/>
+            <a:ext cx="5212080" cy="411480"/>
+          </a:xfrm>
+          <a:prstGeom prst="rect">
+            <a:avLst/>
+          </a:prstGeom>
+          <a:noFill/>
+        </p:spPr>
+        <p:txBody>
+          <a:bodyPr wrap="square">
+            <a:spAutoFit/>
+          </a:bodyPr>
+          <a:lstStyle/>
+          <a:p>
+            <a:pPr algn="l"/>
+            <a:r>
+              <a:rPr sz="1100" b="0" i="0">
+                <a:solidFill>
+                  <a:srgbClr val="94A3B8"/>
+                </a:solidFill>
+              </a:rPr>
+              <a:t>GET /api/ordens/{id}/status — sem JWT (endpoint público)</a:t>
+            </a:r>
+          </a:p>
+        </p:txBody>
+      </p:sp>
+      <p:sp>
+        <p:nvSpPr>
+          <p:cNvPr id="35" name="Rounded Rectangle 34"/>
+          <p:cNvSpPr/>
+          <p:nvPr/>
+        </p:nvSpPr>
+        <p:spPr>
+          <a:xfrm>
+            <a:off x="6263640" y="5166359"/>
+            <a:ext cx="530352" cy="868680"/>
+          </a:xfrm>
+          <a:prstGeom prst="roundRect">
+            <a:avLst/>
+          </a:prstGeom>
+          <a:solidFill>
+            <a:srgbClr val="14B8A6"/>
+          </a:solidFill>
+          <a:ln>
+            <a:noFill/>
+          </a:ln>
+        </p:spPr>
+        <p:style>
+          <a:lnRef idx="1">
+            <a:schemeClr val="accent1"/>
+          </a:lnRef>
+          <a:fillRef idx="3">
+            <a:schemeClr val="accent1"/>
+          </a:fillRef>
+          <a:effectRef idx="2">
+            <a:schemeClr val="accent1"/>
+          </a:effectRef>
+          <a:fontRef idx="minor">
+            <a:schemeClr val="lt1"/>
+          </a:fontRef>
+        </p:style>
+        <p:txBody>
+          <a:bodyPr rtlCol="0" anchor="ctr"/>
+          <a:lstStyle/>
+          <a:p>
+            <a:pPr algn="ctr"/>
+          </a:p>
+        </p:txBody>
+      </p:sp>
+      <p:sp>
+        <p:nvSpPr>
+          <p:cNvPr id="36" name="TextBox 35"/>
+          <p:cNvSpPr txBox="1"/>
+          <p:nvPr/>
+        </p:nvSpPr>
+        <p:spPr>
+          <a:xfrm>
+            <a:off x="6263640" y="5166359"/>
+            <a:ext cx="530352" cy="868680"/>
+          </a:xfrm>
+          <a:prstGeom prst="rect">
+            <a:avLst/>
+          </a:prstGeom>
+          <a:noFill/>
+        </p:spPr>
+        <p:txBody>
+          <a:bodyPr wrap="square">
+            <a:spAutoFit/>
+          </a:bodyPr>
+          <a:lstStyle/>
+          <a:p>
+            <a:pPr algn="ctr"/>
+            <a:r>
+              <a:rPr sz="2000" b="1" i="0">
+                <a:solidFill>
+                  <a:srgbClr val="0D172A"/>
+                </a:solidFill>
+              </a:rPr>
+              <a:t>8</a:t>
+            </a:r>
+          </a:p>
+        </p:txBody>
+      </p:sp>
+      <p:sp>
+        <p:nvSpPr>
+          <p:cNvPr id="37" name="TextBox 36"/>
+          <p:cNvSpPr txBox="1"/>
+          <p:nvPr/>
+        </p:nvSpPr>
+        <p:spPr>
+          <a:xfrm>
+            <a:off x="6885432" y="5212079"/>
+            <a:ext cx="5212080" cy="365760"/>
+          </a:xfrm>
+          <a:prstGeom prst="rect">
+            <a:avLst/>
+          </a:prstGeom>
+          <a:noFill/>
+        </p:spPr>
+        <p:txBody>
+          <a:bodyPr wrap="square">
+            <a:spAutoFit/>
+          </a:bodyPr>
+          <a:lstStyle/>
+          <a:p>
+            <a:pPr algn="l"/>
+            <a:r>
+              <a:rPr sz="1500" b="1" i="0">
+                <a:solidFill>
+                  <a:srgbClr val="14B8A6"/>
+                </a:solidFill>
+              </a:rPr>
+              <a:t>Relatório</a:t>
+            </a:r>
+          </a:p>
+        </p:txBody>
+      </p:sp>
+      <p:sp>
+        <p:nvSpPr>
+          <p:cNvPr id="38" name="TextBox 37"/>
+          <p:cNvSpPr txBox="1"/>
+          <p:nvPr/>
+        </p:nvSpPr>
+        <p:spPr>
+          <a:xfrm>
+            <a:off x="6885432" y="5623559"/>
+            <a:ext cx="5212080" cy="411480"/>
+          </a:xfrm>
+          <a:prstGeom prst="rect">
+            <a:avLst/>
+          </a:prstGeom>
+          <a:noFill/>
+        </p:spPr>
+        <p:txBody>
+          <a:bodyPr wrap="square">
+            <a:spAutoFit/>
+          </a:bodyPr>
+          <a:lstStyle/>
+          <a:p>
+            <a:pPr algn="l"/>
+            <a:r>
+              <a:rPr sz="1100" b="0" i="0">
+                <a:solidFill>
+                  <a:srgbClr val="94A3B8"/>
+                </a:solidFill>
+              </a:rPr>
+              <a:t>GET /api/ordens/relatorio/tempo-medio — AVG(DataConclusao - DataInicio) SQL nativo</a:t>
+            </a:r>
+          </a:p>
+        </p:txBody>
+      </p:sp>
+    </p:spTree>
+  </p:cSld>
+  <p:clrMapOvr>
+    <a:masterClrMapping/>
+  </p:clrMapOvr>
+</p:sld>
+</file>
+
+<file path=ppt/slides/slide13.xml><?xml version="1.0" encoding="utf-8"?>
+<p:sld xmlns:a="http://schemas.openxmlformats.org/drawingml/2006/main" xmlns:p="http://schemas.openxmlformats.org/presentationml/2006/main" xmlns:r="http://schemas.openxmlformats.org/officeDocument/2006/relationships">
+  <p:cSld>
+    <p:spTree>
+      <p:nvGrpSpPr>
+        <p:cNvPr id="1" name=""/>
+        <p:cNvGrpSpPr/>
+        <p:nvPr/>
+      </p:nvGrpSpPr>
+      <p:grpSpPr/>
+      <p:sp>
+        <p:nvSpPr>
+          <p:cNvPr id="2" name="Rectangle 1"/>
+          <p:cNvSpPr/>
+          <p:nvPr/>
+        </p:nvSpPr>
+        <p:spPr>
+          <a:xfrm>
+            <a:off x="0" y="0"/>
+            <a:ext cx="12188952" cy="6858000"/>
+          </a:xfrm>
+          <a:prstGeom prst="rect">
+            <a:avLst/>
+          </a:prstGeom>
+          <a:solidFill>
+            <a:srgbClr val="0D172A"/>
+          </a:solidFill>
+          <a:ln>
+            <a:noFill/>
+          </a:ln>
+        </p:spPr>
+        <p:style>
+          <a:lnRef idx="1">
+            <a:schemeClr val="accent1"/>
+          </a:lnRef>
+          <a:fillRef idx="3">
+            <a:schemeClr val="accent1"/>
+          </a:fillRef>
+          <a:effectRef idx="2">
+            <a:schemeClr val="accent1"/>
+          </a:effectRef>
+          <a:fontRef idx="minor">
+            <a:schemeClr val="lt1"/>
+          </a:fontRef>
+        </p:style>
+        <p:txBody>
+          <a:bodyPr rtlCol="0" anchor="ctr"/>
+          <a:lstStyle/>
+          <a:p>
+            <a:pPr algn="ctr"/>
+          </a:p>
+        </p:txBody>
+      </p:sp>
+      <p:sp>
+        <p:nvSpPr>
+          <p:cNvPr id="3" name="Rectangle 2"/>
+          <p:cNvSpPr/>
+          <p:nvPr/>
+        </p:nvSpPr>
+        <p:spPr>
+          <a:xfrm>
+            <a:off x="0" y="0"/>
+            <a:ext cx="64008" cy="6858000"/>
+          </a:xfrm>
+          <a:prstGeom prst="rect">
+            <a:avLst/>
+          </a:prstGeom>
+          <a:solidFill>
+            <a:srgbClr val="F59E0B"/>
+          </a:solidFill>
+          <a:ln>
+            <a:noFill/>
+          </a:ln>
+        </p:spPr>
+        <p:style>
+          <a:lnRef idx="1">
+            <a:schemeClr val="accent1"/>
+          </a:lnRef>
+          <a:fillRef idx="3">
+            <a:schemeClr val="accent1"/>
+          </a:fillRef>
+          <a:effectRef idx="2">
+            <a:schemeClr val="accent1"/>
+          </a:effectRef>
+          <a:fontRef idx="minor">
+            <a:schemeClr val="lt1"/>
+          </a:fontRef>
+        </p:style>
+        <p:txBody>
+          <a:bodyPr rtlCol="0" anchor="ctr"/>
+          <a:lstStyle/>
+          <a:p>
+            <a:pPr algn="ctr"/>
+          </a:p>
+        </p:txBody>
+      </p:sp>
+      <p:sp>
+        <p:nvSpPr>
           <p:cNvPr id="4" name="TextBox 3"/>
           <p:cNvSpPr txBox="1"/>
           <p:nvPr/>
@@ -5976,7 +6824,7 @@
                   <a:srgbClr val="F59E0B"/>
                 </a:solidFill>
               </a:rPr>
-              <a:t>11</a:t>
+              <a:t>12</a:t>
             </a:r>
           </a:p>
         </p:txBody>

--- a/docs/apresentacao.pptx
+++ b/docs/apresentacao.pptx
@@ -4,21 +4,24 @@
   <p:sldMasterIdLst>
     <p:sldMasterId id="2147483648" r:id="rId1"/>
   </p:sldMasterIdLst>
+  <p:notesMasterIdLst>
+    <p:notesMasterId r:id="rId14"/>
+  </p:notesMasterIdLst>
   <p:sldIdLst>
-    <p:sldId id="256" r:id="rId7"/>
-    <p:sldId id="257" r:id="rId8"/>
-    <p:sldId id="258" r:id="rId9"/>
-    <p:sldId id="259" r:id="rId10"/>
-    <p:sldId id="260" r:id="rId11"/>
-    <p:sldId id="261" r:id="rId12"/>
-    <p:sldId id="262" r:id="rId13"/>
-    <p:sldId id="263" r:id="rId14"/>
-    <p:sldId id="264" r:id="rId15"/>
-    <p:sldId id="265" r:id="rId16"/>
-    <p:sldId id="266" r:id="rId17"/>
-    <p:sldId id="267" r:id="rId18"/>
+    <p:sldId id="256" r:id="rId2"/>
+    <p:sldId id="257" r:id="rId3"/>
+    <p:sldId id="258" r:id="rId4"/>
+    <p:sldId id="259" r:id="rId5"/>
+    <p:sldId id="260" r:id="rId6"/>
+    <p:sldId id="261" r:id="rId7"/>
+    <p:sldId id="262" r:id="rId8"/>
+    <p:sldId id="263" r:id="rId9"/>
+    <p:sldId id="264" r:id="rId10"/>
+    <p:sldId id="265" r:id="rId11"/>
+    <p:sldId id="266" r:id="rId12"/>
+    <p:sldId id="267" r:id="rId13"/>
   </p:sldIdLst>
-  <p:sldSz cx="12188952" cy="6858000" type="screen4x3"/>
+  <p:sldSz cx="12188825" cy="6858000"/>
   <p:notesSz cx="6858000" cy="9144000"/>
   <p:defaultTextStyle>
     <a:defPPr>
@@ -115,7 +118,456 @@
       </a:defRPr>
     </a:lvl9pPr>
   </p:defaultTextStyle>
+  <p:extLst>
+    <p:ext uri="{EFAFB233-063F-42B5-8137-9DF3F51BA10A}">
+      <p15:sldGuideLst xmlns:p15="http://schemas.microsoft.com/office/powerpoint/2012/main">
+        <p15:guide id="1" orient="horz" pos="2160">
+          <p15:clr>
+            <a:srgbClr val="A4A3A4"/>
+          </p15:clr>
+        </p15:guide>
+        <p15:guide id="2" pos="2880">
+          <p15:clr>
+            <a:srgbClr val="A4A3A4"/>
+          </p15:clr>
+        </p15:guide>
+      </p15:sldGuideLst>
+    </p:ext>
+  </p:extLst>
 </p:presentation>
+</file>
+
+<file path=ppt/notesMasters/notesMaster1.xml><?xml version="1.0" encoding="utf-8"?>
+<p:notesMaster xmlns:a="http://schemas.openxmlformats.org/drawingml/2006/main" xmlns:r="http://schemas.openxmlformats.org/officeDocument/2006/relationships" xmlns:p="http://schemas.openxmlformats.org/presentationml/2006/main">
+  <p:cSld>
+    <p:bg>
+      <p:bgRef idx="1001">
+        <a:schemeClr val="bg1"/>
+      </p:bgRef>
+    </p:bg>
+    <p:spTree>
+      <p:nvGrpSpPr>
+        <p:cNvPr id="1" name=""/>
+        <p:cNvGrpSpPr/>
+        <p:nvPr/>
+      </p:nvGrpSpPr>
+      <p:grpSpPr>
+        <a:xfrm>
+          <a:off x="0" y="0"/>
+          <a:ext cx="0" cy="0"/>
+          <a:chOff x="0" y="0"/>
+          <a:chExt cx="0" cy="0"/>
+        </a:xfrm>
+      </p:grpSpPr>
+      <p:sp>
+        <p:nvSpPr>
+          <p:cNvPr id="2" name="Espaço Reservado para Cabeçalho 1"/>
+          <p:cNvSpPr>
+            <a:spLocks noGrp="1"/>
+          </p:cNvSpPr>
+          <p:nvPr>
+            <p:ph type="hdr" sz="quarter"/>
+          </p:nvPr>
+        </p:nvSpPr>
+        <p:spPr>
+          <a:xfrm>
+            <a:off x="0" y="0"/>
+            <a:ext cx="2971800" cy="458788"/>
+          </a:xfrm>
+          <a:prstGeom prst="rect">
+            <a:avLst/>
+          </a:prstGeom>
+        </p:spPr>
+        <p:txBody>
+          <a:bodyPr vert="horz" lIns="91440" tIns="45720" rIns="91440" bIns="45720" rtlCol="0"/>
+          <a:lstStyle>
+            <a:lvl1pPr algn="l">
+              <a:defRPr sz="1200"/>
+            </a:lvl1pPr>
+          </a:lstStyle>
+          <a:p>
+            <a:endParaRPr lang="pt-BR"/>
+          </a:p>
+        </p:txBody>
+      </p:sp>
+      <p:sp>
+        <p:nvSpPr>
+          <p:cNvPr id="3" name="Espaço Reservado para Data 2"/>
+          <p:cNvSpPr>
+            <a:spLocks noGrp="1"/>
+          </p:cNvSpPr>
+          <p:nvPr>
+            <p:ph type="dt" idx="1"/>
+          </p:nvPr>
+        </p:nvSpPr>
+        <p:spPr>
+          <a:xfrm>
+            <a:off x="3884613" y="0"/>
+            <a:ext cx="2971800" cy="458788"/>
+          </a:xfrm>
+          <a:prstGeom prst="rect">
+            <a:avLst/>
+          </a:prstGeom>
+        </p:spPr>
+        <p:txBody>
+          <a:bodyPr vert="horz" lIns="91440" tIns="45720" rIns="91440" bIns="45720" rtlCol="0"/>
+          <a:lstStyle>
+            <a:lvl1pPr algn="r">
+              <a:defRPr sz="1200"/>
+            </a:lvl1pPr>
+          </a:lstStyle>
+          <a:p>
+            <a:fld id="{EDB25D08-F121-4212-9AA5-FE149F8A978A}" type="datetimeFigureOut">
+              <a:rPr lang="pt-BR" smtClean="0"/>
+              <a:t>01/05/2026</a:t>
+            </a:fld>
+            <a:endParaRPr lang="pt-BR"/>
+          </a:p>
+        </p:txBody>
+      </p:sp>
+      <p:sp>
+        <p:nvSpPr>
+          <p:cNvPr id="4" name="Espaço Reservado para Imagem de Slide 3"/>
+          <p:cNvSpPr>
+            <a:spLocks noGrp="1" noRot="1" noChangeAspect="1"/>
+          </p:cNvSpPr>
+          <p:nvPr>
+            <p:ph type="sldImg" idx="2"/>
+          </p:nvPr>
+        </p:nvSpPr>
+        <p:spPr>
+          <a:xfrm>
+            <a:off x="685800" y="1143000"/>
+            <a:ext cx="5486400" cy="3086100"/>
+          </a:xfrm>
+          <a:prstGeom prst="rect">
+            <a:avLst/>
+          </a:prstGeom>
+          <a:noFill/>
+          <a:ln w="12700">
+            <a:solidFill>
+              <a:prstClr val="black"/>
+            </a:solidFill>
+          </a:ln>
+        </p:spPr>
+        <p:txBody>
+          <a:bodyPr vert="horz" lIns="91440" tIns="45720" rIns="91440" bIns="45720" rtlCol="0" anchor="ctr"/>
+          <a:lstStyle/>
+          <a:p>
+            <a:endParaRPr lang="pt-BR"/>
+          </a:p>
+        </p:txBody>
+      </p:sp>
+      <p:sp>
+        <p:nvSpPr>
+          <p:cNvPr id="5" name="Espaço Reservado para Anotações 4"/>
+          <p:cNvSpPr>
+            <a:spLocks noGrp="1"/>
+          </p:cNvSpPr>
+          <p:nvPr>
+            <p:ph type="body" sz="quarter" idx="3"/>
+          </p:nvPr>
+        </p:nvSpPr>
+        <p:spPr>
+          <a:xfrm>
+            <a:off x="685800" y="4400550"/>
+            <a:ext cx="5486400" cy="3600450"/>
+          </a:xfrm>
+          <a:prstGeom prst="rect">
+            <a:avLst/>
+          </a:prstGeom>
+        </p:spPr>
+        <p:txBody>
+          <a:bodyPr vert="horz" lIns="91440" tIns="45720" rIns="91440" bIns="45720" rtlCol="0"/>
+          <a:lstStyle/>
+          <a:p>
+            <a:pPr lvl="0"/>
+            <a:r>
+              <a:rPr lang="pt-BR"/>
+              <a:t>Clique para editar os estilos de texto Mestres</a:t>
+            </a:r>
+          </a:p>
+          <a:p>
+            <a:pPr lvl="1"/>
+            <a:r>
+              <a:rPr lang="pt-BR"/>
+              <a:t>Segundo nível</a:t>
+            </a:r>
+          </a:p>
+          <a:p>
+            <a:pPr lvl="2"/>
+            <a:r>
+              <a:rPr lang="pt-BR"/>
+              <a:t>Terceiro nível</a:t>
+            </a:r>
+          </a:p>
+          <a:p>
+            <a:pPr lvl="3"/>
+            <a:r>
+              <a:rPr lang="pt-BR"/>
+              <a:t>Quarto nível</a:t>
+            </a:r>
+          </a:p>
+          <a:p>
+            <a:pPr lvl="4"/>
+            <a:r>
+              <a:rPr lang="pt-BR"/>
+              <a:t>Quinto nível</a:t>
+            </a:r>
+          </a:p>
+        </p:txBody>
+      </p:sp>
+      <p:sp>
+        <p:nvSpPr>
+          <p:cNvPr id="6" name="Espaço Reservado para Rodapé 5"/>
+          <p:cNvSpPr>
+            <a:spLocks noGrp="1"/>
+          </p:cNvSpPr>
+          <p:nvPr>
+            <p:ph type="ftr" sz="quarter" idx="4"/>
+          </p:nvPr>
+        </p:nvSpPr>
+        <p:spPr>
+          <a:xfrm>
+            <a:off x="0" y="8685213"/>
+            <a:ext cx="2971800" cy="458787"/>
+          </a:xfrm>
+          <a:prstGeom prst="rect">
+            <a:avLst/>
+          </a:prstGeom>
+        </p:spPr>
+        <p:txBody>
+          <a:bodyPr vert="horz" lIns="91440" tIns="45720" rIns="91440" bIns="45720" rtlCol="0" anchor="b"/>
+          <a:lstStyle>
+            <a:lvl1pPr algn="l">
+              <a:defRPr sz="1200"/>
+            </a:lvl1pPr>
+          </a:lstStyle>
+          <a:p>
+            <a:endParaRPr lang="pt-BR"/>
+          </a:p>
+        </p:txBody>
+      </p:sp>
+      <p:sp>
+        <p:nvSpPr>
+          <p:cNvPr id="7" name="Espaço Reservado para Número de Slide 6"/>
+          <p:cNvSpPr>
+            <a:spLocks noGrp="1"/>
+          </p:cNvSpPr>
+          <p:nvPr>
+            <p:ph type="sldNum" sz="quarter" idx="5"/>
+          </p:nvPr>
+        </p:nvSpPr>
+        <p:spPr>
+          <a:xfrm>
+            <a:off x="3884613" y="8685213"/>
+            <a:ext cx="2971800" cy="458787"/>
+          </a:xfrm>
+          <a:prstGeom prst="rect">
+            <a:avLst/>
+          </a:prstGeom>
+        </p:spPr>
+        <p:txBody>
+          <a:bodyPr vert="horz" lIns="91440" tIns="45720" rIns="91440" bIns="45720" rtlCol="0" anchor="b"/>
+          <a:lstStyle>
+            <a:lvl1pPr algn="r">
+              <a:defRPr sz="1200"/>
+            </a:lvl1pPr>
+          </a:lstStyle>
+          <a:p>
+            <a:fld id="{121948E8-F21B-4D22-A92B-30DD5C31BDA4}" type="slidenum">
+              <a:rPr lang="pt-BR" smtClean="0"/>
+              <a:t>‹nº›</a:t>
+            </a:fld>
+            <a:endParaRPr lang="pt-BR"/>
+          </a:p>
+        </p:txBody>
+      </p:sp>
+    </p:spTree>
+    <p:extLst>
+      <p:ext uri="{BB962C8B-B14F-4D97-AF65-F5344CB8AC3E}">
+        <p14:creationId xmlns:p14="http://schemas.microsoft.com/office/powerpoint/2010/main" val="3827987793"/>
+      </p:ext>
+    </p:extLst>
+  </p:cSld>
+  <p:clrMap bg1="lt1" tx1="dk1" bg2="lt2" tx2="dk2" accent1="accent1" accent2="accent2" accent3="accent3" accent4="accent4" accent5="accent5" accent6="accent6" hlink="hlink" folHlink="folHlink"/>
+  <p:notesStyle>
+    <a:lvl1pPr marL="0" algn="l" defTabSz="914400" rtl="0" eaLnBrk="1" latinLnBrk="0" hangingPunct="1">
+      <a:defRPr sz="1200" kern="1200">
+        <a:solidFill>
+          <a:schemeClr val="tx1"/>
+        </a:solidFill>
+        <a:latin typeface="+mn-lt"/>
+        <a:ea typeface="+mn-ea"/>
+        <a:cs typeface="+mn-cs"/>
+      </a:defRPr>
+    </a:lvl1pPr>
+    <a:lvl2pPr marL="457200" algn="l" defTabSz="914400" rtl="0" eaLnBrk="1" latinLnBrk="0" hangingPunct="1">
+      <a:defRPr sz="1200" kern="1200">
+        <a:solidFill>
+          <a:schemeClr val="tx1"/>
+        </a:solidFill>
+        <a:latin typeface="+mn-lt"/>
+        <a:ea typeface="+mn-ea"/>
+        <a:cs typeface="+mn-cs"/>
+      </a:defRPr>
+    </a:lvl2pPr>
+    <a:lvl3pPr marL="914400" algn="l" defTabSz="914400" rtl="0" eaLnBrk="1" latinLnBrk="0" hangingPunct="1">
+      <a:defRPr sz="1200" kern="1200">
+        <a:solidFill>
+          <a:schemeClr val="tx1"/>
+        </a:solidFill>
+        <a:latin typeface="+mn-lt"/>
+        <a:ea typeface="+mn-ea"/>
+        <a:cs typeface="+mn-cs"/>
+      </a:defRPr>
+    </a:lvl3pPr>
+    <a:lvl4pPr marL="1371600" algn="l" defTabSz="914400" rtl="0" eaLnBrk="1" latinLnBrk="0" hangingPunct="1">
+      <a:defRPr sz="1200" kern="1200">
+        <a:solidFill>
+          <a:schemeClr val="tx1"/>
+        </a:solidFill>
+        <a:latin typeface="+mn-lt"/>
+        <a:ea typeface="+mn-ea"/>
+        <a:cs typeface="+mn-cs"/>
+      </a:defRPr>
+    </a:lvl4pPr>
+    <a:lvl5pPr marL="1828800" algn="l" defTabSz="914400" rtl="0" eaLnBrk="1" latinLnBrk="0" hangingPunct="1">
+      <a:defRPr sz="1200" kern="1200">
+        <a:solidFill>
+          <a:schemeClr val="tx1"/>
+        </a:solidFill>
+        <a:latin typeface="+mn-lt"/>
+        <a:ea typeface="+mn-ea"/>
+        <a:cs typeface="+mn-cs"/>
+      </a:defRPr>
+    </a:lvl5pPr>
+    <a:lvl6pPr marL="2286000" algn="l" defTabSz="914400" rtl="0" eaLnBrk="1" latinLnBrk="0" hangingPunct="1">
+      <a:defRPr sz="1200" kern="1200">
+        <a:solidFill>
+          <a:schemeClr val="tx1"/>
+        </a:solidFill>
+        <a:latin typeface="+mn-lt"/>
+        <a:ea typeface="+mn-ea"/>
+        <a:cs typeface="+mn-cs"/>
+      </a:defRPr>
+    </a:lvl6pPr>
+    <a:lvl7pPr marL="2743200" algn="l" defTabSz="914400" rtl="0" eaLnBrk="1" latinLnBrk="0" hangingPunct="1">
+      <a:defRPr sz="1200" kern="1200">
+        <a:solidFill>
+          <a:schemeClr val="tx1"/>
+        </a:solidFill>
+        <a:latin typeface="+mn-lt"/>
+        <a:ea typeface="+mn-ea"/>
+        <a:cs typeface="+mn-cs"/>
+      </a:defRPr>
+    </a:lvl7pPr>
+    <a:lvl8pPr marL="3200400" algn="l" defTabSz="914400" rtl="0" eaLnBrk="1" latinLnBrk="0" hangingPunct="1">
+      <a:defRPr sz="1200" kern="1200">
+        <a:solidFill>
+          <a:schemeClr val="tx1"/>
+        </a:solidFill>
+        <a:latin typeface="+mn-lt"/>
+        <a:ea typeface="+mn-ea"/>
+        <a:cs typeface="+mn-cs"/>
+      </a:defRPr>
+    </a:lvl8pPr>
+    <a:lvl9pPr marL="3657600" algn="l" defTabSz="914400" rtl="0" eaLnBrk="1" latinLnBrk="0" hangingPunct="1">
+      <a:defRPr sz="1200" kern="1200">
+        <a:solidFill>
+          <a:schemeClr val="tx1"/>
+        </a:solidFill>
+        <a:latin typeface="+mn-lt"/>
+        <a:ea typeface="+mn-ea"/>
+        <a:cs typeface="+mn-cs"/>
+      </a:defRPr>
+    </a:lvl9pPr>
+  </p:notesStyle>
+</p:notesMaster>
+</file>
+
+<file path=ppt/notesSlides/notesSlide1.xml><?xml version="1.0" encoding="utf-8"?>
+<p:notes xmlns:a="http://schemas.openxmlformats.org/drawingml/2006/main" xmlns:r="http://schemas.openxmlformats.org/officeDocument/2006/relationships" xmlns:p="http://schemas.openxmlformats.org/presentationml/2006/main">
+  <p:cSld>
+    <p:spTree>
+      <p:nvGrpSpPr>
+        <p:cNvPr id="1" name=""/>
+        <p:cNvGrpSpPr/>
+        <p:nvPr/>
+      </p:nvGrpSpPr>
+      <p:grpSpPr>
+        <a:xfrm>
+          <a:off x="0" y="0"/>
+          <a:ext cx="0" cy="0"/>
+          <a:chOff x="0" y="0"/>
+          <a:chExt cx="0" cy="0"/>
+        </a:xfrm>
+      </p:grpSpPr>
+      <p:sp>
+        <p:nvSpPr>
+          <p:cNvPr id="2" name="Espaço Reservado para Imagem de Slide 1"/>
+          <p:cNvSpPr>
+            <a:spLocks noGrp="1" noRot="1" noChangeAspect="1"/>
+          </p:cNvSpPr>
+          <p:nvPr>
+            <p:ph type="sldImg"/>
+          </p:nvPr>
+        </p:nvSpPr>
+        <p:spPr/>
+      </p:sp>
+      <p:sp>
+        <p:nvSpPr>
+          <p:cNvPr id="3" name="Espaço Reservado para Anotações 2"/>
+          <p:cNvSpPr>
+            <a:spLocks noGrp="1"/>
+          </p:cNvSpPr>
+          <p:nvPr>
+            <p:ph type="body" idx="1"/>
+          </p:nvPr>
+        </p:nvSpPr>
+        <p:spPr/>
+        <p:txBody>
+          <a:bodyPr/>
+          <a:lstStyle/>
+          <a:p>
+            <a:endParaRPr lang="pt-BR" dirty="0"/>
+          </a:p>
+        </p:txBody>
+      </p:sp>
+      <p:sp>
+        <p:nvSpPr>
+          <p:cNvPr id="4" name="Espaço Reservado para Número de Slide 3"/>
+          <p:cNvSpPr>
+            <a:spLocks noGrp="1"/>
+          </p:cNvSpPr>
+          <p:nvPr>
+            <p:ph type="sldNum" sz="quarter" idx="5"/>
+          </p:nvPr>
+        </p:nvSpPr>
+        <p:spPr/>
+        <p:txBody>
+          <a:bodyPr/>
+          <a:lstStyle/>
+          <a:p>
+            <a:fld id="{121948E8-F21B-4D22-A92B-30DD5C31BDA4}" type="slidenum">
+              <a:rPr lang="pt-BR" smtClean="0"/>
+              <a:t>5</a:t>
+            </a:fld>
+            <a:endParaRPr lang="pt-BR"/>
+          </a:p>
+        </p:txBody>
+      </p:sp>
+    </p:spTree>
+    <p:extLst>
+      <p:ext uri="{BB962C8B-B14F-4D97-AF65-F5344CB8AC3E}">
+        <p14:creationId xmlns:p14="http://schemas.microsoft.com/office/powerpoint/2010/main" val="2702485238"/>
+      </p:ext>
+    </p:extLst>
+  </p:cSld>
+  <p:clrMapOvr>
+    <a:masterClrMapping/>
+  </p:clrMapOvr>
+</p:notes>
 </file>
 
 <file path=ppt/slideLayouts/slideLayout1.xml><?xml version="1.0" encoding="utf-8"?>
@@ -156,10 +608,9 @@
           <a:lstStyle/>
           <a:p>
             <a:r>
-              <a:rPr lang="en-US" smtClean="0"/>
+              <a:rPr lang="en-US"/>
               <a:t>Click to edit Master title style</a:t>
             </a:r>
-            <a:endParaRPr lang="en-US"/>
           </a:p>
         </p:txBody>
       </p:sp>
@@ -275,10 +726,9 @@
           </a:lstStyle>
           <a:p>
             <a:r>
-              <a:rPr lang="en-US" smtClean="0"/>
+              <a:rPr lang="en-US"/>
               <a:t>Click to edit Master subtitle style</a:t>
             </a:r>
-            <a:endParaRPr lang="en-US"/>
           </a:p>
         </p:txBody>
       </p:sp>
@@ -299,7 +749,7 @@
           <a:p>
             <a:fld id="{5BCAD085-E8A6-8845-BD4E-CB4CCA059FC4}" type="datetimeFigureOut">
               <a:rPr lang="en-US" smtClean="0"/>
-              <a:t>1/27/13</a:t>
+              <a:t>5/1/2026</a:t>
             </a:fld>
             <a:endParaRPr lang="en-US"/>
           </a:p>
@@ -341,7 +791,7 @@
           <a:p>
             <a:fld id="{C1FF6DA9-008F-8B48-92A6-B652298478BF}" type="slidenum">
               <a:rPr lang="en-US" smtClean="0"/>
-              <a:t>‹#›</a:t>
+              <a:t>‹nº›</a:t>
             </a:fld>
             <a:endParaRPr lang="en-US"/>
           </a:p>
@@ -393,10 +843,9 @@
           <a:lstStyle/>
           <a:p>
             <a:r>
-              <a:rPr lang="en-US" smtClean="0"/>
+              <a:rPr lang="en-US"/>
               <a:t>Click to edit Master title style</a:t>
             </a:r>
-            <a:endParaRPr lang="en-US"/>
           </a:p>
         </p:txBody>
       </p:sp>
@@ -417,38 +866,37 @@
           <a:p>
             <a:pPr lvl="0"/>
             <a:r>
-              <a:rPr lang="en-US" smtClean="0"/>
+              <a:rPr lang="en-US"/>
               <a:t>Click to edit Master text styles</a:t>
             </a:r>
           </a:p>
           <a:p>
             <a:pPr lvl="1"/>
             <a:r>
-              <a:rPr lang="en-US" smtClean="0"/>
+              <a:rPr lang="en-US"/>
               <a:t>Second level</a:t>
             </a:r>
           </a:p>
           <a:p>
             <a:pPr lvl="2"/>
             <a:r>
-              <a:rPr lang="en-US" smtClean="0"/>
+              <a:rPr lang="en-US"/>
               <a:t>Third level</a:t>
             </a:r>
           </a:p>
           <a:p>
             <a:pPr lvl="3"/>
             <a:r>
-              <a:rPr lang="en-US" smtClean="0"/>
+              <a:rPr lang="en-US"/>
               <a:t>Fourth level</a:t>
             </a:r>
           </a:p>
           <a:p>
             <a:pPr lvl="4"/>
             <a:r>
-              <a:rPr lang="en-US" smtClean="0"/>
+              <a:rPr lang="en-US"/>
               <a:t>Fifth level</a:t>
             </a:r>
-            <a:endParaRPr lang="en-US"/>
           </a:p>
         </p:txBody>
       </p:sp>
@@ -469,7 +917,7 @@
           <a:p>
             <a:fld id="{5BCAD085-E8A6-8845-BD4E-CB4CCA059FC4}" type="datetimeFigureOut">
               <a:rPr lang="en-US" smtClean="0"/>
-              <a:t>1/27/13</a:t>
+              <a:t>5/1/2026</a:t>
             </a:fld>
             <a:endParaRPr lang="en-US"/>
           </a:p>
@@ -511,7 +959,7 @@
           <a:p>
             <a:fld id="{C1FF6DA9-008F-8B48-92A6-B652298478BF}" type="slidenum">
               <a:rPr lang="en-US" smtClean="0"/>
-              <a:t>‹#›</a:t>
+              <a:t>‹nº›</a:t>
             </a:fld>
             <a:endParaRPr lang="en-US"/>
           </a:p>
@@ -568,10 +1016,9 @@
           <a:lstStyle/>
           <a:p>
             <a:r>
-              <a:rPr lang="en-US" smtClean="0"/>
+              <a:rPr lang="en-US"/>
               <a:t>Click to edit Master title style</a:t>
             </a:r>
-            <a:endParaRPr lang="en-US"/>
           </a:p>
         </p:txBody>
       </p:sp>
@@ -597,38 +1044,37 @@
           <a:p>
             <a:pPr lvl="0"/>
             <a:r>
-              <a:rPr lang="en-US" smtClean="0"/>
+              <a:rPr lang="en-US"/>
               <a:t>Click to edit Master text styles</a:t>
             </a:r>
           </a:p>
           <a:p>
             <a:pPr lvl="1"/>
             <a:r>
-              <a:rPr lang="en-US" smtClean="0"/>
+              <a:rPr lang="en-US"/>
               <a:t>Second level</a:t>
             </a:r>
           </a:p>
           <a:p>
             <a:pPr lvl="2"/>
             <a:r>
-              <a:rPr lang="en-US" smtClean="0"/>
+              <a:rPr lang="en-US"/>
               <a:t>Third level</a:t>
             </a:r>
           </a:p>
           <a:p>
             <a:pPr lvl="3"/>
             <a:r>
-              <a:rPr lang="en-US" smtClean="0"/>
+              <a:rPr lang="en-US"/>
               <a:t>Fourth level</a:t>
             </a:r>
           </a:p>
           <a:p>
             <a:pPr lvl="4"/>
             <a:r>
-              <a:rPr lang="en-US" smtClean="0"/>
+              <a:rPr lang="en-US"/>
               <a:t>Fifth level</a:t>
             </a:r>
-            <a:endParaRPr lang="en-US"/>
           </a:p>
         </p:txBody>
       </p:sp>
@@ -649,7 +1095,7 @@
           <a:p>
             <a:fld id="{5BCAD085-E8A6-8845-BD4E-CB4CCA059FC4}" type="datetimeFigureOut">
               <a:rPr lang="en-US" smtClean="0"/>
-              <a:t>1/27/13</a:t>
+              <a:t>5/1/2026</a:t>
             </a:fld>
             <a:endParaRPr lang="en-US"/>
           </a:p>
@@ -691,7 +1137,7 @@
           <a:p>
             <a:fld id="{C1FF6DA9-008F-8B48-92A6-B652298478BF}" type="slidenum">
               <a:rPr lang="en-US" smtClean="0"/>
-              <a:t>‹#›</a:t>
+              <a:t>‹nº›</a:t>
             </a:fld>
             <a:endParaRPr lang="en-US"/>
           </a:p>
@@ -743,10 +1189,9 @@
           <a:lstStyle/>
           <a:p>
             <a:r>
-              <a:rPr lang="en-US" smtClean="0"/>
+              <a:rPr lang="en-US"/>
               <a:t>Click to edit Master title style</a:t>
             </a:r>
-            <a:endParaRPr lang="en-US"/>
           </a:p>
         </p:txBody>
       </p:sp>
@@ -767,38 +1212,37 @@
           <a:p>
             <a:pPr lvl="0"/>
             <a:r>
-              <a:rPr lang="en-US" smtClean="0"/>
+              <a:rPr lang="en-US"/>
               <a:t>Click to edit Master text styles</a:t>
             </a:r>
           </a:p>
           <a:p>
             <a:pPr lvl="1"/>
             <a:r>
-              <a:rPr lang="en-US" smtClean="0"/>
+              <a:rPr lang="en-US"/>
               <a:t>Second level</a:t>
             </a:r>
           </a:p>
           <a:p>
             <a:pPr lvl="2"/>
             <a:r>
-              <a:rPr lang="en-US" smtClean="0"/>
+              <a:rPr lang="en-US"/>
               <a:t>Third level</a:t>
             </a:r>
           </a:p>
           <a:p>
             <a:pPr lvl="3"/>
             <a:r>
-              <a:rPr lang="en-US" smtClean="0"/>
+              <a:rPr lang="en-US"/>
               <a:t>Fourth level</a:t>
             </a:r>
           </a:p>
           <a:p>
             <a:pPr lvl="4"/>
             <a:r>
-              <a:rPr lang="en-US" smtClean="0"/>
+              <a:rPr lang="en-US"/>
               <a:t>Fifth level</a:t>
             </a:r>
-            <a:endParaRPr lang="en-US"/>
           </a:p>
         </p:txBody>
       </p:sp>
@@ -819,7 +1263,7 @@
           <a:p>
             <a:fld id="{5BCAD085-E8A6-8845-BD4E-CB4CCA059FC4}" type="datetimeFigureOut">
               <a:rPr lang="en-US" smtClean="0"/>
-              <a:t>1/27/13</a:t>
+              <a:t>5/1/2026</a:t>
             </a:fld>
             <a:endParaRPr lang="en-US"/>
           </a:p>
@@ -861,7 +1305,7 @@
           <a:p>
             <a:fld id="{C1FF6DA9-008F-8B48-92A6-B652298478BF}" type="slidenum">
               <a:rPr lang="en-US" smtClean="0"/>
-              <a:t>‹#›</a:t>
+              <a:t>‹nº›</a:t>
             </a:fld>
             <a:endParaRPr lang="en-US"/>
           </a:p>
@@ -922,10 +1366,9 @@
           </a:lstStyle>
           <a:p>
             <a:r>
-              <a:rPr lang="en-US" smtClean="0"/>
+              <a:rPr lang="en-US"/>
               <a:t>Click to edit Master title style</a:t>
             </a:r>
-            <a:endParaRPr lang="en-US"/>
           </a:p>
         </p:txBody>
       </p:sp>
@@ -1042,7 +1485,7 @@
           <a:p>
             <a:pPr lvl="0"/>
             <a:r>
-              <a:rPr lang="en-US" smtClean="0"/>
+              <a:rPr lang="en-US"/>
               <a:t>Click to edit Master text styles</a:t>
             </a:r>
           </a:p>
@@ -1065,7 +1508,7 @@
           <a:p>
             <a:fld id="{5BCAD085-E8A6-8845-BD4E-CB4CCA059FC4}" type="datetimeFigureOut">
               <a:rPr lang="en-US" smtClean="0"/>
-              <a:t>1/27/13</a:t>
+              <a:t>5/1/2026</a:t>
             </a:fld>
             <a:endParaRPr lang="en-US"/>
           </a:p>
@@ -1107,7 +1550,7 @@
           <a:p>
             <a:fld id="{C1FF6DA9-008F-8B48-92A6-B652298478BF}" type="slidenum">
               <a:rPr lang="en-US" smtClean="0"/>
-              <a:t>‹#›</a:t>
+              <a:t>‹nº›</a:t>
             </a:fld>
             <a:endParaRPr lang="en-US"/>
           </a:p>
@@ -1159,10 +1602,9 @@
           <a:lstStyle/>
           <a:p>
             <a:r>
-              <a:rPr lang="en-US" smtClean="0"/>
+              <a:rPr lang="en-US"/>
               <a:t>Click to edit Master title style</a:t>
             </a:r>
-            <a:endParaRPr lang="en-US"/>
           </a:p>
         </p:txBody>
       </p:sp>
@@ -1216,38 +1658,37 @@
           <a:p>
             <a:pPr lvl="0"/>
             <a:r>
-              <a:rPr lang="en-US" smtClean="0"/>
+              <a:rPr lang="en-US"/>
               <a:t>Click to edit Master text styles</a:t>
             </a:r>
           </a:p>
           <a:p>
             <a:pPr lvl="1"/>
             <a:r>
-              <a:rPr lang="en-US" smtClean="0"/>
+              <a:rPr lang="en-US"/>
               <a:t>Second level</a:t>
             </a:r>
           </a:p>
           <a:p>
             <a:pPr lvl="2"/>
             <a:r>
-              <a:rPr lang="en-US" smtClean="0"/>
+              <a:rPr lang="en-US"/>
               <a:t>Third level</a:t>
             </a:r>
           </a:p>
           <a:p>
             <a:pPr lvl="3"/>
             <a:r>
-              <a:rPr lang="en-US" smtClean="0"/>
+              <a:rPr lang="en-US"/>
               <a:t>Fourth level</a:t>
             </a:r>
           </a:p>
           <a:p>
             <a:pPr lvl="4"/>
             <a:r>
-              <a:rPr lang="en-US" smtClean="0"/>
+              <a:rPr lang="en-US"/>
               <a:t>Fifth level</a:t>
             </a:r>
-            <a:endParaRPr lang="en-US"/>
           </a:p>
         </p:txBody>
       </p:sp>
@@ -1301,38 +1742,37 @@
           <a:p>
             <a:pPr lvl="0"/>
             <a:r>
-              <a:rPr lang="en-US" smtClean="0"/>
+              <a:rPr lang="en-US"/>
               <a:t>Click to edit Master text styles</a:t>
             </a:r>
           </a:p>
           <a:p>
             <a:pPr lvl="1"/>
             <a:r>
-              <a:rPr lang="en-US" smtClean="0"/>
+              <a:rPr lang="en-US"/>
               <a:t>Second level</a:t>
             </a:r>
           </a:p>
           <a:p>
             <a:pPr lvl="2"/>
             <a:r>
-              <a:rPr lang="en-US" smtClean="0"/>
+              <a:rPr lang="en-US"/>
               <a:t>Third level</a:t>
             </a:r>
           </a:p>
           <a:p>
             <a:pPr lvl="3"/>
             <a:r>
-              <a:rPr lang="en-US" smtClean="0"/>
+              <a:rPr lang="en-US"/>
               <a:t>Fourth level</a:t>
             </a:r>
           </a:p>
           <a:p>
             <a:pPr lvl="4"/>
             <a:r>
-              <a:rPr lang="en-US" smtClean="0"/>
+              <a:rPr lang="en-US"/>
               <a:t>Fifth level</a:t>
             </a:r>
-            <a:endParaRPr lang="en-US"/>
           </a:p>
         </p:txBody>
       </p:sp>
@@ -1353,7 +1793,7 @@
           <a:p>
             <a:fld id="{5BCAD085-E8A6-8845-BD4E-CB4CCA059FC4}" type="datetimeFigureOut">
               <a:rPr lang="en-US" smtClean="0"/>
-              <a:t>1/27/13</a:t>
+              <a:t>5/1/2026</a:t>
             </a:fld>
             <a:endParaRPr lang="en-US"/>
           </a:p>
@@ -1395,7 +1835,7 @@
           <a:p>
             <a:fld id="{C1FF6DA9-008F-8B48-92A6-B652298478BF}" type="slidenum">
               <a:rPr lang="en-US" smtClean="0"/>
-              <a:t>‹#›</a:t>
+              <a:t>‹nº›</a:t>
             </a:fld>
             <a:endParaRPr lang="en-US"/>
           </a:p>
@@ -1451,10 +1891,9 @@
           </a:lstStyle>
           <a:p>
             <a:r>
-              <a:rPr lang="en-US" smtClean="0"/>
+              <a:rPr lang="en-US"/>
               <a:t>Click to edit Master title style</a:t>
             </a:r>
-            <a:endParaRPr lang="en-US"/>
           </a:p>
         </p:txBody>
       </p:sp>
@@ -1517,7 +1956,7 @@
           <a:p>
             <a:pPr lvl="0"/>
             <a:r>
-              <a:rPr lang="en-US" smtClean="0"/>
+              <a:rPr lang="en-US"/>
               <a:t>Click to edit Master text styles</a:t>
             </a:r>
           </a:p>
@@ -1573,38 +2012,37 @@
           <a:p>
             <a:pPr lvl="0"/>
             <a:r>
-              <a:rPr lang="en-US" smtClean="0"/>
+              <a:rPr lang="en-US"/>
               <a:t>Click to edit Master text styles</a:t>
             </a:r>
           </a:p>
           <a:p>
             <a:pPr lvl="1"/>
             <a:r>
-              <a:rPr lang="en-US" smtClean="0"/>
+              <a:rPr lang="en-US"/>
               <a:t>Second level</a:t>
             </a:r>
           </a:p>
           <a:p>
             <a:pPr lvl="2"/>
             <a:r>
-              <a:rPr lang="en-US" smtClean="0"/>
+              <a:rPr lang="en-US"/>
               <a:t>Third level</a:t>
             </a:r>
           </a:p>
           <a:p>
             <a:pPr lvl="3"/>
             <a:r>
-              <a:rPr lang="en-US" smtClean="0"/>
+              <a:rPr lang="en-US"/>
               <a:t>Fourth level</a:t>
             </a:r>
           </a:p>
           <a:p>
             <a:pPr lvl="4"/>
             <a:r>
-              <a:rPr lang="en-US" smtClean="0"/>
+              <a:rPr lang="en-US"/>
               <a:t>Fifth level</a:t>
             </a:r>
-            <a:endParaRPr lang="en-US"/>
           </a:p>
         </p:txBody>
       </p:sp>
@@ -1667,7 +2105,7 @@
           <a:p>
             <a:pPr lvl="0"/>
             <a:r>
-              <a:rPr lang="en-US" smtClean="0"/>
+              <a:rPr lang="en-US"/>
               <a:t>Click to edit Master text styles</a:t>
             </a:r>
           </a:p>
@@ -1723,38 +2161,37 @@
           <a:p>
             <a:pPr lvl="0"/>
             <a:r>
-              <a:rPr lang="en-US" smtClean="0"/>
+              <a:rPr lang="en-US"/>
               <a:t>Click to edit Master text styles</a:t>
             </a:r>
           </a:p>
           <a:p>
             <a:pPr lvl="1"/>
             <a:r>
-              <a:rPr lang="en-US" smtClean="0"/>
+              <a:rPr lang="en-US"/>
               <a:t>Second level</a:t>
             </a:r>
           </a:p>
           <a:p>
             <a:pPr lvl="2"/>
             <a:r>
-              <a:rPr lang="en-US" smtClean="0"/>
+              <a:rPr lang="en-US"/>
               <a:t>Third level</a:t>
             </a:r>
           </a:p>
           <a:p>
             <a:pPr lvl="3"/>
             <a:r>
-              <a:rPr lang="en-US" smtClean="0"/>
+              <a:rPr lang="en-US"/>
               <a:t>Fourth level</a:t>
             </a:r>
           </a:p>
           <a:p>
             <a:pPr lvl="4"/>
             <a:r>
-              <a:rPr lang="en-US" smtClean="0"/>
+              <a:rPr lang="en-US"/>
               <a:t>Fifth level</a:t>
             </a:r>
-            <a:endParaRPr lang="en-US"/>
           </a:p>
         </p:txBody>
       </p:sp>
@@ -1775,7 +2212,7 @@
           <a:p>
             <a:fld id="{5BCAD085-E8A6-8845-BD4E-CB4CCA059FC4}" type="datetimeFigureOut">
               <a:rPr lang="en-US" smtClean="0"/>
-              <a:t>1/27/13</a:t>
+              <a:t>5/1/2026</a:t>
             </a:fld>
             <a:endParaRPr lang="en-US"/>
           </a:p>
@@ -1817,7 +2254,7 @@
           <a:p>
             <a:fld id="{C1FF6DA9-008F-8B48-92A6-B652298478BF}" type="slidenum">
               <a:rPr lang="en-US" smtClean="0"/>
-              <a:t>‹#›</a:t>
+              <a:t>‹nº›</a:t>
             </a:fld>
             <a:endParaRPr lang="en-US"/>
           </a:p>
@@ -1869,10 +2306,9 @@
           <a:lstStyle/>
           <a:p>
             <a:r>
-              <a:rPr lang="en-US" smtClean="0"/>
+              <a:rPr lang="en-US"/>
               <a:t>Click to edit Master title style</a:t>
             </a:r>
-            <a:endParaRPr lang="en-US"/>
           </a:p>
         </p:txBody>
       </p:sp>
@@ -1893,7 +2329,7 @@
           <a:p>
             <a:fld id="{5BCAD085-E8A6-8845-BD4E-CB4CCA059FC4}" type="datetimeFigureOut">
               <a:rPr lang="en-US" smtClean="0"/>
-              <a:t>1/27/13</a:t>
+              <a:t>5/1/2026</a:t>
             </a:fld>
             <a:endParaRPr lang="en-US"/>
           </a:p>
@@ -1935,7 +2371,7 @@
           <a:p>
             <a:fld id="{C1FF6DA9-008F-8B48-92A6-B652298478BF}" type="slidenum">
               <a:rPr lang="en-US" smtClean="0"/>
-              <a:t>‹#›</a:t>
+              <a:t>‹nº›</a:t>
             </a:fld>
             <a:endParaRPr lang="en-US"/>
           </a:p>
@@ -1988,7 +2424,7 @@
           <a:p>
             <a:fld id="{5BCAD085-E8A6-8845-BD4E-CB4CCA059FC4}" type="datetimeFigureOut">
               <a:rPr lang="en-US" smtClean="0"/>
-              <a:t>1/27/13</a:t>
+              <a:t>5/1/2026</a:t>
             </a:fld>
             <a:endParaRPr lang="en-US"/>
           </a:p>
@@ -2030,7 +2466,7 @@
           <a:p>
             <a:fld id="{C1FF6DA9-008F-8B48-92A6-B652298478BF}" type="slidenum">
               <a:rPr lang="en-US" smtClean="0"/>
-              <a:t>‹#›</a:t>
+              <a:t>‹nº›</a:t>
             </a:fld>
             <a:endParaRPr lang="en-US"/>
           </a:p>
@@ -2091,10 +2527,9 @@
           </a:lstStyle>
           <a:p>
             <a:r>
-              <a:rPr lang="en-US" smtClean="0"/>
+              <a:rPr lang="en-US"/>
               <a:t>Click to edit Master title style</a:t>
             </a:r>
-            <a:endParaRPr lang="en-US"/>
           </a:p>
         </p:txBody>
       </p:sp>
@@ -2148,38 +2583,37 @@
           <a:p>
             <a:pPr lvl="0"/>
             <a:r>
-              <a:rPr lang="en-US" smtClean="0"/>
+              <a:rPr lang="en-US"/>
               <a:t>Click to edit Master text styles</a:t>
             </a:r>
           </a:p>
           <a:p>
             <a:pPr lvl="1"/>
             <a:r>
-              <a:rPr lang="en-US" smtClean="0"/>
+              <a:rPr lang="en-US"/>
               <a:t>Second level</a:t>
             </a:r>
           </a:p>
           <a:p>
             <a:pPr lvl="2"/>
             <a:r>
-              <a:rPr lang="en-US" smtClean="0"/>
+              <a:rPr lang="en-US"/>
               <a:t>Third level</a:t>
             </a:r>
           </a:p>
           <a:p>
             <a:pPr lvl="3"/>
             <a:r>
-              <a:rPr lang="en-US" smtClean="0"/>
+              <a:rPr lang="en-US"/>
               <a:t>Fourth level</a:t>
             </a:r>
           </a:p>
           <a:p>
             <a:pPr lvl="4"/>
             <a:r>
-              <a:rPr lang="en-US" smtClean="0"/>
+              <a:rPr lang="en-US"/>
               <a:t>Fifth level</a:t>
             </a:r>
-            <a:endParaRPr lang="en-US"/>
           </a:p>
         </p:txBody>
       </p:sp>
@@ -2242,7 +2676,7 @@
           <a:p>
             <a:pPr lvl="0"/>
             <a:r>
-              <a:rPr lang="en-US" smtClean="0"/>
+              <a:rPr lang="en-US"/>
               <a:t>Click to edit Master text styles</a:t>
             </a:r>
           </a:p>
@@ -2265,7 +2699,7 @@
           <a:p>
             <a:fld id="{5BCAD085-E8A6-8845-BD4E-CB4CCA059FC4}" type="datetimeFigureOut">
               <a:rPr lang="en-US" smtClean="0"/>
-              <a:t>1/27/13</a:t>
+              <a:t>5/1/2026</a:t>
             </a:fld>
             <a:endParaRPr lang="en-US"/>
           </a:p>
@@ -2307,7 +2741,7 @@
           <a:p>
             <a:fld id="{C1FF6DA9-008F-8B48-92A6-B652298478BF}" type="slidenum">
               <a:rPr lang="en-US" smtClean="0"/>
-              <a:t>‹#›</a:t>
+              <a:t>‹nº›</a:t>
             </a:fld>
             <a:endParaRPr lang="en-US"/>
           </a:p>
@@ -2368,10 +2802,9 @@
           </a:lstStyle>
           <a:p>
             <a:r>
-              <a:rPr lang="en-US" smtClean="0"/>
+              <a:rPr lang="en-US"/>
               <a:t>Click to edit Master title style</a:t>
             </a:r>
-            <a:endParaRPr lang="en-US"/>
           </a:p>
         </p:txBody>
       </p:sp>
@@ -2495,7 +2928,7 @@
           <a:p>
             <a:pPr lvl="0"/>
             <a:r>
-              <a:rPr lang="en-US" smtClean="0"/>
+              <a:rPr lang="en-US"/>
               <a:t>Click to edit Master text styles</a:t>
             </a:r>
           </a:p>
@@ -2518,7 +2951,7 @@
           <a:p>
             <a:fld id="{5BCAD085-E8A6-8845-BD4E-CB4CCA059FC4}" type="datetimeFigureOut">
               <a:rPr lang="en-US" smtClean="0"/>
-              <a:t>1/27/13</a:t>
+              <a:t>5/1/2026</a:t>
             </a:fld>
             <a:endParaRPr lang="en-US"/>
           </a:p>
@@ -2560,7 +2993,7 @@
           <a:p>
             <a:fld id="{C1FF6DA9-008F-8B48-92A6-B652298478BF}" type="slidenum">
               <a:rPr lang="en-US" smtClean="0"/>
-              <a:t>‹#›</a:t>
+              <a:t>‹nº›</a:t>
             </a:fld>
             <a:endParaRPr lang="en-US"/>
           </a:p>
@@ -2627,10 +3060,9 @@
           <a:lstStyle/>
           <a:p>
             <a:r>
-              <a:rPr lang="en-US" smtClean="0"/>
+              <a:rPr lang="en-US"/>
               <a:t>Click to edit Master title style</a:t>
             </a:r>
-            <a:endParaRPr lang="en-US"/>
           </a:p>
         </p:txBody>
       </p:sp>
@@ -2661,38 +3093,37 @@
           <a:p>
             <a:pPr lvl="0"/>
             <a:r>
-              <a:rPr lang="en-US" smtClean="0"/>
+              <a:rPr lang="en-US"/>
               <a:t>Click to edit Master text styles</a:t>
             </a:r>
           </a:p>
           <a:p>
             <a:pPr lvl="1"/>
             <a:r>
-              <a:rPr lang="en-US" smtClean="0"/>
+              <a:rPr lang="en-US"/>
               <a:t>Second level</a:t>
             </a:r>
           </a:p>
           <a:p>
             <a:pPr lvl="2"/>
             <a:r>
-              <a:rPr lang="en-US" smtClean="0"/>
+              <a:rPr lang="en-US"/>
               <a:t>Third level</a:t>
             </a:r>
           </a:p>
           <a:p>
             <a:pPr lvl="3"/>
             <a:r>
-              <a:rPr lang="en-US" smtClean="0"/>
+              <a:rPr lang="en-US"/>
               <a:t>Fourth level</a:t>
             </a:r>
           </a:p>
           <a:p>
             <a:pPr lvl="4"/>
             <a:r>
-              <a:rPr lang="en-US" smtClean="0"/>
+              <a:rPr lang="en-US"/>
               <a:t>Fifth level</a:t>
             </a:r>
-            <a:endParaRPr lang="en-US"/>
           </a:p>
         </p:txBody>
       </p:sp>
@@ -2731,7 +3162,7 @@
           <a:p>
             <a:fld id="{5BCAD085-E8A6-8845-BD4E-CB4CCA059FC4}" type="datetimeFigureOut">
               <a:rPr lang="en-US" smtClean="0"/>
-              <a:t>1/27/13</a:t>
+              <a:t>5/1/2026</a:t>
             </a:fld>
             <a:endParaRPr lang="en-US"/>
           </a:p>
@@ -2809,7 +3240,7 @@
           <a:p>
             <a:fld id="{C1FF6DA9-008F-8B48-92A6-B652298478BF}" type="slidenum">
               <a:rPr lang="en-US" smtClean="0"/>
-              <a:t>‹#›</a:t>
+              <a:t>‹nº›</a:t>
             </a:fld>
             <a:endParaRPr lang="en-US"/>
           </a:p>
@@ -3090,7 +3521,7 @@
 </file>
 
 <file path=ppt/slides/slide1.xml><?xml version="1.0" encoding="utf-8"?>
-<p:sld xmlns:a="http://schemas.openxmlformats.org/drawingml/2006/main" xmlns:p="http://schemas.openxmlformats.org/presentationml/2006/main" xmlns:r="http://schemas.openxmlformats.org/officeDocument/2006/relationships">
+<p:sld xmlns:a="http://schemas.openxmlformats.org/drawingml/2006/main" xmlns:r="http://schemas.openxmlformats.org/officeDocument/2006/relationships" xmlns:p="http://schemas.openxmlformats.org/presentationml/2006/main">
   <p:cSld>
     <p:spTree>
       <p:nvGrpSpPr>
@@ -3098,7 +3529,14 @@
         <p:cNvGrpSpPr/>
         <p:nvPr/>
       </p:nvGrpSpPr>
-      <p:grpSpPr/>
+      <p:grpSpPr>
+        <a:xfrm>
+          <a:off x="0" y="0"/>
+          <a:ext cx="0" cy="0"/>
+          <a:chOff x="0" y="0"/>
+          <a:chExt cx="0" cy="0"/>
+        </a:xfrm>
+      </p:grpSpPr>
       <p:sp>
         <p:nvSpPr>
           <p:cNvPr id="2" name="Rectangle 1"/>
@@ -3139,6 +3577,7 @@
           <a:lstStyle/>
           <a:p>
             <a:pPr algn="ctr"/>
+            <a:endParaRPr/>
           </a:p>
         </p:txBody>
       </p:sp>
@@ -3182,6 +3621,7 @@
           <a:lstStyle/>
           <a:p>
             <a:pPr algn="ctr"/>
+            <a:endParaRPr/>
           </a:p>
         </p:txBody>
       </p:sp>
@@ -3225,6 +3665,7 @@
           <a:lstStyle/>
           <a:p>
             <a:pPr algn="ctr"/>
+            <a:endParaRPr/>
           </a:p>
         </p:txBody>
       </p:sp>
@@ -3338,6 +3779,7 @@
           <a:lstStyle/>
           <a:p>
             <a:pPr algn="ctr"/>
+            <a:endParaRPr/>
           </a:p>
         </p:txBody>
       </p:sp>
@@ -3483,6 +3925,7 @@
           <a:lstStyle/>
           <a:p>
             <a:pPr algn="ctr"/>
+            <a:endParaRPr/>
           </a:p>
         </p:txBody>
       </p:sp>
@@ -3529,7 +3972,7 @@
 </file>
 
 <file path=ppt/slides/slide10.xml><?xml version="1.0" encoding="utf-8"?>
-<p:sld xmlns:a="http://schemas.openxmlformats.org/drawingml/2006/main" xmlns:p="http://schemas.openxmlformats.org/presentationml/2006/main" xmlns:r="http://schemas.openxmlformats.org/officeDocument/2006/relationships">
+<p:sld xmlns:a="http://schemas.openxmlformats.org/drawingml/2006/main" xmlns:r="http://schemas.openxmlformats.org/officeDocument/2006/relationships" xmlns:p="http://schemas.openxmlformats.org/presentationml/2006/main">
   <p:cSld>
     <p:spTree>
       <p:nvGrpSpPr>
@@ -3537,7 +3980,14 @@
         <p:cNvGrpSpPr/>
         <p:nvPr/>
       </p:nvGrpSpPr>
-      <p:grpSpPr/>
+      <p:grpSpPr>
+        <a:xfrm>
+          <a:off x="0" y="0"/>
+          <a:ext cx="0" cy="0"/>
+          <a:chOff x="0" y="0"/>
+          <a:chExt cx="0" cy="0"/>
+        </a:xfrm>
+      </p:grpSpPr>
       <p:sp>
         <p:nvSpPr>
           <p:cNvPr id="2" name="Rectangle 1"/>
@@ -3578,6 +4028,7 @@
           <a:lstStyle/>
           <a:p>
             <a:pPr algn="ctr"/>
+            <a:endParaRPr/>
           </a:p>
         </p:txBody>
       </p:sp>
@@ -3621,6 +4072,7 @@
           <a:lstStyle/>
           <a:p>
             <a:pPr algn="ctr"/>
+            <a:endParaRPr/>
           </a:p>
         </p:txBody>
       </p:sp>
@@ -3766,6 +4218,7 @@
           <a:lstStyle/>
           <a:p>
             <a:pPr algn="ctr"/>
+            <a:endParaRPr/>
           </a:p>
         </p:txBody>
       </p:sp>
@@ -3809,6 +4262,7 @@
           <a:lstStyle/>
           <a:p>
             <a:pPr algn="ctr"/>
+            <a:endParaRPr/>
           </a:p>
         </p:txBody>
       </p:sp>
@@ -3991,6 +4445,7 @@
           <a:lstStyle/>
           <a:p>
             <a:pPr algn="ctr"/>
+            <a:endParaRPr/>
           </a:p>
         </p:txBody>
       </p:sp>
@@ -4034,6 +4489,7 @@
           <a:lstStyle/>
           <a:p>
             <a:pPr algn="ctr"/>
+            <a:endParaRPr/>
           </a:p>
         </p:txBody>
       </p:sp>
@@ -4215,6 +4671,7 @@
           <a:lstStyle/>
           <a:p>
             <a:pPr algn="ctr"/>
+            <a:endParaRPr/>
           </a:p>
         </p:txBody>
       </p:sp>
@@ -4258,6 +4715,7 @@
           <a:lstStyle/>
           <a:p>
             <a:pPr algn="ctr"/>
+            <a:endParaRPr/>
           </a:p>
         </p:txBody>
       </p:sp>
@@ -4440,6 +4898,7 @@
           <a:lstStyle/>
           <a:p>
             <a:pPr algn="ctr"/>
+            <a:endParaRPr/>
           </a:p>
         </p:txBody>
       </p:sp>
@@ -4486,7 +4945,7 @@
 </file>
 
 <file path=ppt/slides/slide11.xml><?xml version="1.0" encoding="utf-8"?>
-<p:sld xmlns:a="http://schemas.openxmlformats.org/drawingml/2006/main" xmlns:p="http://schemas.openxmlformats.org/presentationml/2006/main" xmlns:r="http://schemas.openxmlformats.org/officeDocument/2006/relationships">
+<p:sld xmlns:a="http://schemas.openxmlformats.org/drawingml/2006/main" xmlns:r="http://schemas.openxmlformats.org/officeDocument/2006/relationships" xmlns:p="http://schemas.openxmlformats.org/presentationml/2006/main">
   <p:cSld>
     <p:spTree>
       <p:nvGrpSpPr>
@@ -4494,7 +4953,14 @@
         <p:cNvGrpSpPr/>
         <p:nvPr/>
       </p:nvGrpSpPr>
-      <p:grpSpPr/>
+      <p:grpSpPr>
+        <a:xfrm>
+          <a:off x="0" y="0"/>
+          <a:ext cx="0" cy="0"/>
+          <a:chOff x="0" y="0"/>
+          <a:chExt cx="0" cy="0"/>
+        </a:xfrm>
+      </p:grpSpPr>
       <p:sp>
         <p:nvSpPr>
           <p:cNvPr id="2" name="Rectangle 1"/>
@@ -4535,6 +5001,7 @@
           <a:lstStyle/>
           <a:p>
             <a:pPr algn="ctr"/>
+            <a:endParaRPr/>
           </a:p>
         </p:txBody>
       </p:sp>
@@ -4578,6 +5045,7 @@
           <a:lstStyle/>
           <a:p>
             <a:pPr algn="ctr"/>
+            <a:endParaRPr/>
           </a:p>
         </p:txBody>
       </p:sp>
@@ -4723,6 +5191,7 @@
           <a:lstStyle/>
           <a:p>
             <a:pPr algn="ctr"/>
+            <a:endParaRPr/>
           </a:p>
         </p:txBody>
       </p:sp>
@@ -4868,6 +5337,7 @@
           <a:lstStyle/>
           <a:p>
             <a:pPr algn="ctr"/>
+            <a:endParaRPr/>
           </a:p>
         </p:txBody>
       </p:sp>
@@ -5013,6 +5483,7 @@
           <a:lstStyle/>
           <a:p>
             <a:pPr algn="ctr"/>
+            <a:endParaRPr/>
           </a:p>
         </p:txBody>
       </p:sp>
@@ -5158,6 +5629,7 @@
           <a:lstStyle/>
           <a:p>
             <a:pPr algn="ctr"/>
+            <a:endParaRPr/>
           </a:p>
         </p:txBody>
       </p:sp>
@@ -5303,6 +5775,7 @@
           <a:lstStyle/>
           <a:p>
             <a:pPr algn="ctr"/>
+            <a:endParaRPr/>
           </a:p>
         </p:txBody>
       </p:sp>
@@ -5448,6 +5921,7 @@
           <a:lstStyle/>
           <a:p>
             <a:pPr algn="ctr"/>
+            <a:endParaRPr/>
           </a:p>
         </p:txBody>
       </p:sp>
@@ -5593,6 +6067,7 @@
           <a:lstStyle/>
           <a:p>
             <a:pPr algn="ctr"/>
+            <a:endParaRPr/>
           </a:p>
         </p:txBody>
       </p:sp>
@@ -5738,6 +6213,7 @@
           <a:lstStyle/>
           <a:p>
             <a:pPr algn="ctr"/>
+            <a:endParaRPr/>
           </a:p>
         </p:txBody>
       </p:sp>
@@ -5852,7 +6328,7 @@
 </file>
 
 <file path=ppt/slides/slide12.xml><?xml version="1.0" encoding="utf-8"?>
-<p:sld xmlns:a="http://schemas.openxmlformats.org/drawingml/2006/main" xmlns:p="http://schemas.openxmlformats.org/presentationml/2006/main" xmlns:r="http://schemas.openxmlformats.org/officeDocument/2006/relationships">
+<p:sld xmlns:a="http://schemas.openxmlformats.org/drawingml/2006/main" xmlns:r="http://schemas.openxmlformats.org/officeDocument/2006/relationships" xmlns:p="http://schemas.openxmlformats.org/presentationml/2006/main">
   <p:cSld>
     <p:spTree>
       <p:nvGrpSpPr>
@@ -5860,7 +6336,14 @@
         <p:cNvGrpSpPr/>
         <p:nvPr/>
       </p:nvGrpSpPr>
-      <p:grpSpPr/>
+      <p:grpSpPr>
+        <a:xfrm>
+          <a:off x="0" y="0"/>
+          <a:ext cx="0" cy="0"/>
+          <a:chOff x="0" y="0"/>
+          <a:chExt cx="0" cy="0"/>
+        </a:xfrm>
+      </p:grpSpPr>
       <p:sp>
         <p:nvSpPr>
           <p:cNvPr id="2" name="Rectangle 1"/>
@@ -5901,6 +6384,7 @@
           <a:lstStyle/>
           <a:p>
             <a:pPr algn="ctr"/>
+            <a:endParaRPr/>
           </a:p>
         </p:txBody>
       </p:sp>
@@ -5944,6 +6428,7 @@
           <a:lstStyle/>
           <a:p>
             <a:pPr algn="ctr"/>
+            <a:endParaRPr/>
           </a:p>
         </p:txBody>
       </p:sp>
@@ -6973,6 +7458,7 @@
           <a:lstStyle/>
           <a:p>
             <a:pPr algn="ctr"/>
+            <a:endParaRPr/>
           </a:p>
         </p:txBody>
       </p:sp>
@@ -7019,7 +7505,7 @@
 </file>
 
 <file path=ppt/slides/slide2.xml><?xml version="1.0" encoding="utf-8"?>
-<p:sld xmlns:a="http://schemas.openxmlformats.org/drawingml/2006/main" xmlns:p="http://schemas.openxmlformats.org/presentationml/2006/main" xmlns:r="http://schemas.openxmlformats.org/officeDocument/2006/relationships">
+<p:sld xmlns:a="http://schemas.openxmlformats.org/drawingml/2006/main" xmlns:r="http://schemas.openxmlformats.org/officeDocument/2006/relationships" xmlns:p="http://schemas.openxmlformats.org/presentationml/2006/main">
   <p:cSld>
     <p:spTree>
       <p:nvGrpSpPr>
@@ -7027,7 +7513,14 @@
         <p:cNvGrpSpPr/>
         <p:nvPr/>
       </p:nvGrpSpPr>
-      <p:grpSpPr/>
+      <p:grpSpPr>
+        <a:xfrm>
+          <a:off x="0" y="0"/>
+          <a:ext cx="0" cy="0"/>
+          <a:chOff x="0" y="0"/>
+          <a:chExt cx="0" cy="0"/>
+        </a:xfrm>
+      </p:grpSpPr>
       <p:sp>
         <p:nvSpPr>
           <p:cNvPr id="2" name="Rectangle 1"/>
@@ -7068,6 +7561,7 @@
           <a:lstStyle/>
           <a:p>
             <a:pPr algn="ctr"/>
+            <a:endParaRPr/>
           </a:p>
         </p:txBody>
       </p:sp>
@@ -7111,6 +7605,7 @@
           <a:lstStyle/>
           <a:p>
             <a:pPr algn="ctr"/>
+            <a:endParaRPr/>
           </a:p>
         </p:txBody>
       </p:sp>
@@ -7256,6 +7751,7 @@
           <a:lstStyle/>
           <a:p>
             <a:pPr algn="ctr"/>
+            <a:endParaRPr/>
           </a:p>
         </p:txBody>
       </p:sp>
@@ -7299,6 +7795,7 @@
           <a:lstStyle/>
           <a:p>
             <a:pPr algn="ctr"/>
+            <a:endParaRPr/>
           </a:p>
         </p:txBody>
       </p:sp>
@@ -7445,6 +7942,7 @@
           <a:lstStyle/>
           <a:p>
             <a:pPr algn="ctr"/>
+            <a:endParaRPr/>
           </a:p>
         </p:txBody>
       </p:sp>
@@ -7488,6 +7986,7 @@
           <a:lstStyle/>
           <a:p>
             <a:pPr algn="ctr"/>
+            <a:endParaRPr/>
           </a:p>
         </p:txBody>
       </p:sp>
@@ -7634,6 +8133,7 @@
           <a:lstStyle/>
           <a:p>
             <a:pPr algn="ctr"/>
+            <a:endParaRPr/>
           </a:p>
         </p:txBody>
       </p:sp>
@@ -7677,6 +8177,7 @@
           <a:lstStyle/>
           <a:p>
             <a:pPr algn="ctr"/>
+            <a:endParaRPr/>
           </a:p>
         </p:txBody>
       </p:sp>
@@ -7792,7 +8293,7 @@
 </file>
 
 <file path=ppt/slides/slide3.xml><?xml version="1.0" encoding="utf-8"?>
-<p:sld xmlns:a="http://schemas.openxmlformats.org/drawingml/2006/main" xmlns:p="http://schemas.openxmlformats.org/presentationml/2006/main" xmlns:r="http://schemas.openxmlformats.org/officeDocument/2006/relationships">
+<p:sld xmlns:a="http://schemas.openxmlformats.org/drawingml/2006/main" xmlns:r="http://schemas.openxmlformats.org/officeDocument/2006/relationships" xmlns:p="http://schemas.openxmlformats.org/presentationml/2006/main">
   <p:cSld>
     <p:spTree>
       <p:nvGrpSpPr>
@@ -7800,7 +8301,14 @@
         <p:cNvGrpSpPr/>
         <p:nvPr/>
       </p:nvGrpSpPr>
-      <p:grpSpPr/>
+      <p:grpSpPr>
+        <a:xfrm>
+          <a:off x="0" y="0"/>
+          <a:ext cx="0" cy="0"/>
+          <a:chOff x="0" y="0"/>
+          <a:chExt cx="0" cy="0"/>
+        </a:xfrm>
+      </p:grpSpPr>
       <p:sp>
         <p:nvSpPr>
           <p:cNvPr id="2" name="Rectangle 1"/>
@@ -7841,6 +8349,7 @@
           <a:lstStyle/>
           <a:p>
             <a:pPr algn="ctr"/>
+            <a:endParaRPr/>
           </a:p>
         </p:txBody>
       </p:sp>
@@ -7884,6 +8393,7 @@
           <a:lstStyle/>
           <a:p>
             <a:pPr algn="ctr"/>
+            <a:endParaRPr/>
           </a:p>
         </p:txBody>
       </p:sp>
@@ -8029,6 +8539,7 @@
           <a:lstStyle/>
           <a:p>
             <a:pPr algn="ctr"/>
+            <a:endParaRPr/>
           </a:p>
         </p:txBody>
       </p:sp>
@@ -8072,6 +8583,7 @@
           <a:lstStyle/>
           <a:p>
             <a:pPr algn="ctr"/>
+            <a:endParaRPr/>
           </a:p>
         </p:txBody>
       </p:sp>
@@ -8183,6 +8695,7 @@
           <a:lstStyle/>
           <a:p>
             <a:pPr algn="ctr"/>
+            <a:endParaRPr/>
           </a:p>
         </p:txBody>
       </p:sp>
@@ -8226,6 +8739,7 @@
           <a:lstStyle/>
           <a:p>
             <a:pPr algn="ctr"/>
+            <a:endParaRPr/>
           </a:p>
         </p:txBody>
       </p:sp>
@@ -8337,6 +8851,7 @@
           <a:lstStyle/>
           <a:p>
             <a:pPr algn="ctr"/>
+            <a:endParaRPr/>
           </a:p>
         </p:txBody>
       </p:sp>
@@ -8380,6 +8895,7 @@
           <a:lstStyle/>
           <a:p>
             <a:pPr algn="ctr"/>
+            <a:endParaRPr/>
           </a:p>
         </p:txBody>
       </p:sp>
@@ -8491,6 +9007,7 @@
           <a:lstStyle/>
           <a:p>
             <a:pPr algn="ctr"/>
+            <a:endParaRPr/>
           </a:p>
         </p:txBody>
       </p:sp>
@@ -8534,6 +9051,7 @@
           <a:lstStyle/>
           <a:p>
             <a:pPr algn="ctr"/>
+            <a:endParaRPr/>
           </a:p>
         </p:txBody>
       </p:sp>
@@ -8679,6 +9197,7 @@
           <a:lstStyle/>
           <a:p>
             <a:pPr algn="ctr"/>
+            <a:endParaRPr/>
           </a:p>
         </p:txBody>
       </p:sp>
@@ -8756,6 +9275,7 @@
           <a:lstStyle/>
           <a:p>
             <a:pPr algn="ctr"/>
+            <a:endParaRPr/>
           </a:p>
         </p:txBody>
       </p:sp>
@@ -8833,6 +9353,7 @@
           <a:lstStyle/>
           <a:p>
             <a:pPr algn="ctr"/>
+            <a:endParaRPr/>
           </a:p>
         </p:txBody>
       </p:sp>
@@ -8910,6 +9431,7 @@
           <a:lstStyle/>
           <a:p>
             <a:pPr algn="ctr"/>
+            <a:endParaRPr/>
           </a:p>
         </p:txBody>
       </p:sp>
@@ -8987,6 +9509,7 @@
           <a:lstStyle/>
           <a:p>
             <a:pPr algn="ctr"/>
+            <a:endParaRPr/>
           </a:p>
         </p:txBody>
       </p:sp>
@@ -9064,6 +9587,7 @@
           <a:lstStyle/>
           <a:p>
             <a:pPr algn="ctr"/>
+            <a:endParaRPr/>
           </a:p>
         </p:txBody>
       </p:sp>
@@ -9141,6 +9665,7 @@
           <a:lstStyle/>
           <a:p>
             <a:pPr algn="ctr"/>
+            <a:endParaRPr/>
           </a:p>
         </p:txBody>
       </p:sp>
@@ -9218,6 +9743,7 @@
           <a:lstStyle/>
           <a:p>
             <a:pPr algn="ctr"/>
+            <a:endParaRPr/>
           </a:p>
         </p:txBody>
       </p:sp>
@@ -9295,6 +9821,7 @@
           <a:lstStyle/>
           <a:p>
             <a:pPr algn="ctr"/>
+            <a:endParaRPr/>
           </a:p>
         </p:txBody>
       </p:sp>
@@ -9372,6 +9899,7 @@
           <a:lstStyle/>
           <a:p>
             <a:pPr algn="ctr"/>
+            <a:endParaRPr/>
           </a:p>
         </p:txBody>
       </p:sp>
@@ -9418,7 +9946,7 @@
 </file>
 
 <file path=ppt/slides/slide4.xml><?xml version="1.0" encoding="utf-8"?>
-<p:sld xmlns:a="http://schemas.openxmlformats.org/drawingml/2006/main" xmlns:p="http://schemas.openxmlformats.org/presentationml/2006/main" xmlns:r="http://schemas.openxmlformats.org/officeDocument/2006/relationships">
+<p:sld xmlns:a="http://schemas.openxmlformats.org/drawingml/2006/main" xmlns:r="http://schemas.openxmlformats.org/officeDocument/2006/relationships" xmlns:p="http://schemas.openxmlformats.org/presentationml/2006/main">
   <p:cSld>
     <p:spTree>
       <p:nvGrpSpPr>
@@ -9426,7 +9954,14 @@
         <p:cNvGrpSpPr/>
         <p:nvPr/>
       </p:nvGrpSpPr>
-      <p:grpSpPr/>
+      <p:grpSpPr>
+        <a:xfrm>
+          <a:off x="0" y="0"/>
+          <a:ext cx="0" cy="0"/>
+          <a:chOff x="0" y="0"/>
+          <a:chExt cx="0" cy="0"/>
+        </a:xfrm>
+      </p:grpSpPr>
       <p:sp>
         <p:nvSpPr>
           <p:cNvPr id="2" name="Rectangle 1"/>
@@ -9467,6 +10002,7 @@
           <a:lstStyle/>
           <a:p>
             <a:pPr algn="ctr"/>
+            <a:endParaRPr/>
           </a:p>
         </p:txBody>
       </p:sp>
@@ -9510,6 +10046,7 @@
           <a:lstStyle/>
           <a:p>
             <a:pPr algn="ctr"/>
+            <a:endParaRPr/>
           </a:p>
         </p:txBody>
       </p:sp>
@@ -9655,6 +10192,7 @@
           <a:lstStyle/>
           <a:p>
             <a:pPr algn="ctr"/>
+            <a:endParaRPr/>
           </a:p>
         </p:txBody>
       </p:sp>
@@ -9698,6 +10236,7 @@
           <a:lstStyle/>
           <a:p>
             <a:pPr algn="ctr"/>
+            <a:endParaRPr/>
           </a:p>
         </p:txBody>
       </p:sp>
@@ -9775,6 +10314,7 @@
           <a:lstStyle/>
           <a:p>
             <a:pPr algn="ctr"/>
+            <a:endParaRPr/>
           </a:p>
         </p:txBody>
       </p:sp>
@@ -9853,6 +10393,7 @@
           <a:lstStyle/>
           <a:p>
             <a:pPr algn="ctr"/>
+            <a:endParaRPr/>
           </a:p>
         </p:txBody>
       </p:sp>
@@ -9930,6 +10471,7 @@
           <a:lstStyle/>
           <a:p>
             <a:pPr algn="ctr"/>
+            <a:endParaRPr/>
           </a:p>
         </p:txBody>
       </p:sp>
@@ -10007,6 +10549,7 @@
           <a:lstStyle/>
           <a:p>
             <a:pPr algn="ctr"/>
+            <a:endParaRPr/>
           </a:p>
         </p:txBody>
       </p:sp>
@@ -10085,6 +10628,7 @@
           <a:lstStyle/>
           <a:p>
             <a:pPr algn="ctr"/>
+            <a:endParaRPr/>
           </a:p>
         </p:txBody>
       </p:sp>
@@ -10163,6 +10707,7 @@
           <a:lstStyle/>
           <a:p>
             <a:pPr algn="ctr"/>
+            <a:endParaRPr/>
           </a:p>
         </p:txBody>
       </p:sp>
@@ -10240,6 +10785,7 @@
           <a:lstStyle/>
           <a:p>
             <a:pPr algn="ctr"/>
+            <a:endParaRPr/>
           </a:p>
         </p:txBody>
       </p:sp>
@@ -10318,6 +10864,7 @@
           <a:lstStyle/>
           <a:p>
             <a:pPr algn="ctr"/>
+            <a:endParaRPr/>
           </a:p>
         </p:txBody>
       </p:sp>
@@ -10396,6 +10943,7 @@
           <a:lstStyle/>
           <a:p>
             <a:pPr algn="ctr"/>
+            <a:endParaRPr/>
           </a:p>
         </p:txBody>
       </p:sp>
@@ -10474,6 +11022,7 @@
           <a:lstStyle/>
           <a:p>
             <a:pPr algn="ctr"/>
+            <a:endParaRPr/>
           </a:p>
         </p:txBody>
       </p:sp>
@@ -10551,6 +11100,7 @@
           <a:lstStyle/>
           <a:p>
             <a:pPr algn="ctr"/>
+            <a:endParaRPr/>
           </a:p>
         </p:txBody>
       </p:sp>
@@ -10628,6 +11178,7 @@
           <a:lstStyle/>
           <a:p>
             <a:pPr algn="ctr"/>
+            <a:endParaRPr/>
           </a:p>
         </p:txBody>
       </p:sp>
@@ -10705,6 +11256,7 @@
           <a:lstStyle/>
           <a:p>
             <a:pPr algn="ctr"/>
+            <a:endParaRPr/>
           </a:p>
         </p:txBody>
       </p:sp>
@@ -10816,6 +11368,7 @@
           <a:lstStyle/>
           <a:p>
             <a:pPr algn="ctr"/>
+            <a:endParaRPr/>
           </a:p>
         </p:txBody>
       </p:sp>
@@ -10859,6 +11412,7 @@
           <a:lstStyle/>
           <a:p>
             <a:pPr algn="ctr"/>
+            <a:endParaRPr/>
           </a:p>
         </p:txBody>
       </p:sp>
@@ -10938,7 +11492,7 @@
         </p:nvSpPr>
         <p:spPr>
           <a:xfrm>
-            <a:off x="1586484" y="4754880"/>
+            <a:off x="1938528" y="4700016"/>
             <a:ext cx="2542032" cy="347472"/>
           </a:xfrm>
           <a:prstGeom prst="rect">
@@ -10954,13 +11508,42 @@
           <a:p>
             <a:pPr algn="l"/>
             <a:r>
-              <a:rPr sz="1200" b="0" i="0">
+              <a:rPr sz="1200" b="0" i="0" dirty="0">
                 <a:solidFill>
                   <a:srgbClr val="94A3B8"/>
                 </a:solidFill>
               </a:rPr>
-              <a:t>→ Diagnóstico Iniciado</a:t>
-            </a:r>
+              <a:t>→ </a:t>
+            </a:r>
+            <a:r>
+              <a:rPr sz="1200" b="0" i="0" dirty="0" err="1">
+                <a:solidFill>
+                  <a:srgbClr val="94A3B8"/>
+                </a:solidFill>
+              </a:rPr>
+              <a:t>Diagnóstico</a:t>
+            </a:r>
+            <a:r>
+              <a:rPr sz="1200" b="0" i="0" dirty="0">
+                <a:solidFill>
+                  <a:srgbClr val="94A3B8"/>
+                </a:solidFill>
+              </a:rPr>
+              <a:t> </a:t>
+            </a:r>
+            <a:r>
+              <a:rPr sz="1200" b="0" i="0" dirty="0" err="1">
+                <a:solidFill>
+                  <a:srgbClr val="94A3B8"/>
+                </a:solidFill>
+              </a:rPr>
+              <a:t>Iniciado</a:t>
+            </a:r>
+            <a:endParaRPr sz="1200" b="0" i="0" dirty="0">
+              <a:solidFill>
+                <a:srgbClr val="94A3B8"/>
+              </a:solidFill>
+            </a:endParaRPr>
           </a:p>
         </p:txBody>
       </p:sp>
@@ -10972,7 +11555,7 @@
         </p:nvSpPr>
         <p:spPr>
           <a:xfrm>
-            <a:off x="4174236" y="4754880"/>
+            <a:off x="3648456" y="4719106"/>
             <a:ext cx="2226564" cy="347472"/>
           </a:xfrm>
           <a:prstGeom prst="rect">
@@ -10988,13 +11571,42 @@
           <a:p>
             <a:pPr algn="l"/>
             <a:r>
-              <a:rPr sz="1200" b="0" i="0">
+              <a:rPr sz="1200" b="0" i="0" dirty="0">
                 <a:solidFill>
                   <a:srgbClr val="94A3B8"/>
                 </a:solidFill>
               </a:rPr>
-              <a:t>→ Itens Adicionados</a:t>
-            </a:r>
+              <a:t>→ </a:t>
+            </a:r>
+            <a:r>
+              <a:rPr sz="1200" b="0" i="0" dirty="0" err="1">
+                <a:solidFill>
+                  <a:srgbClr val="94A3B8"/>
+                </a:solidFill>
+              </a:rPr>
+              <a:t>Itens</a:t>
+            </a:r>
+            <a:r>
+              <a:rPr sz="1200" b="0" i="0" dirty="0">
+                <a:solidFill>
+                  <a:srgbClr val="94A3B8"/>
+                </a:solidFill>
+              </a:rPr>
+              <a:t> </a:t>
+            </a:r>
+            <a:r>
+              <a:rPr sz="1200" b="0" i="0" dirty="0" err="1">
+                <a:solidFill>
+                  <a:srgbClr val="94A3B8"/>
+                </a:solidFill>
+              </a:rPr>
+              <a:t>Adicionados</a:t>
+            </a:r>
+            <a:endParaRPr sz="1200" b="0" i="0" dirty="0">
+              <a:solidFill>
+                <a:srgbClr val="94A3B8"/>
+              </a:solidFill>
+            </a:endParaRPr>
           </a:p>
         </p:txBody>
       </p:sp>
@@ -11006,7 +11618,7 @@
         </p:nvSpPr>
         <p:spPr>
           <a:xfrm>
-            <a:off x="6446520" y="4754880"/>
+            <a:off x="5358384" y="4719106"/>
             <a:ext cx="2121408" cy="347472"/>
           </a:xfrm>
           <a:prstGeom prst="rect">
@@ -11022,12 +11634,28 @@
           <a:p>
             <a:pPr algn="l"/>
             <a:r>
-              <a:rPr sz="1200" b="1" i="0">
+              <a:rPr sz="1200" b="1" i="0" dirty="0">
                 <a:solidFill>
                   <a:srgbClr val="14B8A6"/>
                 </a:solidFill>
               </a:rPr>
-              <a:t>→ Orçamento Gerado</a:t>
+              <a:t>→ </a:t>
+            </a:r>
+            <a:r>
+              <a:rPr sz="1200" b="1" i="0" dirty="0" err="1">
+                <a:solidFill>
+                  <a:srgbClr val="14B8A6"/>
+                </a:solidFill>
+              </a:rPr>
+              <a:t>Orçamento</a:t>
+            </a:r>
+            <a:r>
+              <a:rPr sz="1200" b="1" i="0" dirty="0">
+                <a:solidFill>
+                  <a:srgbClr val="14B8A6"/>
+                </a:solidFill>
+              </a:rPr>
+              <a:t> Gerado</a:t>
             </a:r>
           </a:p>
         </p:txBody>
@@ -11040,7 +11668,7 @@
         </p:nvSpPr>
         <p:spPr>
           <a:xfrm>
-            <a:off x="8613648" y="4754880"/>
+            <a:off x="7114032" y="4700016"/>
             <a:ext cx="1280160" cy="347472"/>
           </a:xfrm>
           <a:prstGeom prst="rect">
@@ -11056,13 +11684,26 @@
           <a:p>
             <a:pPr algn="l"/>
             <a:r>
-              <a:rPr sz="1200" b="1" i="0">
+              <a:rPr sz="1200" b="1" i="0" dirty="0">
                 <a:solidFill>
                   <a:srgbClr val="22C55E"/>
                 </a:solidFill>
               </a:rPr>
-              <a:t>→ Aprovado</a:t>
-            </a:r>
+              <a:t>→ </a:t>
+            </a:r>
+            <a:r>
+              <a:rPr sz="1200" b="1" i="0" dirty="0" err="1">
+                <a:solidFill>
+                  <a:srgbClr val="22C55E"/>
+                </a:solidFill>
+              </a:rPr>
+              <a:t>Aprovado</a:t>
+            </a:r>
+            <a:endParaRPr sz="1200" b="1" i="0" dirty="0">
+              <a:solidFill>
+                <a:srgbClr val="22C55E"/>
+              </a:solidFill>
+            </a:endParaRPr>
           </a:p>
         </p:txBody>
       </p:sp>
@@ -11074,7 +11715,7 @@
         </p:nvSpPr>
         <p:spPr>
           <a:xfrm>
-            <a:off x="9939528" y="4754880"/>
+            <a:off x="8778240" y="4700016"/>
             <a:ext cx="2226564" cy="347472"/>
           </a:xfrm>
           <a:prstGeom prst="rect">
@@ -11090,13 +11731,42 @@
           <a:p>
             <a:pPr algn="l"/>
             <a:r>
-              <a:rPr sz="1200" b="1" i="0">
+              <a:rPr sz="1200" b="1" i="0" dirty="0">
                 <a:solidFill>
                   <a:srgbClr val="3B82F6"/>
                 </a:solidFill>
               </a:rPr>
-              <a:t>→ Execução Iniciada</a:t>
-            </a:r>
+              <a:t>→ </a:t>
+            </a:r>
+            <a:r>
+              <a:rPr sz="1200" b="1" i="0" dirty="0" err="1">
+                <a:solidFill>
+                  <a:srgbClr val="3B82F6"/>
+                </a:solidFill>
+              </a:rPr>
+              <a:t>Execução</a:t>
+            </a:r>
+            <a:r>
+              <a:rPr sz="1200" b="1" i="0" dirty="0">
+                <a:solidFill>
+                  <a:srgbClr val="3B82F6"/>
+                </a:solidFill>
+              </a:rPr>
+              <a:t> </a:t>
+            </a:r>
+            <a:r>
+              <a:rPr sz="1200" b="1" i="0" dirty="0" err="1">
+                <a:solidFill>
+                  <a:srgbClr val="3B82F6"/>
+                </a:solidFill>
+              </a:rPr>
+              <a:t>Iniciada</a:t>
+            </a:r>
+            <a:endParaRPr sz="1200" b="1" i="0" dirty="0">
+              <a:solidFill>
+                <a:srgbClr val="3B82F6"/>
+              </a:solidFill>
+            </a:endParaRPr>
           </a:p>
         </p:txBody>
       </p:sp>
@@ -11108,7 +11778,7 @@
         </p:nvSpPr>
         <p:spPr>
           <a:xfrm>
-            <a:off x="12211812" y="4754880"/>
+            <a:off x="8819388" y="5128181"/>
             <a:ext cx="1805940" cy="347472"/>
           </a:xfrm>
           <a:prstGeom prst="rect">
@@ -11124,13 +11794,26 @@
           <a:p>
             <a:pPr algn="l"/>
             <a:r>
-              <a:rPr sz="1200" b="1" i="0">
+              <a:rPr sz="1200" b="1" i="0" dirty="0">
                 <a:solidFill>
                   <a:srgbClr val="22C55E"/>
                 </a:solidFill>
               </a:rPr>
-              <a:t>→ OS Finalizada</a:t>
-            </a:r>
+              <a:t>→ OS </a:t>
+            </a:r>
+            <a:r>
+              <a:rPr sz="1200" b="1" i="0" dirty="0" err="1">
+                <a:solidFill>
+                  <a:srgbClr val="22C55E"/>
+                </a:solidFill>
+              </a:rPr>
+              <a:t>Finalizada</a:t>
+            </a:r>
+            <a:endParaRPr sz="1200" b="1" i="0" dirty="0">
+              <a:solidFill>
+                <a:srgbClr val="22C55E"/>
+              </a:solidFill>
+            </a:endParaRPr>
           </a:p>
         </p:txBody>
       </p:sp>
@@ -11142,8 +11825,8 @@
         </p:nvSpPr>
         <p:spPr>
           <a:xfrm>
-            <a:off x="14063472" y="4754880"/>
-            <a:ext cx="1280160" cy="347472"/>
+            <a:off x="10488168" y="4717503"/>
+            <a:ext cx="1280160" cy="276999"/>
           </a:xfrm>
           <a:prstGeom prst="rect">
             <a:avLst/>
@@ -11158,13 +11841,26 @@
           <a:p>
             <a:pPr algn="l"/>
             <a:r>
-              <a:rPr sz="1200" b="1" i="0">
+              <a:rPr sz="1200" b="1" i="0" u="sng" dirty="0">
                 <a:solidFill>
                   <a:srgbClr val="F59E0B"/>
                 </a:solidFill>
               </a:rPr>
-              <a:t>→ Entregue</a:t>
-            </a:r>
+              <a:t>→ </a:t>
+            </a:r>
+            <a:r>
+              <a:rPr sz="1200" b="1" i="0" u="sng" dirty="0" err="1">
+                <a:solidFill>
+                  <a:srgbClr val="F59E0B"/>
+                </a:solidFill>
+              </a:rPr>
+              <a:t>Entregue</a:t>
+            </a:r>
+            <a:endParaRPr sz="1200" b="1" i="0" u="sng" dirty="0">
+              <a:solidFill>
+                <a:srgbClr val="F59E0B"/>
+              </a:solidFill>
+            </a:endParaRPr>
           </a:p>
         </p:txBody>
       </p:sp>
@@ -11176,7 +11872,7 @@
         </p:nvSpPr>
         <p:spPr>
           <a:xfrm>
-            <a:off x="365760" y="5166360"/>
+            <a:off x="365760" y="5442284"/>
             <a:ext cx="11247120" cy="365760"/>
           </a:xfrm>
           <a:prstGeom prst="rect">
@@ -11192,13 +11888,90 @@
           <a:p>
             <a:pPr algn="l"/>
             <a:r>
-              <a:rPr sz="1100" b="0" i="1">
+              <a:rPr sz="1100" b="0" i="1" dirty="0">
                 <a:solidFill>
                   <a:srgbClr val="FBBF24"/>
                 </a:solidFill>
               </a:rPr>
-              <a:t>⚠  Alt: Orçamento Reprovado → POL: Cancelar OS e Estornar Estoque → OS Cancelada</a:t>
-            </a:r>
+              <a:t>⚠  Alt: </a:t>
+            </a:r>
+            <a:r>
+              <a:rPr sz="1100" b="0" i="1" dirty="0" err="1">
+                <a:solidFill>
+                  <a:srgbClr val="FBBF24"/>
+                </a:solidFill>
+              </a:rPr>
+              <a:t>Orçamento</a:t>
+            </a:r>
+            <a:r>
+              <a:rPr sz="1100" b="0" i="1" dirty="0">
+                <a:solidFill>
+                  <a:srgbClr val="FBBF24"/>
+                </a:solidFill>
+              </a:rPr>
+              <a:t> </a:t>
+            </a:r>
+            <a:r>
+              <a:rPr sz="1100" b="0" i="1" dirty="0" err="1">
+                <a:solidFill>
+                  <a:srgbClr val="FBBF24"/>
+                </a:solidFill>
+              </a:rPr>
+              <a:t>Reprovado</a:t>
+            </a:r>
+            <a:r>
+              <a:rPr sz="1100" b="0" i="1" dirty="0">
+                <a:solidFill>
+                  <a:srgbClr val="FBBF24"/>
+                </a:solidFill>
+              </a:rPr>
+              <a:t> → POL: </a:t>
+            </a:r>
+            <a:r>
+              <a:rPr sz="1100" b="0" i="1" dirty="0" err="1">
+                <a:solidFill>
+                  <a:srgbClr val="FBBF24"/>
+                </a:solidFill>
+              </a:rPr>
+              <a:t>Cancelar</a:t>
+            </a:r>
+            <a:r>
+              <a:rPr sz="1100" b="0" i="1" dirty="0">
+                <a:solidFill>
+                  <a:srgbClr val="FBBF24"/>
+                </a:solidFill>
+              </a:rPr>
+              <a:t> OS e </a:t>
+            </a:r>
+            <a:r>
+              <a:rPr sz="1100" b="0" i="1" dirty="0" err="1">
+                <a:solidFill>
+                  <a:srgbClr val="FBBF24"/>
+                </a:solidFill>
+              </a:rPr>
+              <a:t>Estornar</a:t>
+            </a:r>
+            <a:r>
+              <a:rPr sz="1100" b="0" i="1" dirty="0">
+                <a:solidFill>
+                  <a:srgbClr val="FBBF24"/>
+                </a:solidFill>
+              </a:rPr>
+              <a:t> Estoque → OS </a:t>
+            </a:r>
+            <a:r>
+              <a:rPr sz="1100" b="0" i="1" dirty="0" err="1">
+                <a:solidFill>
+                  <a:srgbClr val="FBBF24"/>
+                </a:solidFill>
+              </a:rPr>
+              <a:t>Cancelada</a:t>
+            </a:r>
+            <a:endParaRPr sz="1100" b="0" i="1" dirty="0">
+              <a:solidFill>
+                <a:srgbClr val="FBBF24"/>
+              </a:solidFill>
+            </a:endParaRPr>
           </a:p>
         </p:txBody>
       </p:sp>
@@ -11245,7 +12018,7 @@
 </file>
 
 <file path=ppt/slides/slide5.xml><?xml version="1.0" encoding="utf-8"?>
-<p:sld xmlns:a="http://schemas.openxmlformats.org/drawingml/2006/main" xmlns:p="http://schemas.openxmlformats.org/presentationml/2006/main" xmlns:r="http://schemas.openxmlformats.org/officeDocument/2006/relationships">
+<p:sld xmlns:a="http://schemas.openxmlformats.org/drawingml/2006/main" xmlns:r="http://schemas.openxmlformats.org/officeDocument/2006/relationships" xmlns:p="http://schemas.openxmlformats.org/presentationml/2006/main">
   <p:cSld>
     <p:spTree>
       <p:nvGrpSpPr>
@@ -11253,7 +12026,14 @@
         <p:cNvGrpSpPr/>
         <p:nvPr/>
       </p:nvGrpSpPr>
-      <p:grpSpPr/>
+      <p:grpSpPr>
+        <a:xfrm>
+          <a:off x="0" y="0"/>
+          <a:ext cx="0" cy="0"/>
+          <a:chOff x="0" y="0"/>
+          <a:chExt cx="0" cy="0"/>
+        </a:xfrm>
+      </p:grpSpPr>
       <p:sp>
         <p:nvSpPr>
           <p:cNvPr id="2" name="Rectangle 1"/>
@@ -11294,6 +12074,7 @@
           <a:lstStyle/>
           <a:p>
             <a:pPr algn="ctr"/>
+            <a:endParaRPr/>
           </a:p>
         </p:txBody>
       </p:sp>
@@ -11337,6 +12118,7 @@
           <a:lstStyle/>
           <a:p>
             <a:pPr algn="ctr"/>
+            <a:endParaRPr/>
           </a:p>
         </p:txBody>
       </p:sp>
@@ -11484,6 +12266,7 @@
           <a:lstStyle/>
           <a:p>
             <a:pPr algn="ctr"/>
+            <a:endParaRPr/>
           </a:p>
         </p:txBody>
       </p:sp>
@@ -11527,6 +12310,7 @@
           <a:lstStyle/>
           <a:p>
             <a:pPr algn="ctr"/>
+            <a:endParaRPr/>
           </a:p>
         </p:txBody>
       </p:sp>
@@ -11640,6 +12424,7 @@
           <a:lstStyle/>
           <a:p>
             <a:pPr algn="ctr"/>
+            <a:endParaRPr/>
           </a:p>
         </p:txBody>
       </p:sp>
@@ -11685,7 +12470,7 @@
         </p:nvSpPr>
         <p:spPr>
           <a:xfrm>
-            <a:off x="2084831" y="3127248"/>
+            <a:off x="2039111" y="3127248"/>
             <a:ext cx="256032" cy="347472"/>
           </a:xfrm>
           <a:prstGeom prst="rect">
@@ -11753,6 +12538,7 @@
           <a:lstStyle/>
           <a:p>
             <a:pPr algn="ctr"/>
+            <a:endParaRPr/>
           </a:p>
         </p:txBody>
       </p:sp>
@@ -11798,7 +12584,7 @@
         </p:nvSpPr>
         <p:spPr>
           <a:xfrm>
-            <a:off x="4096511" y="3127248"/>
+            <a:off x="4050791" y="3127248"/>
             <a:ext cx="256032" cy="347472"/>
           </a:xfrm>
           <a:prstGeom prst="rect">
@@ -11866,6 +12652,7 @@
           <a:lstStyle/>
           <a:p>
             <a:pPr algn="ctr"/>
+            <a:endParaRPr/>
           </a:p>
         </p:txBody>
       </p:sp>
@@ -11911,7 +12698,7 @@
         </p:nvSpPr>
         <p:spPr>
           <a:xfrm>
-            <a:off x="6108191" y="3127248"/>
+            <a:off x="6071615" y="3127248"/>
             <a:ext cx="256032" cy="347472"/>
           </a:xfrm>
           <a:prstGeom prst="rect">
@@ -11979,6 +12766,7 @@
           <a:lstStyle/>
           <a:p>
             <a:pPr algn="ctr"/>
+            <a:endParaRPr/>
           </a:p>
         </p:txBody>
       </p:sp>
@@ -12025,7 +12813,7 @@
         </p:nvSpPr>
         <p:spPr>
           <a:xfrm>
-            <a:off x="8119871" y="3127248"/>
+            <a:off x="8083295" y="3127248"/>
             <a:ext cx="256032" cy="347472"/>
           </a:xfrm>
           <a:prstGeom prst="rect">
@@ -12041,7 +12829,7 @@
           <a:p>
             <a:pPr algn="ctr"/>
             <a:r>
-              <a:rPr sz="800" b="0" i="0">
+              <a:rPr sz="800" b="0" i="0" dirty="0">
                 <a:solidFill>
                   <a:srgbClr val="94A3B8"/>
                 </a:solidFill>
@@ -12093,6 +12881,7 @@
           <a:lstStyle/>
           <a:p>
             <a:pPr algn="ctr"/>
+            <a:endParaRPr/>
           </a:p>
         </p:txBody>
       </p:sp>
@@ -12138,7 +12927,7 @@
         </p:nvSpPr>
         <p:spPr>
           <a:xfrm>
-            <a:off x="10131551" y="3127248"/>
+            <a:off x="9715499" y="5684318"/>
             <a:ext cx="256032" cy="347472"/>
           </a:xfrm>
           <a:prstGeom prst="rect">
@@ -12206,6 +12995,7 @@
           <a:lstStyle/>
           <a:p>
             <a:pPr algn="ctr"/>
+            <a:endParaRPr/>
           </a:p>
         </p:txBody>
       </p:sp>
@@ -12285,6 +13075,7 @@
           <a:lstStyle/>
           <a:p>
             <a:pPr algn="ctr"/>
+            <a:endParaRPr/>
           </a:p>
         </p:txBody>
       </p:sp>
@@ -12331,7 +13122,7 @@
         </p:nvSpPr>
         <p:spPr>
           <a:xfrm>
-            <a:off x="2240280" y="5102352"/>
+            <a:off x="2240280" y="5280152"/>
             <a:ext cx="1847088" cy="320040"/>
           </a:xfrm>
           <a:prstGeom prst="roundRect">
@@ -12363,6 +13154,7 @@
           <a:lstStyle/>
           <a:p>
             <a:pPr algn="ctr"/>
+            <a:endParaRPr/>
           </a:p>
         </p:txBody>
       </p:sp>
@@ -12374,7 +13166,7 @@
         </p:nvSpPr>
         <p:spPr>
           <a:xfrm>
-            <a:off x="2313432" y="5138928"/>
+            <a:off x="2313432" y="5316728"/>
             <a:ext cx="1700784" cy="246888"/>
           </a:xfrm>
           <a:prstGeom prst="rect">
@@ -12408,7 +13200,7 @@
         </p:nvSpPr>
         <p:spPr>
           <a:xfrm>
-            <a:off x="2240280" y="4892040"/>
+            <a:off x="2240280" y="5069840"/>
             <a:ext cx="1847088" cy="274320"/>
           </a:xfrm>
           <a:prstGeom prst="rect">
@@ -12510,6 +13302,7 @@
           <a:lstStyle/>
           <a:p>
             <a:pPr algn="ctr"/>
+            <a:endParaRPr/>
           </a:p>
         </p:txBody>
       </p:sp>
@@ -12556,7 +13349,7 @@
         </p:nvSpPr>
         <p:spPr>
           <a:xfrm>
-            <a:off x="6126480" y="5102352"/>
+            <a:off x="6126480" y="5262372"/>
             <a:ext cx="1847088" cy="320040"/>
           </a:xfrm>
           <a:prstGeom prst="roundRect">
@@ -12588,6 +13381,7 @@
           <a:lstStyle/>
           <a:p>
             <a:pPr algn="ctr"/>
+            <a:endParaRPr/>
           </a:p>
         </p:txBody>
       </p:sp>
@@ -12599,7 +13393,7 @@
         </p:nvSpPr>
         <p:spPr>
           <a:xfrm>
-            <a:off x="6199632" y="5138928"/>
+            <a:off x="6199632" y="5298948"/>
             <a:ext cx="1700784" cy="246888"/>
           </a:xfrm>
           <a:prstGeom prst="rect">
@@ -12633,7 +13427,7 @@
         </p:nvSpPr>
         <p:spPr>
           <a:xfrm>
-            <a:off x="6126480" y="4892040"/>
+            <a:off x="6126480" y="5020056"/>
             <a:ext cx="1847088" cy="274320"/>
           </a:xfrm>
           <a:prstGeom prst="rect">
@@ -12649,7 +13443,7 @@
           <a:p>
             <a:pPr algn="ctr"/>
             <a:r>
-              <a:rPr sz="900" b="0" i="1">
+              <a:rPr sz="900" b="0" i="1" dirty="0">
                 <a:solidFill>
                   <a:srgbClr val="F43F5E"/>
                 </a:solidFill>
@@ -12667,8 +13461,8 @@
         </p:nvSpPr>
         <p:spPr>
           <a:xfrm>
-            <a:off x="8686800" y="1828800"/>
-            <a:ext cx="3291840" cy="3931920"/>
+            <a:off x="8270748" y="4581143"/>
+            <a:ext cx="3790188" cy="2322577"/>
           </a:xfrm>
           <a:prstGeom prst="rect">
             <a:avLst/>
@@ -12699,6 +13493,7 @@
           <a:lstStyle/>
           <a:p>
             <a:pPr algn="ctr"/>
+            <a:endParaRPr/>
           </a:p>
         </p:txBody>
       </p:sp>
@@ -12710,7 +13505,7 @@
         </p:nvSpPr>
         <p:spPr>
           <a:xfrm>
-            <a:off x="8823960" y="1892807"/>
+            <a:off x="8407908" y="4645150"/>
             <a:ext cx="3017520" cy="347472"/>
           </a:xfrm>
           <a:prstGeom prst="rect">
@@ -12744,7 +13539,7 @@
         </p:nvSpPr>
         <p:spPr>
           <a:xfrm>
-            <a:off x="8823960" y="2359152"/>
+            <a:off x="8407908" y="5111495"/>
             <a:ext cx="658368" cy="347472"/>
           </a:xfrm>
           <a:prstGeom prst="roundRect">
@@ -12776,6 +13571,7 @@
           <a:lstStyle/>
           <a:p>
             <a:pPr algn="ctr"/>
+            <a:endParaRPr/>
           </a:p>
         </p:txBody>
       </p:sp>
@@ -12787,7 +13583,7 @@
         </p:nvSpPr>
         <p:spPr>
           <a:xfrm>
-            <a:off x="8897112" y="2395728"/>
+            <a:off x="8481060" y="5148071"/>
             <a:ext cx="512064" cy="274320"/>
           </a:xfrm>
           <a:prstGeom prst="rect">
@@ -12821,8 +13617,8 @@
         </p:nvSpPr>
         <p:spPr>
           <a:xfrm>
-            <a:off x="9555480" y="2395728"/>
-            <a:ext cx="2331720" cy="347472"/>
+            <a:off x="9139428" y="5057582"/>
+            <a:ext cx="982980" cy="461665"/>
           </a:xfrm>
           <a:prstGeom prst="rect">
             <a:avLst/>
@@ -12837,7 +13633,7 @@
           <a:p>
             <a:pPr algn="l"/>
             <a:r>
-              <a:rPr sz="1200" b="0" i="0">
+              <a:rPr sz="1200" b="0" i="0" dirty="0">
                 <a:solidFill>
                   <a:srgbClr val="FFFFFF"/>
                 </a:solidFill>
@@ -12855,7 +13651,7 @@
         </p:nvSpPr>
         <p:spPr>
           <a:xfrm>
-            <a:off x="8823960" y="2980944"/>
+            <a:off x="10108692" y="5111495"/>
             <a:ext cx="658368" cy="347472"/>
           </a:xfrm>
           <a:prstGeom prst="roundRect">
@@ -12887,6 +13683,7 @@
           <a:lstStyle/>
           <a:p>
             <a:pPr algn="ctr"/>
+            <a:endParaRPr/>
           </a:p>
         </p:txBody>
       </p:sp>
@@ -12898,7 +13695,7 @@
         </p:nvSpPr>
         <p:spPr>
           <a:xfrm>
-            <a:off x="8897112" y="3017520"/>
+            <a:off x="10181844" y="5148071"/>
             <a:ext cx="512064" cy="274320"/>
           </a:xfrm>
           <a:prstGeom prst="rect">
@@ -12932,7 +13729,7 @@
         </p:nvSpPr>
         <p:spPr>
           <a:xfrm>
-            <a:off x="9555480" y="3017520"/>
+            <a:off x="10840212" y="5148071"/>
             <a:ext cx="2331720" cy="347472"/>
           </a:xfrm>
           <a:prstGeom prst="rect">
@@ -12966,7 +13763,7 @@
         </p:nvSpPr>
         <p:spPr>
           <a:xfrm>
-            <a:off x="8823960" y="3602736"/>
+            <a:off x="8348472" y="5789474"/>
             <a:ext cx="658368" cy="347472"/>
           </a:xfrm>
           <a:prstGeom prst="roundRect">
@@ -12998,6 +13795,7 @@
           <a:lstStyle/>
           <a:p>
             <a:pPr algn="ctr"/>
+            <a:endParaRPr/>
           </a:p>
         </p:txBody>
       </p:sp>
@@ -13009,7 +13807,7 @@
         </p:nvSpPr>
         <p:spPr>
           <a:xfrm>
-            <a:off x="8897112" y="3639312"/>
+            <a:off x="8421624" y="5826050"/>
             <a:ext cx="512064" cy="274320"/>
           </a:xfrm>
           <a:prstGeom prst="rect">
@@ -13025,7 +13823,7 @@
           <a:p>
             <a:pPr algn="ctr"/>
             <a:r>
-              <a:rPr sz="1000" b="1" i="0">
+              <a:rPr sz="1000" b="1" i="0" dirty="0">
                 <a:solidFill>
                   <a:srgbClr val="F43F5E"/>
                 </a:solidFill>
@@ -13043,8 +13841,8 @@
         </p:nvSpPr>
         <p:spPr>
           <a:xfrm>
-            <a:off x="9555480" y="3639312"/>
-            <a:ext cx="2331720" cy="347472"/>
+            <a:off x="9079992" y="5629454"/>
+            <a:ext cx="1101852" cy="646331"/>
           </a:xfrm>
           <a:prstGeom prst="rect">
             <a:avLst/>
@@ -13059,7 +13857,7 @@
           <a:p>
             <a:pPr algn="l"/>
             <a:r>
-              <a:rPr sz="1200" b="0" i="0">
+              <a:rPr sz="1200" b="0" i="0" dirty="0">
                 <a:solidFill>
                   <a:srgbClr val="FFFFFF"/>
                 </a:solidFill>
@@ -13077,7 +13875,7 @@
         </p:nvSpPr>
         <p:spPr>
           <a:xfrm>
-            <a:off x="8823960" y="4224528"/>
+            <a:off x="10108692" y="5771186"/>
             <a:ext cx="658368" cy="347472"/>
           </a:xfrm>
           <a:prstGeom prst="roundRect">
@@ -13109,6 +13907,7 @@
           <a:lstStyle/>
           <a:p>
             <a:pPr algn="ctr"/>
+            <a:endParaRPr/>
           </a:p>
         </p:txBody>
       </p:sp>
@@ -13120,7 +13919,7 @@
         </p:nvSpPr>
         <p:spPr>
           <a:xfrm>
-            <a:off x="8897112" y="4261104"/>
+            <a:off x="10181844" y="5807762"/>
             <a:ext cx="512064" cy="274320"/>
           </a:xfrm>
           <a:prstGeom prst="rect">
@@ -13154,8 +13953,8 @@
         </p:nvSpPr>
         <p:spPr>
           <a:xfrm>
-            <a:off x="9555480" y="4261104"/>
-            <a:ext cx="2331720" cy="347472"/>
+            <a:off x="10840212" y="5807762"/>
+            <a:ext cx="1101852" cy="461665"/>
           </a:xfrm>
           <a:prstGeom prst="rect">
             <a:avLst/>
@@ -13170,7 +13969,7 @@
           <a:p>
             <a:pPr algn="l"/>
             <a:r>
-              <a:rPr sz="1200" b="0" i="0">
+              <a:rPr sz="1200" b="0" i="0" dirty="0">
                 <a:solidFill>
                   <a:srgbClr val="FFFFFF"/>
                 </a:solidFill>
@@ -13188,7 +13987,7 @@
         </p:nvSpPr>
         <p:spPr>
           <a:xfrm>
-            <a:off x="8823960" y="4846320"/>
+            <a:off x="8334756" y="6384275"/>
             <a:ext cx="658368" cy="347472"/>
           </a:xfrm>
           <a:prstGeom prst="roundRect">
@@ -13220,6 +14019,7 @@
           <a:lstStyle/>
           <a:p>
             <a:pPr algn="ctr"/>
+            <a:endParaRPr/>
           </a:p>
         </p:txBody>
       </p:sp>
@@ -13231,7 +14031,7 @@
         </p:nvSpPr>
         <p:spPr>
           <a:xfrm>
-            <a:off x="8897112" y="4882896"/>
+            <a:off x="8407908" y="6420851"/>
             <a:ext cx="512064" cy="274320"/>
           </a:xfrm>
           <a:prstGeom prst="rect">
@@ -13265,7 +14065,7 @@
         </p:nvSpPr>
         <p:spPr>
           <a:xfrm>
-            <a:off x="9555480" y="4882896"/>
+            <a:off x="9066276" y="6420851"/>
             <a:ext cx="2331720" cy="347472"/>
           </a:xfrm>
           <a:prstGeom prst="rect">
@@ -13281,13 +14081,26 @@
           <a:p>
             <a:pPr algn="l"/>
             <a:r>
-              <a:rPr sz="1200" b="0" i="0">
+              <a:rPr sz="1200" b="0" i="0" dirty="0">
                 <a:solidFill>
                   <a:srgbClr val="FFFFFF"/>
                 </a:solidFill>
               </a:rPr>
-              <a:t>Sistema Externo</a:t>
-            </a:r>
+              <a:t>Sistema </a:t>
+            </a:r>
+            <a:r>
+              <a:rPr sz="1200" b="0" i="0" dirty="0" err="1">
+                <a:solidFill>
+                  <a:srgbClr val="FFFFFF"/>
+                </a:solidFill>
+              </a:rPr>
+              <a:t>Externo</a:t>
+            </a:r>
+            <a:endParaRPr sz="1200" b="0" i="0" dirty="0">
+              <a:solidFill>
+                <a:srgbClr val="FFFFFF"/>
+              </a:solidFill>
+            </a:endParaRPr>
           </a:p>
         </p:txBody>
       </p:sp>
@@ -13300,7 +14113,7 @@
 </file>
 
 <file path=ppt/slides/slide6.xml><?xml version="1.0" encoding="utf-8"?>
-<p:sld xmlns:a="http://schemas.openxmlformats.org/drawingml/2006/main" xmlns:p="http://schemas.openxmlformats.org/presentationml/2006/main" xmlns:r="http://schemas.openxmlformats.org/officeDocument/2006/relationships">
+<p:sld xmlns:a="http://schemas.openxmlformats.org/drawingml/2006/main" xmlns:r="http://schemas.openxmlformats.org/officeDocument/2006/relationships" xmlns:p="http://schemas.openxmlformats.org/presentationml/2006/main">
   <p:cSld>
     <p:spTree>
       <p:nvGrpSpPr>
@@ -13308,7 +14121,14 @@
         <p:cNvGrpSpPr/>
         <p:nvPr/>
       </p:nvGrpSpPr>
-      <p:grpSpPr/>
+      <p:grpSpPr>
+        <a:xfrm>
+          <a:off x="0" y="0"/>
+          <a:ext cx="0" cy="0"/>
+          <a:chOff x="0" y="0"/>
+          <a:chExt cx="0" cy="0"/>
+        </a:xfrm>
+      </p:grpSpPr>
       <p:sp>
         <p:nvSpPr>
           <p:cNvPr id="2" name="Rectangle 1"/>
@@ -13349,6 +14169,7 @@
           <a:lstStyle/>
           <a:p>
             <a:pPr algn="ctr"/>
+            <a:endParaRPr/>
           </a:p>
         </p:txBody>
       </p:sp>
@@ -13392,6 +14213,7 @@
           <a:lstStyle/>
           <a:p>
             <a:pPr algn="ctr"/>
+            <a:endParaRPr/>
           </a:p>
         </p:txBody>
       </p:sp>
@@ -13537,6 +14359,7 @@
           <a:lstStyle/>
           <a:p>
             <a:pPr algn="ctr"/>
+            <a:endParaRPr/>
           </a:p>
         </p:txBody>
       </p:sp>
@@ -13580,6 +14403,7 @@
           <a:lstStyle/>
           <a:p>
             <a:pPr algn="ctr"/>
+            <a:endParaRPr/>
           </a:p>
         </p:txBody>
       </p:sp>
@@ -13708,14 +14532,7 @@
           <a:lstStyle/>
           <a:p>
             <a:pPr algn="l"/>
-            <a:r>
-              <a:rPr sz="1100" b="0" i="0">
-                <a:solidFill>
-                  <a:srgbClr val="94A3B8"/>
-                </a:solidFill>
-              </a:rPr>
-              <a:t/>
-            </a:r>
+            <a:endParaRPr/>
           </a:p>
         </p:txBody>
       </p:sp>
@@ -13810,14 +14627,7 @@
           <a:lstStyle/>
           <a:p>
             <a:pPr algn="l"/>
-            <a:r>
-              <a:rPr sz="1100" b="0" i="0">
-                <a:solidFill>
-                  <a:srgbClr val="94A3B8"/>
-                </a:solidFill>
-              </a:rPr>
-              <a:t/>
-            </a:r>
+            <a:endParaRPr/>
           </a:p>
         </p:txBody>
       </p:sp>
@@ -13912,14 +14722,7 @@
           <a:lstStyle/>
           <a:p>
             <a:pPr algn="l"/>
-            <a:r>
-              <a:rPr sz="1100" b="0" i="0">
-                <a:solidFill>
-                  <a:srgbClr val="94A3B8"/>
-                </a:solidFill>
-              </a:rPr>
-              <a:t/>
-            </a:r>
+            <a:endParaRPr/>
           </a:p>
         </p:txBody>
       </p:sp>
@@ -13997,6 +14800,7 @@
           <a:lstStyle/>
           <a:p>
             <a:pPr algn="ctr"/>
+            <a:endParaRPr/>
           </a:p>
         </p:txBody>
       </p:sp>
@@ -14040,6 +14844,7 @@
           <a:lstStyle/>
           <a:p>
             <a:pPr algn="ctr"/>
+            <a:endParaRPr/>
           </a:p>
         </p:txBody>
       </p:sp>
@@ -14168,14 +14973,7 @@
           <a:lstStyle/>
           <a:p>
             <a:pPr algn="l"/>
-            <a:r>
-              <a:rPr sz="1100" b="0" i="0">
-                <a:solidFill>
-                  <a:srgbClr val="94A3B8"/>
-                </a:solidFill>
-              </a:rPr>
-              <a:t/>
-            </a:r>
+            <a:endParaRPr/>
           </a:p>
         </p:txBody>
       </p:sp>
@@ -14270,14 +15068,7 @@
           <a:lstStyle/>
           <a:p>
             <a:pPr algn="l"/>
-            <a:r>
-              <a:rPr sz="1100" b="0" i="0">
-                <a:solidFill>
-                  <a:srgbClr val="94A3B8"/>
-                </a:solidFill>
-              </a:rPr>
-              <a:t/>
-            </a:r>
+            <a:endParaRPr/>
           </a:p>
         </p:txBody>
       </p:sp>
@@ -14372,14 +15163,7 @@
           <a:lstStyle/>
           <a:p>
             <a:pPr algn="l"/>
-            <a:r>
-              <a:rPr sz="1100" b="0" i="0">
-                <a:solidFill>
-                  <a:srgbClr val="94A3B8"/>
-                </a:solidFill>
-              </a:rPr>
-              <a:t/>
-            </a:r>
+            <a:endParaRPr/>
           </a:p>
         </p:txBody>
       </p:sp>
@@ -14457,6 +15241,7 @@
           <a:lstStyle/>
           <a:p>
             <a:pPr algn="ctr"/>
+            <a:endParaRPr/>
           </a:p>
         </p:txBody>
       </p:sp>
@@ -14500,6 +15285,7 @@
           <a:lstStyle/>
           <a:p>
             <a:pPr algn="ctr"/>
+            <a:endParaRPr/>
           </a:p>
         </p:txBody>
       </p:sp>
@@ -14594,14 +15380,7 @@
           <a:lstStyle/>
           <a:p>
             <a:pPr algn="l"/>
-            <a:r>
-              <a:rPr sz="1100" b="0" i="0">
-                <a:solidFill>
-                  <a:srgbClr val="94A3B8"/>
-                </a:solidFill>
-              </a:rPr>
-              <a:t/>
-            </a:r>
+            <a:endParaRPr/>
           </a:p>
         </p:txBody>
       </p:sp>
@@ -14696,14 +15475,7 @@
           <a:lstStyle/>
           <a:p>
             <a:pPr algn="l"/>
-            <a:r>
-              <a:rPr sz="1100" b="0" i="0">
-                <a:solidFill>
-                  <a:srgbClr val="94A3B8"/>
-                </a:solidFill>
-              </a:rPr>
-              <a:t/>
-            </a:r>
+            <a:endParaRPr/>
           </a:p>
         </p:txBody>
       </p:sp>
@@ -14798,14 +15570,7 @@
           <a:lstStyle/>
           <a:p>
             <a:pPr algn="l"/>
-            <a:r>
-              <a:rPr sz="1100" b="0" i="0">
-                <a:solidFill>
-                  <a:srgbClr val="94A3B8"/>
-                </a:solidFill>
-              </a:rPr>
-              <a:t/>
-            </a:r>
+            <a:endParaRPr/>
           </a:p>
         </p:txBody>
       </p:sp>
@@ -14917,6 +15682,7 @@
           <a:lstStyle/>
           <a:p>
             <a:pPr algn="ctr"/>
+            <a:endParaRPr/>
           </a:p>
         </p:txBody>
       </p:sp>
@@ -14963,7 +15729,7 @@
 </file>
 
 <file path=ppt/slides/slide7.xml><?xml version="1.0" encoding="utf-8"?>
-<p:sld xmlns:a="http://schemas.openxmlformats.org/drawingml/2006/main" xmlns:p="http://schemas.openxmlformats.org/presentationml/2006/main" xmlns:r="http://schemas.openxmlformats.org/officeDocument/2006/relationships">
+<p:sld xmlns:a="http://schemas.openxmlformats.org/drawingml/2006/main" xmlns:r="http://schemas.openxmlformats.org/officeDocument/2006/relationships" xmlns:p="http://schemas.openxmlformats.org/presentationml/2006/main">
   <p:cSld>
     <p:spTree>
       <p:nvGrpSpPr>
@@ -14971,7 +15737,14 @@
         <p:cNvGrpSpPr/>
         <p:nvPr/>
       </p:nvGrpSpPr>
-      <p:grpSpPr/>
+      <p:grpSpPr>
+        <a:xfrm>
+          <a:off x="0" y="0"/>
+          <a:ext cx="0" cy="0"/>
+          <a:chOff x="0" y="0"/>
+          <a:chExt cx="0" cy="0"/>
+        </a:xfrm>
+      </p:grpSpPr>
       <p:sp>
         <p:nvSpPr>
           <p:cNvPr id="2" name="Rectangle 1"/>
@@ -15012,6 +15785,7 @@
           <a:lstStyle/>
           <a:p>
             <a:pPr algn="ctr"/>
+            <a:endParaRPr/>
           </a:p>
         </p:txBody>
       </p:sp>
@@ -15055,6 +15829,7 @@
           <a:lstStyle/>
           <a:p>
             <a:pPr algn="ctr"/>
+            <a:endParaRPr/>
           </a:p>
         </p:txBody>
       </p:sp>
@@ -15202,6 +15977,7 @@
           <a:lstStyle/>
           <a:p>
             <a:pPr algn="ctr"/>
+            <a:endParaRPr/>
           </a:p>
         </p:txBody>
       </p:sp>
@@ -15245,6 +16021,7 @@
           <a:lstStyle/>
           <a:p>
             <a:pPr algn="ctr"/>
+            <a:endParaRPr/>
           </a:p>
         </p:txBody>
       </p:sp>
@@ -15393,6 +16170,7 @@
           <a:lstStyle/>
           <a:p>
             <a:pPr algn="ctr"/>
+            <a:endParaRPr/>
           </a:p>
         </p:txBody>
       </p:sp>
@@ -15436,6 +16214,7 @@
           <a:lstStyle/>
           <a:p>
             <a:pPr algn="ctr"/>
+            <a:endParaRPr/>
           </a:p>
         </p:txBody>
       </p:sp>
@@ -15584,6 +16363,7 @@
           <a:lstStyle/>
           <a:p>
             <a:pPr algn="ctr"/>
+            <a:endParaRPr/>
           </a:p>
         </p:txBody>
       </p:sp>
@@ -15627,6 +16407,7 @@
           <a:lstStyle/>
           <a:p>
             <a:pPr algn="ctr"/>
+            <a:endParaRPr/>
           </a:p>
         </p:txBody>
       </p:sp>
@@ -15811,7 +16592,7 @@
 </file>
 
 <file path=ppt/slides/slide8.xml><?xml version="1.0" encoding="utf-8"?>
-<p:sld xmlns:a="http://schemas.openxmlformats.org/drawingml/2006/main" xmlns:p="http://schemas.openxmlformats.org/presentationml/2006/main" xmlns:r="http://schemas.openxmlformats.org/officeDocument/2006/relationships">
+<p:sld xmlns:a="http://schemas.openxmlformats.org/drawingml/2006/main" xmlns:r="http://schemas.openxmlformats.org/officeDocument/2006/relationships" xmlns:p="http://schemas.openxmlformats.org/presentationml/2006/main">
   <p:cSld>
     <p:spTree>
       <p:nvGrpSpPr>
@@ -15819,7 +16600,14 @@
         <p:cNvGrpSpPr/>
         <p:nvPr/>
       </p:nvGrpSpPr>
-      <p:grpSpPr/>
+      <p:grpSpPr>
+        <a:xfrm>
+          <a:off x="0" y="0"/>
+          <a:ext cx="0" cy="0"/>
+          <a:chOff x="0" y="0"/>
+          <a:chExt cx="0" cy="0"/>
+        </a:xfrm>
+      </p:grpSpPr>
       <p:sp>
         <p:nvSpPr>
           <p:cNvPr id="2" name="Rectangle 1"/>
@@ -15860,6 +16648,7 @@
           <a:lstStyle/>
           <a:p>
             <a:pPr algn="ctr"/>
+            <a:endParaRPr/>
           </a:p>
         </p:txBody>
       </p:sp>
@@ -15903,6 +16692,7 @@
           <a:lstStyle/>
           <a:p>
             <a:pPr algn="ctr"/>
+            <a:endParaRPr/>
           </a:p>
         </p:txBody>
       </p:sp>
@@ -16050,6 +16840,7 @@
           <a:lstStyle/>
           <a:p>
             <a:pPr algn="ctr"/>
+            <a:endParaRPr/>
           </a:p>
         </p:txBody>
       </p:sp>
@@ -16163,6 +16954,7 @@
           <a:lstStyle/>
           <a:p>
             <a:pPr algn="ctr"/>
+            <a:endParaRPr/>
           </a:p>
         </p:txBody>
       </p:sp>
@@ -16277,6 +17069,7 @@
           <a:lstStyle/>
           <a:p>
             <a:pPr algn="ctr"/>
+            <a:endParaRPr/>
           </a:p>
         </p:txBody>
       </p:sp>
@@ -16391,6 +17184,7 @@
           <a:lstStyle/>
           <a:p>
             <a:pPr algn="ctr"/>
+            <a:endParaRPr/>
           </a:p>
         </p:txBody>
       </p:sp>
@@ -16505,6 +17299,7 @@
           <a:lstStyle/>
           <a:p>
             <a:pPr algn="ctr"/>
+            <a:endParaRPr/>
           </a:p>
         </p:txBody>
       </p:sp>
@@ -16618,6 +17413,7 @@
           <a:lstStyle/>
           <a:p>
             <a:pPr algn="ctr"/>
+            <a:endParaRPr/>
           </a:p>
         </p:txBody>
       </p:sp>
@@ -16697,6 +17493,7 @@
           <a:lstStyle/>
           <a:p>
             <a:pPr algn="ctr"/>
+            <a:endParaRPr/>
           </a:p>
         </p:txBody>
       </p:sp>
@@ -17355,7 +18152,7 @@
 </file>
 
 <file path=ppt/slides/slide9.xml><?xml version="1.0" encoding="utf-8"?>
-<p:sld xmlns:a="http://schemas.openxmlformats.org/drawingml/2006/main" xmlns:p="http://schemas.openxmlformats.org/presentationml/2006/main" xmlns:r="http://schemas.openxmlformats.org/officeDocument/2006/relationships">
+<p:sld xmlns:a="http://schemas.openxmlformats.org/drawingml/2006/main" xmlns:r="http://schemas.openxmlformats.org/officeDocument/2006/relationships" xmlns:p="http://schemas.openxmlformats.org/presentationml/2006/main">
   <p:cSld>
     <p:spTree>
       <p:nvGrpSpPr>
@@ -17363,7 +18160,14 @@
         <p:cNvGrpSpPr/>
         <p:nvPr/>
       </p:nvGrpSpPr>
-      <p:grpSpPr/>
+      <p:grpSpPr>
+        <a:xfrm>
+          <a:off x="0" y="0"/>
+          <a:ext cx="0" cy="0"/>
+          <a:chOff x="0" y="0"/>
+          <a:chExt cx="0" cy="0"/>
+        </a:xfrm>
+      </p:grpSpPr>
       <p:sp>
         <p:nvSpPr>
           <p:cNvPr id="2" name="Rectangle 1"/>
@@ -17404,6 +18208,7 @@
           <a:lstStyle/>
           <a:p>
             <a:pPr algn="ctr"/>
+            <a:endParaRPr/>
           </a:p>
         </p:txBody>
       </p:sp>
@@ -17447,6 +18252,7 @@
           <a:lstStyle/>
           <a:p>
             <a:pPr algn="ctr"/>
+            <a:endParaRPr/>
           </a:p>
         </p:txBody>
       </p:sp>
@@ -17592,6 +18398,7 @@
           <a:lstStyle/>
           <a:p>
             <a:pPr algn="ctr"/>
+            <a:endParaRPr/>
           </a:p>
         </p:txBody>
       </p:sp>
@@ -17635,6 +18442,7 @@
           <a:lstStyle/>
           <a:p>
             <a:pPr algn="ctr"/>
+            <a:endParaRPr/>
           </a:p>
         </p:txBody>
       </p:sp>
@@ -17916,6 +18724,7 @@
           <a:lstStyle/>
           <a:p>
             <a:pPr algn="ctr"/>
+            <a:endParaRPr/>
           </a:p>
         </p:txBody>
       </p:sp>
@@ -17959,6 +18768,7 @@
           <a:lstStyle/>
           <a:p>
             <a:pPr algn="ctr"/>
+            <a:endParaRPr/>
           </a:p>
         </p:txBody>
       </p:sp>
@@ -18240,6 +19050,7 @@
           <a:lstStyle/>
           <a:p>
             <a:pPr algn="ctr"/>
+            <a:endParaRPr/>
           </a:p>
         </p:txBody>
       </p:sp>
@@ -18283,6 +19094,7 @@
           <a:lstStyle/>
           <a:p>
             <a:pPr algn="ctr"/>
+            <a:endParaRPr/>
           </a:p>
         </p:txBody>
       </p:sp>
@@ -18362,6 +19174,7 @@
           <a:lstStyle/>
           <a:p>
             <a:pPr algn="ctr"/>
+            <a:endParaRPr/>
           </a:p>
         </p:txBody>
       </p:sp>
@@ -18476,6 +19289,7 @@
           <a:lstStyle/>
           <a:p>
             <a:pPr algn="ctr"/>
+            <a:endParaRPr/>
           </a:p>
         </p:txBody>
       </p:sp>
@@ -18590,6 +19404,7 @@
           <a:lstStyle/>
           <a:p>
             <a:pPr algn="ctr"/>
+            <a:endParaRPr/>
           </a:p>
         </p:txBody>
       </p:sp>
@@ -18704,6 +19519,7 @@
           <a:lstStyle/>
           <a:p>
             <a:pPr algn="ctr"/>
+            <a:endParaRPr/>
           </a:p>
         </p:txBody>
       </p:sp>
@@ -18818,6 +19634,7 @@
           <a:lstStyle/>
           <a:p>
             <a:pPr algn="ctr"/>
+            <a:endParaRPr/>
           </a:p>
         </p:txBody>
       </p:sp>
@@ -18932,6 +19749,7 @@
           <a:lstStyle/>
           <a:p>
             <a:pPr algn="ctr"/>
+            <a:endParaRPr/>
           </a:p>
         </p:txBody>
       </p:sp>
@@ -19330,4 +20148,319 @@
   </a:objectDefaults>
   <a:extraClrSchemeLst/>
 </a:theme>
+</file>
+
+<file path=ppt/theme/theme2.xml><?xml version="1.0" encoding="utf-8"?>
+<a:theme xmlns:a="http://schemas.openxmlformats.org/drawingml/2006/main" name="Tema do Office">
+  <a:themeElements>
+    <a:clrScheme name="Office">
+      <a:dk1>
+        <a:sysClr val="windowText" lastClr="000000"/>
+      </a:dk1>
+      <a:lt1>
+        <a:sysClr val="window" lastClr="FFFFFF"/>
+      </a:lt1>
+      <a:dk2>
+        <a:srgbClr val="0E2841"/>
+      </a:dk2>
+      <a:lt2>
+        <a:srgbClr val="E8E8E8"/>
+      </a:lt2>
+      <a:accent1>
+        <a:srgbClr val="156082"/>
+      </a:accent1>
+      <a:accent2>
+        <a:srgbClr val="E97132"/>
+      </a:accent2>
+      <a:accent3>
+        <a:srgbClr val="196B24"/>
+      </a:accent3>
+      <a:accent4>
+        <a:srgbClr val="0F9ED5"/>
+      </a:accent4>
+      <a:accent5>
+        <a:srgbClr val="A02B93"/>
+      </a:accent5>
+      <a:accent6>
+        <a:srgbClr val="4EA72E"/>
+      </a:accent6>
+      <a:hlink>
+        <a:srgbClr val="467886"/>
+      </a:hlink>
+      <a:folHlink>
+        <a:srgbClr val="96607D"/>
+      </a:folHlink>
+    </a:clrScheme>
+    <a:fontScheme name="Office">
+      <a:majorFont>
+        <a:latin typeface="Aptos Display" panose="02110004020202020204"/>
+        <a:ea typeface=""/>
+        <a:cs typeface=""/>
+        <a:font script="Jpan" typeface="游ゴシック Light"/>
+        <a:font script="Hang" typeface="맑은 고딕"/>
+        <a:font script="Hans" typeface="等线 Light"/>
+        <a:font script="Hant" typeface="新細明體"/>
+        <a:font script="Arab" typeface="Times New Roman"/>
+        <a:font script="Hebr" typeface="Times New Roman"/>
+        <a:font script="Thai" typeface="Angsana New"/>
+        <a:font script="Ethi" typeface="Nyala"/>
+        <a:font script="Beng" typeface="Vrinda"/>
+        <a:font script="Gujr" typeface="Shruti"/>
+        <a:font script="Khmr" typeface="MoolBoran"/>
+        <a:font script="Knda" typeface="Tunga"/>
+        <a:font script="Guru" typeface="Raavi"/>
+        <a:font script="Cans" typeface="Euphemia"/>
+        <a:font script="Cher" typeface="Plantagenet Cherokee"/>
+        <a:font script="Yiii" typeface="Microsoft Yi Baiti"/>
+        <a:font script="Tibt" typeface="Microsoft Himalaya"/>
+        <a:font script="Thaa" typeface="MV Boli"/>
+        <a:font script="Deva" typeface="Mangal"/>
+        <a:font script="Telu" typeface="Gautami"/>
+        <a:font script="Taml" typeface="Latha"/>
+        <a:font script="Syrc" typeface="Estrangelo Edessa"/>
+        <a:font script="Orya" typeface="Kalinga"/>
+        <a:font script="Mlym" typeface="Kartika"/>
+        <a:font script="Laoo" typeface="DokChampa"/>
+        <a:font script="Sinh" typeface="Iskoola Pota"/>
+        <a:font script="Mong" typeface="Mongolian Baiti"/>
+        <a:font script="Viet" typeface="Times New Roman"/>
+        <a:font script="Uigh" typeface="Microsoft Uighur"/>
+        <a:font script="Geor" typeface="Sylfaen"/>
+        <a:font script="Armn" typeface="Arial"/>
+        <a:font script="Bugi" typeface="Leelawadee UI"/>
+        <a:font script="Bopo" typeface="Microsoft JhengHei"/>
+        <a:font script="Java" typeface="Javanese Text"/>
+        <a:font script="Lisu" typeface="Segoe UI"/>
+        <a:font script="Mymr" typeface="Myanmar Text"/>
+        <a:font script="Nkoo" typeface="Ebrima"/>
+        <a:font script="Olck" typeface="Nirmala UI"/>
+        <a:font script="Osma" typeface="Ebrima"/>
+        <a:font script="Phag" typeface="Phagspa"/>
+        <a:font script="Syrn" typeface="Estrangelo Edessa"/>
+        <a:font script="Syrj" typeface="Estrangelo Edessa"/>
+        <a:font script="Syre" typeface="Estrangelo Edessa"/>
+        <a:font script="Sora" typeface="Nirmala UI"/>
+        <a:font script="Tale" typeface="Microsoft Tai Le"/>
+        <a:font script="Talu" typeface="Microsoft New Tai Lue"/>
+        <a:font script="Tfng" typeface="Ebrima"/>
+      </a:majorFont>
+      <a:minorFont>
+        <a:latin typeface="Aptos" panose="02110004020202020204"/>
+        <a:ea typeface=""/>
+        <a:cs typeface=""/>
+        <a:font script="Jpan" typeface="游ゴシック"/>
+        <a:font script="Hang" typeface="맑은 고딕"/>
+        <a:font script="Hans" typeface="等线"/>
+        <a:font script="Hant" typeface="新細明體"/>
+        <a:font script="Arab" typeface="Arial"/>
+        <a:font script="Hebr" typeface="Arial"/>
+        <a:font script="Thai" typeface="Cordia New"/>
+        <a:font script="Ethi" typeface="Nyala"/>
+        <a:font script="Beng" typeface="Vrinda"/>
+        <a:font script="Gujr" typeface="Shruti"/>
+        <a:font script="Khmr" typeface="DaunPenh"/>
+        <a:font script="Knda" typeface="Tunga"/>
+        <a:font script="Guru" typeface="Raavi"/>
+        <a:font script="Cans" typeface="Euphemia"/>
+        <a:font script="Cher" typeface="Plantagenet Cherokee"/>
+        <a:font script="Yiii" typeface="Microsoft Yi Baiti"/>
+        <a:font script="Tibt" typeface="Microsoft Himalaya"/>
+        <a:font script="Thaa" typeface="MV Boli"/>
+        <a:font script="Deva" typeface="Mangal"/>
+        <a:font script="Telu" typeface="Gautami"/>
+        <a:font script="Taml" typeface="Latha"/>
+        <a:font script="Syrc" typeface="Estrangelo Edessa"/>
+        <a:font script="Orya" typeface="Kalinga"/>
+        <a:font script="Mlym" typeface="Kartika"/>
+        <a:font script="Laoo" typeface="DokChampa"/>
+        <a:font script="Sinh" typeface="Iskoola Pota"/>
+        <a:font script="Mong" typeface="Mongolian Baiti"/>
+        <a:font script="Viet" typeface="Arial"/>
+        <a:font script="Uigh" typeface="Microsoft Uighur"/>
+        <a:font script="Geor" typeface="Sylfaen"/>
+        <a:font script="Armn" typeface="Arial"/>
+        <a:font script="Bugi" typeface="Leelawadee UI"/>
+        <a:font script="Bopo" typeface="Microsoft JhengHei"/>
+        <a:font script="Java" typeface="Javanese Text"/>
+        <a:font script="Lisu" typeface="Segoe UI"/>
+        <a:font script="Mymr" typeface="Myanmar Text"/>
+        <a:font script="Nkoo" typeface="Ebrima"/>
+        <a:font script="Olck" typeface="Nirmala UI"/>
+        <a:font script="Osma" typeface="Ebrima"/>
+        <a:font script="Phag" typeface="Phagspa"/>
+        <a:font script="Syrn" typeface="Estrangelo Edessa"/>
+        <a:font script="Syrj" typeface="Estrangelo Edessa"/>
+        <a:font script="Syre" typeface="Estrangelo Edessa"/>
+        <a:font script="Sora" typeface="Nirmala UI"/>
+        <a:font script="Tale" typeface="Microsoft Tai Le"/>
+        <a:font script="Talu" typeface="Microsoft New Tai Lue"/>
+        <a:font script="Tfng" typeface="Ebrima"/>
+      </a:minorFont>
+    </a:fontScheme>
+    <a:fmtScheme name="Office">
+      <a:fillStyleLst>
+        <a:solidFill>
+          <a:schemeClr val="phClr"/>
+        </a:solidFill>
+        <a:gradFill rotWithShape="1">
+          <a:gsLst>
+            <a:gs pos="0">
+              <a:schemeClr val="phClr">
+                <a:lumMod val="110000"/>
+                <a:satMod val="105000"/>
+                <a:tint val="67000"/>
+              </a:schemeClr>
+            </a:gs>
+            <a:gs pos="50000">
+              <a:schemeClr val="phClr">
+                <a:lumMod val="105000"/>
+                <a:satMod val="103000"/>
+                <a:tint val="73000"/>
+              </a:schemeClr>
+            </a:gs>
+            <a:gs pos="100000">
+              <a:schemeClr val="phClr">
+                <a:lumMod val="105000"/>
+                <a:satMod val="109000"/>
+                <a:tint val="81000"/>
+              </a:schemeClr>
+            </a:gs>
+          </a:gsLst>
+          <a:lin ang="5400000" scaled="0"/>
+        </a:gradFill>
+        <a:gradFill rotWithShape="1">
+          <a:gsLst>
+            <a:gs pos="0">
+              <a:schemeClr val="phClr">
+                <a:satMod val="103000"/>
+                <a:lumMod val="102000"/>
+                <a:tint val="94000"/>
+              </a:schemeClr>
+            </a:gs>
+            <a:gs pos="50000">
+              <a:schemeClr val="phClr">
+                <a:satMod val="110000"/>
+                <a:lumMod val="100000"/>
+                <a:shade val="100000"/>
+              </a:schemeClr>
+            </a:gs>
+            <a:gs pos="100000">
+              <a:schemeClr val="phClr">
+                <a:lumMod val="99000"/>
+                <a:satMod val="120000"/>
+                <a:shade val="78000"/>
+              </a:schemeClr>
+            </a:gs>
+          </a:gsLst>
+          <a:lin ang="5400000" scaled="0"/>
+        </a:gradFill>
+      </a:fillStyleLst>
+      <a:lnStyleLst>
+        <a:ln w="12700" cap="flat" cmpd="sng" algn="ctr">
+          <a:solidFill>
+            <a:schemeClr val="phClr"/>
+          </a:solidFill>
+          <a:prstDash val="solid"/>
+          <a:miter lim="800000"/>
+        </a:ln>
+        <a:ln w="19050" cap="flat" cmpd="sng" algn="ctr">
+          <a:solidFill>
+            <a:schemeClr val="phClr"/>
+          </a:solidFill>
+          <a:prstDash val="solid"/>
+          <a:miter lim="800000"/>
+        </a:ln>
+        <a:ln w="25400" cap="flat" cmpd="sng" algn="ctr">
+          <a:solidFill>
+            <a:schemeClr val="phClr"/>
+          </a:solidFill>
+          <a:prstDash val="solid"/>
+          <a:miter lim="800000"/>
+        </a:ln>
+      </a:lnStyleLst>
+      <a:effectStyleLst>
+        <a:effectStyle>
+          <a:effectLst/>
+        </a:effectStyle>
+        <a:effectStyle>
+          <a:effectLst/>
+        </a:effectStyle>
+        <a:effectStyle>
+          <a:effectLst>
+            <a:outerShdw blurRad="57150" dist="19050" dir="5400000" algn="ctr" rotWithShape="0">
+              <a:srgbClr val="000000">
+                <a:alpha val="63000"/>
+              </a:srgbClr>
+            </a:outerShdw>
+          </a:effectLst>
+        </a:effectStyle>
+      </a:effectStyleLst>
+      <a:bgFillStyleLst>
+        <a:solidFill>
+          <a:schemeClr val="phClr"/>
+        </a:solidFill>
+        <a:solidFill>
+          <a:schemeClr val="phClr">
+            <a:tint val="95000"/>
+            <a:satMod val="170000"/>
+          </a:schemeClr>
+        </a:solidFill>
+        <a:gradFill rotWithShape="1">
+          <a:gsLst>
+            <a:gs pos="0">
+              <a:schemeClr val="phClr">
+                <a:tint val="93000"/>
+                <a:satMod val="150000"/>
+                <a:shade val="98000"/>
+                <a:lumMod val="102000"/>
+              </a:schemeClr>
+            </a:gs>
+            <a:gs pos="50000">
+              <a:schemeClr val="phClr">
+                <a:tint val="98000"/>
+                <a:satMod val="130000"/>
+                <a:shade val="90000"/>
+                <a:lumMod val="103000"/>
+              </a:schemeClr>
+            </a:gs>
+            <a:gs pos="100000">
+              <a:schemeClr val="phClr">
+                <a:shade val="63000"/>
+                <a:satMod val="120000"/>
+              </a:schemeClr>
+            </a:gs>
+          </a:gsLst>
+          <a:lin ang="5400000" scaled="0"/>
+        </a:gradFill>
+      </a:bgFillStyleLst>
+    </a:fmtScheme>
+  </a:themeElements>
+  <a:objectDefaults>
+    <a:lnDef>
+      <a:spPr/>
+      <a:bodyPr/>
+      <a:lstStyle/>
+      <a:style>
+        <a:lnRef idx="2">
+          <a:schemeClr val="accent1"/>
+        </a:lnRef>
+        <a:fillRef idx="0">
+          <a:schemeClr val="accent1"/>
+        </a:fillRef>
+        <a:effectRef idx="1">
+          <a:schemeClr val="accent1"/>
+        </a:effectRef>
+        <a:fontRef idx="minor">
+          <a:schemeClr val="tx1"/>
+        </a:fontRef>
+      </a:style>
+    </a:lnDef>
+  </a:objectDefaults>
+  <a:extraClrSchemeLst/>
+  <a:extLst>
+    <a:ext uri="{05A4C25C-085E-4340-85A3-A5531E510DB2}">
+      <thm15:themeFamily xmlns:thm15="http://schemas.microsoft.com/office/thememl/2012/main" name="Office Theme" id="{2E142A2C-CD16-42D6-873A-C26D2A0506FA}" vid="{1BDDFF52-6CD6-40A5-AB3C-68EB2F1E4D0A}"/>
+    </a:ext>
+  </a:extLst>
+</a:theme>
 </file>